--- a/output/Project_Plan.pptx
+++ b/output/Project_Plan.pptx
@@ -8,6 +8,9 @@
     <p:sldId id="256" r:id="rId7"/>
     <p:sldId id="257" r:id="rId8"/>
     <p:sldId id="258" r:id="rId9"/>
+    <p:sldId id="259" r:id="rId10"/>
+    <p:sldId id="260" r:id="rId11"/>
+    <p:sldId id="261" r:id="rId12"/>
   </p:sldIdLst>
   <p:sldSz cx="12191695" cy="6858000" type="screen4x3"/>
   <p:notesSz cx="6858000" cy="9144000"/>
@@ -3083,6 +3086,14 @@
 <file path=ppt/slides/slide1.xml><?xml version="1.0" encoding="utf-8"?>
 <p:sld xmlns:a="http://schemas.openxmlformats.org/drawingml/2006/main" xmlns:p="http://schemas.openxmlformats.org/presentationml/2006/main" xmlns:r="http://schemas.openxmlformats.org/officeDocument/2006/relationships">
   <p:cSld>
+    <p:bg>
+      <p:bgPr>
+        <a:solidFill>
+          <a:srgbClr val="FFFFFF"/>
+        </a:solidFill>
+        <a:effectLst/>
+      </p:bgPr>
+    </p:bg>
     <p:spTree>
       <p:nvGrpSpPr>
         <p:cNvPr id="1" name=""/>
@@ -3099,7 +3110,7 @@
         <p:spPr>
           <a:xfrm>
             <a:off x="457200" y="320040"/>
-            <a:ext cx="11277295" cy="548640"/>
+            <a:ext cx="9265615" cy="548640"/>
           </a:xfrm>
           <a:prstGeom prst="rect">
             <a:avLst/>
@@ -3134,7 +3145,7 @@
         <p:spPr>
           <a:xfrm>
             <a:off x="457200" y="868680"/>
-            <a:ext cx="11277295" cy="320040"/>
+            <a:ext cx="9265615" cy="320040"/>
           </a:xfrm>
           <a:prstGeom prst="rect">
             <a:avLst/>
@@ -4458,6 +4469,121 @@
                 <a:latin typeface="Calibri"/>
               </a:rPr>
               <a:t>1</a:t>
+            </a:r>
+          </a:p>
+        </p:txBody>
+      </p:sp>
+      <p:sp>
+        <p:nvSpPr>
+          <p:cNvPr id="40" name="Theme switch"/>
+          <p:cNvSpPr/>
+          <p:nvPr/>
+        </p:nvSpPr>
+        <p:spPr>
+          <a:xfrm>
+            <a:off x="9960559" y="347472"/>
+            <a:ext cx="1810512" cy="402336"/>
+          </a:xfrm>
+          <a:prstGeom prst="roundRect">
+            <a:avLst>
+              <a:gd name="adj" fmla="val 50000"/>
+            </a:avLst>
+          </a:prstGeom>
+          <a:solidFill>
+            <a:srgbClr val="F3F4F6"/>
+          </a:solidFill>
+          <a:ln w="9525">
+            <a:solidFill>
+              <a:srgbClr val="E5E7EB"/>
+            </a:solidFill>
+          </a:ln>
+        </p:spPr>
+        <p:txBody>
+          <a:bodyPr rtlCol="0" anchor="ctr"/>
+          <a:lstStyle/>
+          <a:p>
+            <a:pPr algn="ctr"/>
+          </a:p>
+        </p:txBody>
+      </p:sp>
+      <p:sp>
+        <p:nvSpPr>
+          <p:cNvPr id="41" name="Theme light"/>
+          <p:cNvSpPr/>
+          <p:nvPr/>
+        </p:nvSpPr>
+        <p:spPr>
+          <a:xfrm>
+            <a:off x="9997135" y="384048"/>
+            <a:ext cx="841247" cy="329184"/>
+          </a:xfrm>
+          <a:prstGeom prst="roundRect">
+            <a:avLst>
+              <a:gd name="adj" fmla="val 50000"/>
+            </a:avLst>
+          </a:prstGeom>
+          <a:solidFill>
+            <a:srgbClr val="1F2937"/>
+          </a:solidFill>
+          <a:ln>
+            <a:noFill/>
+          </a:ln>
+        </p:spPr>
+        <p:txBody>
+          <a:bodyPr rtlCol="0" anchor="ctr" lIns="0" rIns="0" tIns="0" bIns="0" wrap="none"/>
+          <a:lstStyle/>
+          <a:p>
+            <a:pPr algn="ctr"/>
+            <a:r>
+              <a:rPr sz="1100" b="1">
+                <a:solidFill>
+                  <a:srgbClr val="FFFFFF"/>
+                </a:solidFill>
+                <a:latin typeface="Calibri"/>
+              </a:rPr>
+              <a:t>☀ Light</a:t>
+            </a:r>
+          </a:p>
+        </p:txBody>
+      </p:sp>
+      <p:sp>
+        <p:nvSpPr>
+          <p:cNvPr id="42" name="Theme dark">
+            <a:hlinkClick action="ppaction://hlinksldjump" r:id="rId2"/>
+          </p:cNvPr>
+          <p:cNvSpPr/>
+          <p:nvPr/>
+        </p:nvSpPr>
+        <p:spPr>
+          <a:xfrm>
+            <a:off x="10893247" y="384048"/>
+            <a:ext cx="841247" cy="329184"/>
+          </a:xfrm>
+          <a:prstGeom prst="roundRect">
+            <a:avLst>
+              <a:gd name="adj" fmla="val 50000"/>
+            </a:avLst>
+          </a:prstGeom>
+          <a:solidFill>
+            <a:srgbClr val="F3F4F6"/>
+          </a:solidFill>
+          <a:ln>
+            <a:noFill/>
+          </a:ln>
+        </p:spPr>
+        <p:txBody>
+          <a:bodyPr rtlCol="0" anchor="ctr" lIns="0" rIns="0" tIns="0" bIns="0" wrap="none"/>
+          <a:lstStyle/>
+          <a:p>
+            <a:pPr algn="ctr"/>
+            <a:r>
+              <a:rPr sz="1100" b="0">
+                <a:solidFill>
+                  <a:srgbClr val="6B7280"/>
+                </a:solidFill>
+                <a:latin typeface="Calibri"/>
+              </a:rPr>
+              <a:t>☾ Dark</a:t>
             </a:r>
           </a:p>
         </p:txBody>
@@ -4473,6 +4599,14 @@
 <file path=ppt/slides/slide2.xml><?xml version="1.0" encoding="utf-8"?>
 <p:sld xmlns:a="http://schemas.openxmlformats.org/drawingml/2006/main" xmlns:p="http://schemas.openxmlformats.org/presentationml/2006/main" xmlns:r="http://schemas.openxmlformats.org/officeDocument/2006/relationships">
   <p:cSld>
+    <p:bg>
+      <p:bgPr>
+        <a:solidFill>
+          <a:srgbClr val="FFFFFF"/>
+        </a:solidFill>
+        <a:effectLst/>
+      </p:bgPr>
+    </p:bg>
     <p:spTree>
       <p:nvGrpSpPr>
         <p:cNvPr id="1" name=""/>
@@ -4489,7 +4623,7 @@
         <p:spPr>
           <a:xfrm>
             <a:off x="457200" y="320040"/>
-            <a:ext cx="11277295" cy="548640"/>
+            <a:ext cx="9265615" cy="548640"/>
           </a:xfrm>
           <a:prstGeom prst="rect">
             <a:avLst/>
@@ -4524,7 +4658,7 @@
         <p:spPr>
           <a:xfrm>
             <a:off x="457200" y="868680"/>
-            <a:ext cx="11277295" cy="320040"/>
+            <a:ext cx="9265615" cy="320040"/>
           </a:xfrm>
           <a:prstGeom prst="rect">
             <a:avLst/>
@@ -6918,6 +7052,121 @@
                 <a:latin typeface="Calibri"/>
               </a:rPr>
               <a:t>2</a:t>
+            </a:r>
+          </a:p>
+        </p:txBody>
+      </p:sp>
+      <p:sp>
+        <p:nvSpPr>
+          <p:cNvPr id="73" name="Theme switch"/>
+          <p:cNvSpPr/>
+          <p:nvPr/>
+        </p:nvSpPr>
+        <p:spPr>
+          <a:xfrm>
+            <a:off x="9960559" y="347472"/>
+            <a:ext cx="1810512" cy="402336"/>
+          </a:xfrm>
+          <a:prstGeom prst="roundRect">
+            <a:avLst>
+              <a:gd name="adj" fmla="val 50000"/>
+            </a:avLst>
+          </a:prstGeom>
+          <a:solidFill>
+            <a:srgbClr val="F3F4F6"/>
+          </a:solidFill>
+          <a:ln w="9525">
+            <a:solidFill>
+              <a:srgbClr val="E5E7EB"/>
+            </a:solidFill>
+          </a:ln>
+        </p:spPr>
+        <p:txBody>
+          <a:bodyPr rtlCol="0" anchor="ctr"/>
+          <a:lstStyle/>
+          <a:p>
+            <a:pPr algn="ctr"/>
+          </a:p>
+        </p:txBody>
+      </p:sp>
+      <p:sp>
+        <p:nvSpPr>
+          <p:cNvPr id="74" name="Theme light"/>
+          <p:cNvSpPr/>
+          <p:nvPr/>
+        </p:nvSpPr>
+        <p:spPr>
+          <a:xfrm>
+            <a:off x="9997135" y="384048"/>
+            <a:ext cx="841247" cy="329184"/>
+          </a:xfrm>
+          <a:prstGeom prst="roundRect">
+            <a:avLst>
+              <a:gd name="adj" fmla="val 50000"/>
+            </a:avLst>
+          </a:prstGeom>
+          <a:solidFill>
+            <a:srgbClr val="1F2937"/>
+          </a:solidFill>
+          <a:ln>
+            <a:noFill/>
+          </a:ln>
+        </p:spPr>
+        <p:txBody>
+          <a:bodyPr rtlCol="0" anchor="ctr" lIns="0" rIns="0" tIns="0" bIns="0" wrap="none"/>
+          <a:lstStyle/>
+          <a:p>
+            <a:pPr algn="ctr"/>
+            <a:r>
+              <a:rPr sz="1100" b="1">
+                <a:solidFill>
+                  <a:srgbClr val="FFFFFF"/>
+                </a:solidFill>
+                <a:latin typeface="Calibri"/>
+              </a:rPr>
+              <a:t>☀ Light</a:t>
+            </a:r>
+          </a:p>
+        </p:txBody>
+      </p:sp>
+      <p:sp>
+        <p:nvSpPr>
+          <p:cNvPr id="75" name="Theme dark">
+            <a:hlinkClick action="ppaction://hlinksldjump" r:id="rId2"/>
+          </p:cNvPr>
+          <p:cNvSpPr/>
+          <p:nvPr/>
+        </p:nvSpPr>
+        <p:spPr>
+          <a:xfrm>
+            <a:off x="10893247" y="384048"/>
+            <a:ext cx="841247" cy="329184"/>
+          </a:xfrm>
+          <a:prstGeom prst="roundRect">
+            <a:avLst>
+              <a:gd name="adj" fmla="val 50000"/>
+            </a:avLst>
+          </a:prstGeom>
+          <a:solidFill>
+            <a:srgbClr val="F3F4F6"/>
+          </a:solidFill>
+          <a:ln>
+            <a:noFill/>
+          </a:ln>
+        </p:spPr>
+        <p:txBody>
+          <a:bodyPr rtlCol="0" anchor="ctr" lIns="0" rIns="0" tIns="0" bIns="0" wrap="none"/>
+          <a:lstStyle/>
+          <a:p>
+            <a:pPr algn="ctr"/>
+            <a:r>
+              <a:rPr sz="1100" b="0">
+                <a:solidFill>
+                  <a:srgbClr val="6B7280"/>
+                </a:solidFill>
+                <a:latin typeface="Calibri"/>
+              </a:rPr>
+              <a:t>☾ Dark</a:t>
             </a:r>
           </a:p>
         </p:txBody>
@@ -6933,6 +7182,14 @@
 <file path=ppt/slides/slide3.xml><?xml version="1.0" encoding="utf-8"?>
 <p:sld xmlns:a="http://schemas.openxmlformats.org/drawingml/2006/main" xmlns:p="http://schemas.openxmlformats.org/presentationml/2006/main" xmlns:r="http://schemas.openxmlformats.org/officeDocument/2006/relationships">
   <p:cSld>
+    <p:bg>
+      <p:bgPr>
+        <a:solidFill>
+          <a:srgbClr val="FFFFFF"/>
+        </a:solidFill>
+        <a:effectLst/>
+      </p:bgPr>
+    </p:bg>
     <p:spTree>
       <p:nvGrpSpPr>
         <p:cNvPr id="1" name=""/>
@@ -6949,7 +7206,7 @@
         <p:spPr>
           <a:xfrm>
             <a:off x="457200" y="320040"/>
-            <a:ext cx="11277295" cy="548640"/>
+            <a:ext cx="9265615" cy="548640"/>
           </a:xfrm>
           <a:prstGeom prst="rect">
             <a:avLst/>
@@ -6984,7 +7241,7 @@
         <p:spPr>
           <a:xfrm>
             <a:off x="457200" y="868680"/>
-            <a:ext cx="11277295" cy="320040"/>
+            <a:ext cx="9265615" cy="320040"/>
           </a:xfrm>
           <a:prstGeom prst="rect">
             <a:avLst/>
@@ -7056,6 +7313,26 @@
                     </a:p>
                   </a:txBody>
                   <a:tcPr marL="73152" marR="73152" anchor="ctr">
+                    <a:lnL w="9525">
+                      <a:solidFill>
+                        <a:srgbClr val="E5E7EB"/>
+                      </a:solidFill>
+                    </a:lnL>
+                    <a:lnR w="9525">
+                      <a:solidFill>
+                        <a:srgbClr val="E5E7EB"/>
+                      </a:solidFill>
+                    </a:lnR>
+                    <a:lnT w="9525">
+                      <a:solidFill>
+                        <a:srgbClr val="E5E7EB"/>
+                      </a:solidFill>
+                    </a:lnT>
+                    <a:lnB w="9525">
+                      <a:solidFill>
+                        <a:srgbClr val="E5E7EB"/>
+                      </a:solidFill>
+                    </a:lnB>
                     <a:solidFill>
                       <a:srgbClr val="1F2937"/>
                     </a:solidFill>
@@ -7079,6 +7356,26 @@
                     </a:p>
                   </a:txBody>
                   <a:tcPr marL="73152" marR="73152" anchor="ctr">
+                    <a:lnL w="9525">
+                      <a:solidFill>
+                        <a:srgbClr val="E5E7EB"/>
+                      </a:solidFill>
+                    </a:lnL>
+                    <a:lnR w="9525">
+                      <a:solidFill>
+                        <a:srgbClr val="E5E7EB"/>
+                      </a:solidFill>
+                    </a:lnR>
+                    <a:lnT w="9525">
+                      <a:solidFill>
+                        <a:srgbClr val="E5E7EB"/>
+                      </a:solidFill>
+                    </a:lnT>
+                    <a:lnB w="9525">
+                      <a:solidFill>
+                        <a:srgbClr val="E5E7EB"/>
+                      </a:solidFill>
+                    </a:lnB>
                     <a:solidFill>
                       <a:srgbClr val="1F2937"/>
                     </a:solidFill>
@@ -7102,6 +7399,26 @@
                     </a:p>
                   </a:txBody>
                   <a:tcPr marL="73152" marR="73152" anchor="ctr">
+                    <a:lnL w="9525">
+                      <a:solidFill>
+                        <a:srgbClr val="E5E7EB"/>
+                      </a:solidFill>
+                    </a:lnL>
+                    <a:lnR w="9525">
+                      <a:solidFill>
+                        <a:srgbClr val="E5E7EB"/>
+                      </a:solidFill>
+                    </a:lnR>
+                    <a:lnT w="9525">
+                      <a:solidFill>
+                        <a:srgbClr val="E5E7EB"/>
+                      </a:solidFill>
+                    </a:lnT>
+                    <a:lnB w="9525">
+                      <a:solidFill>
+                        <a:srgbClr val="E5E7EB"/>
+                      </a:solidFill>
+                    </a:lnB>
                     <a:solidFill>
                       <a:srgbClr val="1F2937"/>
                     </a:solidFill>
@@ -7125,6 +7442,26 @@
                     </a:p>
                   </a:txBody>
                   <a:tcPr marL="73152" marR="73152" anchor="ctr">
+                    <a:lnL w="9525">
+                      <a:solidFill>
+                        <a:srgbClr val="E5E7EB"/>
+                      </a:solidFill>
+                    </a:lnL>
+                    <a:lnR w="9525">
+                      <a:solidFill>
+                        <a:srgbClr val="E5E7EB"/>
+                      </a:solidFill>
+                    </a:lnR>
+                    <a:lnT w="9525">
+                      <a:solidFill>
+                        <a:srgbClr val="E5E7EB"/>
+                      </a:solidFill>
+                    </a:lnT>
+                    <a:lnB w="9525">
+                      <a:solidFill>
+                        <a:srgbClr val="E5E7EB"/>
+                      </a:solidFill>
+                    </a:lnB>
                     <a:solidFill>
                       <a:srgbClr val="1F2937"/>
                     </a:solidFill>
@@ -7148,6 +7485,26 @@
                     </a:p>
                   </a:txBody>
                   <a:tcPr marL="73152" marR="73152" anchor="ctr">
+                    <a:lnL w="9525">
+                      <a:solidFill>
+                        <a:srgbClr val="E5E7EB"/>
+                      </a:solidFill>
+                    </a:lnL>
+                    <a:lnR w="9525">
+                      <a:solidFill>
+                        <a:srgbClr val="E5E7EB"/>
+                      </a:solidFill>
+                    </a:lnR>
+                    <a:lnT w="9525">
+                      <a:solidFill>
+                        <a:srgbClr val="E5E7EB"/>
+                      </a:solidFill>
+                    </a:lnT>
+                    <a:lnB w="9525">
+                      <a:solidFill>
+                        <a:srgbClr val="E5E7EB"/>
+                      </a:solidFill>
+                    </a:lnB>
                     <a:solidFill>
                       <a:srgbClr val="1F2937"/>
                     </a:solidFill>
@@ -7171,6 +7528,26 @@
                     </a:p>
                   </a:txBody>
                   <a:tcPr marL="73152" marR="73152" anchor="ctr">
+                    <a:lnL w="9525">
+                      <a:solidFill>
+                        <a:srgbClr val="E5E7EB"/>
+                      </a:solidFill>
+                    </a:lnL>
+                    <a:lnR w="9525">
+                      <a:solidFill>
+                        <a:srgbClr val="E5E7EB"/>
+                      </a:solidFill>
+                    </a:lnR>
+                    <a:lnT w="9525">
+                      <a:solidFill>
+                        <a:srgbClr val="E5E7EB"/>
+                      </a:solidFill>
+                    </a:lnT>
+                    <a:lnB w="9525">
+                      <a:solidFill>
+                        <a:srgbClr val="E5E7EB"/>
+                      </a:solidFill>
+                    </a:lnB>
                     <a:solidFill>
                       <a:srgbClr val="1F2937"/>
                     </a:solidFill>
@@ -7194,6 +7571,26 @@
                     </a:p>
                   </a:txBody>
                   <a:tcPr marL="73152" marR="73152" anchor="ctr">
+                    <a:lnL w="9525">
+                      <a:solidFill>
+                        <a:srgbClr val="E5E7EB"/>
+                      </a:solidFill>
+                    </a:lnL>
+                    <a:lnR w="9525">
+                      <a:solidFill>
+                        <a:srgbClr val="E5E7EB"/>
+                      </a:solidFill>
+                    </a:lnR>
+                    <a:lnT w="9525">
+                      <a:solidFill>
+                        <a:srgbClr val="E5E7EB"/>
+                      </a:solidFill>
+                    </a:lnT>
+                    <a:lnB w="9525">
+                      <a:solidFill>
+                        <a:srgbClr val="E5E7EB"/>
+                      </a:solidFill>
+                    </a:lnB>
                     <a:solidFill>
                       <a:srgbClr val="1F2937"/>
                     </a:solidFill>
@@ -7219,6 +7616,26 @@
                     </a:p>
                   </a:txBody>
                   <a:tcPr marL="73152" marR="73152" anchor="ctr">
+                    <a:lnL w="9525">
+                      <a:solidFill>
+                        <a:srgbClr val="E5E7EB"/>
+                      </a:solidFill>
+                    </a:lnL>
+                    <a:lnR w="9525">
+                      <a:solidFill>
+                        <a:srgbClr val="E5E7EB"/>
+                      </a:solidFill>
+                    </a:lnR>
+                    <a:lnT w="9525">
+                      <a:solidFill>
+                        <a:srgbClr val="E5E7EB"/>
+                      </a:solidFill>
+                    </a:lnT>
+                    <a:lnB w="9525">
+                      <a:solidFill>
+                        <a:srgbClr val="E5E7EB"/>
+                      </a:solidFill>
+                    </a:lnB>
                     <a:solidFill>
                       <a:srgbClr val="FFFFFF"/>
                     </a:solidFill>
@@ -7242,6 +7659,26 @@
                     </a:p>
                   </a:txBody>
                   <a:tcPr marL="73152" marR="73152" anchor="ctr">
+                    <a:lnL w="9525">
+                      <a:solidFill>
+                        <a:srgbClr val="E5E7EB"/>
+                      </a:solidFill>
+                    </a:lnL>
+                    <a:lnR w="9525">
+                      <a:solidFill>
+                        <a:srgbClr val="E5E7EB"/>
+                      </a:solidFill>
+                    </a:lnR>
+                    <a:lnT w="9525">
+                      <a:solidFill>
+                        <a:srgbClr val="E5E7EB"/>
+                      </a:solidFill>
+                    </a:lnT>
+                    <a:lnB w="9525">
+                      <a:solidFill>
+                        <a:srgbClr val="E5E7EB"/>
+                      </a:solidFill>
+                    </a:lnB>
                     <a:solidFill>
                       <a:srgbClr val="FFFFFF"/>
                     </a:solidFill>
@@ -7265,6 +7702,26 @@
                     </a:p>
                   </a:txBody>
                   <a:tcPr marL="73152" marR="73152" anchor="ctr">
+                    <a:lnL w="9525">
+                      <a:solidFill>
+                        <a:srgbClr val="E5E7EB"/>
+                      </a:solidFill>
+                    </a:lnL>
+                    <a:lnR w="9525">
+                      <a:solidFill>
+                        <a:srgbClr val="E5E7EB"/>
+                      </a:solidFill>
+                    </a:lnR>
+                    <a:lnT w="9525">
+                      <a:solidFill>
+                        <a:srgbClr val="E5E7EB"/>
+                      </a:solidFill>
+                    </a:lnT>
+                    <a:lnB w="9525">
+                      <a:solidFill>
+                        <a:srgbClr val="E5E7EB"/>
+                      </a:solidFill>
+                    </a:lnB>
                     <a:solidFill>
                       <a:srgbClr val="FFFFFF"/>
                     </a:solidFill>
@@ -7288,6 +7745,26 @@
                     </a:p>
                   </a:txBody>
                   <a:tcPr marL="73152" marR="73152" anchor="ctr">
+                    <a:lnL w="9525">
+                      <a:solidFill>
+                        <a:srgbClr val="E5E7EB"/>
+                      </a:solidFill>
+                    </a:lnL>
+                    <a:lnR w="9525">
+                      <a:solidFill>
+                        <a:srgbClr val="E5E7EB"/>
+                      </a:solidFill>
+                    </a:lnR>
+                    <a:lnT w="9525">
+                      <a:solidFill>
+                        <a:srgbClr val="E5E7EB"/>
+                      </a:solidFill>
+                    </a:lnT>
+                    <a:lnB w="9525">
+                      <a:solidFill>
+                        <a:srgbClr val="E5E7EB"/>
+                      </a:solidFill>
+                    </a:lnB>
                     <a:solidFill>
                       <a:srgbClr val="FFFFFF"/>
                     </a:solidFill>
@@ -7311,6 +7788,26 @@
                     </a:p>
                   </a:txBody>
                   <a:tcPr marL="73152" marR="73152" anchor="ctr">
+                    <a:lnL w="9525">
+                      <a:solidFill>
+                        <a:srgbClr val="E5E7EB"/>
+                      </a:solidFill>
+                    </a:lnL>
+                    <a:lnR w="9525">
+                      <a:solidFill>
+                        <a:srgbClr val="E5E7EB"/>
+                      </a:solidFill>
+                    </a:lnR>
+                    <a:lnT w="9525">
+                      <a:solidFill>
+                        <a:srgbClr val="E5E7EB"/>
+                      </a:solidFill>
+                    </a:lnT>
+                    <a:lnB w="9525">
+                      <a:solidFill>
+                        <a:srgbClr val="E5E7EB"/>
+                      </a:solidFill>
+                    </a:lnB>
                     <a:solidFill>
                       <a:srgbClr val="FFFFFF"/>
                     </a:solidFill>
@@ -7334,6 +7831,26 @@
                     </a:p>
                   </a:txBody>
                   <a:tcPr marL="73152" marR="73152" anchor="ctr">
+                    <a:lnL w="9525">
+                      <a:solidFill>
+                        <a:srgbClr val="E5E7EB"/>
+                      </a:solidFill>
+                    </a:lnL>
+                    <a:lnR w="9525">
+                      <a:solidFill>
+                        <a:srgbClr val="E5E7EB"/>
+                      </a:solidFill>
+                    </a:lnR>
+                    <a:lnT w="9525">
+                      <a:solidFill>
+                        <a:srgbClr val="E5E7EB"/>
+                      </a:solidFill>
+                    </a:lnT>
+                    <a:lnB w="9525">
+                      <a:solidFill>
+                        <a:srgbClr val="E5E7EB"/>
+                      </a:solidFill>
+                    </a:lnB>
                     <a:solidFill>
                       <a:srgbClr val="FFFFFF"/>
                     </a:solidFill>
@@ -7357,6 +7874,26 @@
                     </a:p>
                   </a:txBody>
                   <a:tcPr marL="73152" marR="73152" anchor="ctr">
+                    <a:lnL w="9525">
+                      <a:solidFill>
+                        <a:srgbClr val="E5E7EB"/>
+                      </a:solidFill>
+                    </a:lnL>
+                    <a:lnR w="9525">
+                      <a:solidFill>
+                        <a:srgbClr val="E5E7EB"/>
+                      </a:solidFill>
+                    </a:lnR>
+                    <a:lnT w="9525">
+                      <a:solidFill>
+                        <a:srgbClr val="E5E7EB"/>
+                      </a:solidFill>
+                    </a:lnT>
+                    <a:lnB w="9525">
+                      <a:solidFill>
+                        <a:srgbClr val="E5E7EB"/>
+                      </a:solidFill>
+                    </a:lnB>
                     <a:solidFill>
                       <a:srgbClr val="FFFFFF"/>
                     </a:solidFill>
@@ -7382,6 +7919,26 @@
                     </a:p>
                   </a:txBody>
                   <a:tcPr marL="73152" marR="73152" anchor="ctr">
+                    <a:lnL w="9525">
+                      <a:solidFill>
+                        <a:srgbClr val="E5E7EB"/>
+                      </a:solidFill>
+                    </a:lnL>
+                    <a:lnR w="9525">
+                      <a:solidFill>
+                        <a:srgbClr val="E5E7EB"/>
+                      </a:solidFill>
+                    </a:lnR>
+                    <a:lnT w="9525">
+                      <a:solidFill>
+                        <a:srgbClr val="E5E7EB"/>
+                      </a:solidFill>
+                    </a:lnT>
+                    <a:lnB w="9525">
+                      <a:solidFill>
+                        <a:srgbClr val="E5E7EB"/>
+                      </a:solidFill>
+                    </a:lnB>
                     <a:solidFill>
                       <a:srgbClr val="F3F4F6"/>
                     </a:solidFill>
@@ -7405,6 +7962,26 @@
                     </a:p>
                   </a:txBody>
                   <a:tcPr marL="73152" marR="73152" anchor="ctr">
+                    <a:lnL w="9525">
+                      <a:solidFill>
+                        <a:srgbClr val="E5E7EB"/>
+                      </a:solidFill>
+                    </a:lnL>
+                    <a:lnR w="9525">
+                      <a:solidFill>
+                        <a:srgbClr val="E5E7EB"/>
+                      </a:solidFill>
+                    </a:lnR>
+                    <a:lnT w="9525">
+                      <a:solidFill>
+                        <a:srgbClr val="E5E7EB"/>
+                      </a:solidFill>
+                    </a:lnT>
+                    <a:lnB w="9525">
+                      <a:solidFill>
+                        <a:srgbClr val="E5E7EB"/>
+                      </a:solidFill>
+                    </a:lnB>
                     <a:solidFill>
                       <a:srgbClr val="F3F4F6"/>
                     </a:solidFill>
@@ -7428,6 +8005,26 @@
                     </a:p>
                   </a:txBody>
                   <a:tcPr marL="73152" marR="73152" anchor="ctr">
+                    <a:lnL w="9525">
+                      <a:solidFill>
+                        <a:srgbClr val="E5E7EB"/>
+                      </a:solidFill>
+                    </a:lnL>
+                    <a:lnR w="9525">
+                      <a:solidFill>
+                        <a:srgbClr val="E5E7EB"/>
+                      </a:solidFill>
+                    </a:lnR>
+                    <a:lnT w="9525">
+                      <a:solidFill>
+                        <a:srgbClr val="E5E7EB"/>
+                      </a:solidFill>
+                    </a:lnT>
+                    <a:lnB w="9525">
+                      <a:solidFill>
+                        <a:srgbClr val="E5E7EB"/>
+                      </a:solidFill>
+                    </a:lnB>
                     <a:solidFill>
                       <a:srgbClr val="F3F4F6"/>
                     </a:solidFill>
@@ -7451,6 +8048,26 @@
                     </a:p>
                   </a:txBody>
                   <a:tcPr marL="73152" marR="73152" anchor="ctr">
+                    <a:lnL w="9525">
+                      <a:solidFill>
+                        <a:srgbClr val="E5E7EB"/>
+                      </a:solidFill>
+                    </a:lnL>
+                    <a:lnR w="9525">
+                      <a:solidFill>
+                        <a:srgbClr val="E5E7EB"/>
+                      </a:solidFill>
+                    </a:lnR>
+                    <a:lnT w="9525">
+                      <a:solidFill>
+                        <a:srgbClr val="E5E7EB"/>
+                      </a:solidFill>
+                    </a:lnT>
+                    <a:lnB w="9525">
+                      <a:solidFill>
+                        <a:srgbClr val="E5E7EB"/>
+                      </a:solidFill>
+                    </a:lnB>
                     <a:solidFill>
                       <a:srgbClr val="F3F4F6"/>
                     </a:solidFill>
@@ -7474,6 +8091,26 @@
                     </a:p>
                   </a:txBody>
                   <a:tcPr marL="73152" marR="73152" anchor="ctr">
+                    <a:lnL w="9525">
+                      <a:solidFill>
+                        <a:srgbClr val="E5E7EB"/>
+                      </a:solidFill>
+                    </a:lnL>
+                    <a:lnR w="9525">
+                      <a:solidFill>
+                        <a:srgbClr val="E5E7EB"/>
+                      </a:solidFill>
+                    </a:lnR>
+                    <a:lnT w="9525">
+                      <a:solidFill>
+                        <a:srgbClr val="E5E7EB"/>
+                      </a:solidFill>
+                    </a:lnT>
+                    <a:lnB w="9525">
+                      <a:solidFill>
+                        <a:srgbClr val="E5E7EB"/>
+                      </a:solidFill>
+                    </a:lnB>
                     <a:solidFill>
                       <a:srgbClr val="F3F4F6"/>
                     </a:solidFill>
@@ -7497,6 +8134,26 @@
                     </a:p>
                   </a:txBody>
                   <a:tcPr marL="73152" marR="73152" anchor="ctr">
+                    <a:lnL w="9525">
+                      <a:solidFill>
+                        <a:srgbClr val="E5E7EB"/>
+                      </a:solidFill>
+                    </a:lnL>
+                    <a:lnR w="9525">
+                      <a:solidFill>
+                        <a:srgbClr val="E5E7EB"/>
+                      </a:solidFill>
+                    </a:lnR>
+                    <a:lnT w="9525">
+                      <a:solidFill>
+                        <a:srgbClr val="E5E7EB"/>
+                      </a:solidFill>
+                    </a:lnT>
+                    <a:lnB w="9525">
+                      <a:solidFill>
+                        <a:srgbClr val="E5E7EB"/>
+                      </a:solidFill>
+                    </a:lnB>
                     <a:solidFill>
                       <a:srgbClr val="F3F4F6"/>
                     </a:solidFill>
@@ -7520,6 +8177,26 @@
                     </a:p>
                   </a:txBody>
                   <a:tcPr marL="73152" marR="73152" anchor="ctr">
+                    <a:lnL w="9525">
+                      <a:solidFill>
+                        <a:srgbClr val="E5E7EB"/>
+                      </a:solidFill>
+                    </a:lnL>
+                    <a:lnR w="9525">
+                      <a:solidFill>
+                        <a:srgbClr val="E5E7EB"/>
+                      </a:solidFill>
+                    </a:lnR>
+                    <a:lnT w="9525">
+                      <a:solidFill>
+                        <a:srgbClr val="E5E7EB"/>
+                      </a:solidFill>
+                    </a:lnT>
+                    <a:lnB w="9525">
+                      <a:solidFill>
+                        <a:srgbClr val="E5E7EB"/>
+                      </a:solidFill>
+                    </a:lnB>
                     <a:solidFill>
                       <a:srgbClr val="F3F4F6"/>
                     </a:solidFill>
@@ -7545,6 +8222,26 @@
                     </a:p>
                   </a:txBody>
                   <a:tcPr marL="73152" marR="73152" anchor="ctr">
+                    <a:lnL w="9525">
+                      <a:solidFill>
+                        <a:srgbClr val="E5E7EB"/>
+                      </a:solidFill>
+                    </a:lnL>
+                    <a:lnR w="9525">
+                      <a:solidFill>
+                        <a:srgbClr val="E5E7EB"/>
+                      </a:solidFill>
+                    </a:lnR>
+                    <a:lnT w="9525">
+                      <a:solidFill>
+                        <a:srgbClr val="E5E7EB"/>
+                      </a:solidFill>
+                    </a:lnT>
+                    <a:lnB w="9525">
+                      <a:solidFill>
+                        <a:srgbClr val="E5E7EB"/>
+                      </a:solidFill>
+                    </a:lnB>
                     <a:solidFill>
                       <a:srgbClr val="FFFFFF"/>
                     </a:solidFill>
@@ -7568,6 +8265,26 @@
                     </a:p>
                   </a:txBody>
                   <a:tcPr marL="73152" marR="73152" anchor="ctr">
+                    <a:lnL w="9525">
+                      <a:solidFill>
+                        <a:srgbClr val="E5E7EB"/>
+                      </a:solidFill>
+                    </a:lnL>
+                    <a:lnR w="9525">
+                      <a:solidFill>
+                        <a:srgbClr val="E5E7EB"/>
+                      </a:solidFill>
+                    </a:lnR>
+                    <a:lnT w="9525">
+                      <a:solidFill>
+                        <a:srgbClr val="E5E7EB"/>
+                      </a:solidFill>
+                    </a:lnT>
+                    <a:lnB w="9525">
+                      <a:solidFill>
+                        <a:srgbClr val="E5E7EB"/>
+                      </a:solidFill>
+                    </a:lnB>
                     <a:solidFill>
                       <a:srgbClr val="FFFFFF"/>
                     </a:solidFill>
@@ -7591,6 +8308,26 @@
                     </a:p>
                   </a:txBody>
                   <a:tcPr marL="73152" marR="73152" anchor="ctr">
+                    <a:lnL w="9525">
+                      <a:solidFill>
+                        <a:srgbClr val="E5E7EB"/>
+                      </a:solidFill>
+                    </a:lnL>
+                    <a:lnR w="9525">
+                      <a:solidFill>
+                        <a:srgbClr val="E5E7EB"/>
+                      </a:solidFill>
+                    </a:lnR>
+                    <a:lnT w="9525">
+                      <a:solidFill>
+                        <a:srgbClr val="E5E7EB"/>
+                      </a:solidFill>
+                    </a:lnT>
+                    <a:lnB w="9525">
+                      <a:solidFill>
+                        <a:srgbClr val="E5E7EB"/>
+                      </a:solidFill>
+                    </a:lnB>
                     <a:solidFill>
                       <a:srgbClr val="FFFFFF"/>
                     </a:solidFill>
@@ -7614,6 +8351,26 @@
                     </a:p>
                   </a:txBody>
                   <a:tcPr marL="73152" marR="73152" anchor="ctr">
+                    <a:lnL w="9525">
+                      <a:solidFill>
+                        <a:srgbClr val="E5E7EB"/>
+                      </a:solidFill>
+                    </a:lnL>
+                    <a:lnR w="9525">
+                      <a:solidFill>
+                        <a:srgbClr val="E5E7EB"/>
+                      </a:solidFill>
+                    </a:lnR>
+                    <a:lnT w="9525">
+                      <a:solidFill>
+                        <a:srgbClr val="E5E7EB"/>
+                      </a:solidFill>
+                    </a:lnT>
+                    <a:lnB w="9525">
+                      <a:solidFill>
+                        <a:srgbClr val="E5E7EB"/>
+                      </a:solidFill>
+                    </a:lnB>
                     <a:solidFill>
                       <a:srgbClr val="FFFFFF"/>
                     </a:solidFill>
@@ -7637,6 +8394,26 @@
                     </a:p>
                   </a:txBody>
                   <a:tcPr marL="73152" marR="73152" anchor="ctr">
+                    <a:lnL w="9525">
+                      <a:solidFill>
+                        <a:srgbClr val="E5E7EB"/>
+                      </a:solidFill>
+                    </a:lnL>
+                    <a:lnR w="9525">
+                      <a:solidFill>
+                        <a:srgbClr val="E5E7EB"/>
+                      </a:solidFill>
+                    </a:lnR>
+                    <a:lnT w="9525">
+                      <a:solidFill>
+                        <a:srgbClr val="E5E7EB"/>
+                      </a:solidFill>
+                    </a:lnT>
+                    <a:lnB w="9525">
+                      <a:solidFill>
+                        <a:srgbClr val="E5E7EB"/>
+                      </a:solidFill>
+                    </a:lnB>
                     <a:solidFill>
                       <a:srgbClr val="FFFFFF"/>
                     </a:solidFill>
@@ -7660,6 +8437,26 @@
                     </a:p>
                   </a:txBody>
                   <a:tcPr marL="73152" marR="73152" anchor="ctr">
+                    <a:lnL w="9525">
+                      <a:solidFill>
+                        <a:srgbClr val="E5E7EB"/>
+                      </a:solidFill>
+                    </a:lnL>
+                    <a:lnR w="9525">
+                      <a:solidFill>
+                        <a:srgbClr val="E5E7EB"/>
+                      </a:solidFill>
+                    </a:lnR>
+                    <a:lnT w="9525">
+                      <a:solidFill>
+                        <a:srgbClr val="E5E7EB"/>
+                      </a:solidFill>
+                    </a:lnT>
+                    <a:lnB w="9525">
+                      <a:solidFill>
+                        <a:srgbClr val="E5E7EB"/>
+                      </a:solidFill>
+                    </a:lnB>
                     <a:solidFill>
                       <a:srgbClr val="FFFFFF"/>
                     </a:solidFill>
@@ -7683,6 +8480,26 @@
                     </a:p>
                   </a:txBody>
                   <a:tcPr marL="73152" marR="73152" anchor="ctr">
+                    <a:lnL w="9525">
+                      <a:solidFill>
+                        <a:srgbClr val="E5E7EB"/>
+                      </a:solidFill>
+                    </a:lnL>
+                    <a:lnR w="9525">
+                      <a:solidFill>
+                        <a:srgbClr val="E5E7EB"/>
+                      </a:solidFill>
+                    </a:lnR>
+                    <a:lnT w="9525">
+                      <a:solidFill>
+                        <a:srgbClr val="E5E7EB"/>
+                      </a:solidFill>
+                    </a:lnT>
+                    <a:lnB w="9525">
+                      <a:solidFill>
+                        <a:srgbClr val="E5E7EB"/>
+                      </a:solidFill>
+                    </a:lnB>
                     <a:solidFill>
                       <a:srgbClr val="FFFFFF"/>
                     </a:solidFill>
@@ -8204,6 +9021,6186 @@
                 <a:latin typeface="Calibri"/>
               </a:rPr>
               <a:t>3</a:t>
+            </a:r>
+          </a:p>
+        </p:txBody>
+      </p:sp>
+      <p:sp>
+        <p:nvSpPr>
+          <p:cNvPr id="18" name="Theme switch"/>
+          <p:cNvSpPr/>
+          <p:nvPr/>
+        </p:nvSpPr>
+        <p:spPr>
+          <a:xfrm>
+            <a:off x="9960559" y="347472"/>
+            <a:ext cx="1810512" cy="402336"/>
+          </a:xfrm>
+          <a:prstGeom prst="roundRect">
+            <a:avLst>
+              <a:gd name="adj" fmla="val 50000"/>
+            </a:avLst>
+          </a:prstGeom>
+          <a:solidFill>
+            <a:srgbClr val="F3F4F6"/>
+          </a:solidFill>
+          <a:ln w="9525">
+            <a:solidFill>
+              <a:srgbClr val="E5E7EB"/>
+            </a:solidFill>
+          </a:ln>
+        </p:spPr>
+        <p:txBody>
+          <a:bodyPr rtlCol="0" anchor="ctr"/>
+          <a:lstStyle/>
+          <a:p>
+            <a:pPr algn="ctr"/>
+          </a:p>
+        </p:txBody>
+      </p:sp>
+      <p:sp>
+        <p:nvSpPr>
+          <p:cNvPr id="19" name="Theme light"/>
+          <p:cNvSpPr/>
+          <p:nvPr/>
+        </p:nvSpPr>
+        <p:spPr>
+          <a:xfrm>
+            <a:off x="9997135" y="384048"/>
+            <a:ext cx="841247" cy="329184"/>
+          </a:xfrm>
+          <a:prstGeom prst="roundRect">
+            <a:avLst>
+              <a:gd name="adj" fmla="val 50000"/>
+            </a:avLst>
+          </a:prstGeom>
+          <a:solidFill>
+            <a:srgbClr val="1F2937"/>
+          </a:solidFill>
+          <a:ln>
+            <a:noFill/>
+          </a:ln>
+        </p:spPr>
+        <p:txBody>
+          <a:bodyPr rtlCol="0" anchor="ctr" lIns="0" rIns="0" tIns="0" bIns="0" wrap="none"/>
+          <a:lstStyle/>
+          <a:p>
+            <a:pPr algn="ctr"/>
+            <a:r>
+              <a:rPr sz="1100" b="1">
+                <a:solidFill>
+                  <a:srgbClr val="FFFFFF"/>
+                </a:solidFill>
+                <a:latin typeface="Calibri"/>
+              </a:rPr>
+              <a:t>☀ Light</a:t>
+            </a:r>
+          </a:p>
+        </p:txBody>
+      </p:sp>
+      <p:sp>
+        <p:nvSpPr>
+          <p:cNvPr id="20" name="Theme dark">
+            <a:hlinkClick action="ppaction://hlinksldjump" r:id="rId2"/>
+          </p:cNvPr>
+          <p:cNvSpPr/>
+          <p:nvPr/>
+        </p:nvSpPr>
+        <p:spPr>
+          <a:xfrm>
+            <a:off x="10893247" y="384048"/>
+            <a:ext cx="841247" cy="329184"/>
+          </a:xfrm>
+          <a:prstGeom prst="roundRect">
+            <a:avLst>
+              <a:gd name="adj" fmla="val 50000"/>
+            </a:avLst>
+          </a:prstGeom>
+          <a:solidFill>
+            <a:srgbClr val="F3F4F6"/>
+          </a:solidFill>
+          <a:ln>
+            <a:noFill/>
+          </a:ln>
+        </p:spPr>
+        <p:txBody>
+          <a:bodyPr rtlCol="0" anchor="ctr" lIns="0" rIns="0" tIns="0" bIns="0" wrap="none"/>
+          <a:lstStyle/>
+          <a:p>
+            <a:pPr algn="ctr"/>
+            <a:r>
+              <a:rPr sz="1100" b="0">
+                <a:solidFill>
+                  <a:srgbClr val="6B7280"/>
+                </a:solidFill>
+                <a:latin typeface="Calibri"/>
+              </a:rPr>
+              <a:t>☾ Dark</a:t>
+            </a:r>
+          </a:p>
+        </p:txBody>
+      </p:sp>
+    </p:spTree>
+  </p:cSld>
+  <p:clrMapOvr>
+    <a:masterClrMapping/>
+  </p:clrMapOvr>
+</p:sld>
+</file>
+
+<file path=ppt/slides/slide4.xml><?xml version="1.0" encoding="utf-8"?>
+<p:sld xmlns:a="http://schemas.openxmlformats.org/drawingml/2006/main" xmlns:p="http://schemas.openxmlformats.org/presentationml/2006/main" xmlns:r="http://schemas.openxmlformats.org/officeDocument/2006/relationships">
+  <p:cSld>
+    <p:bg>
+      <p:bgPr>
+        <a:solidFill>
+          <a:srgbClr val="0F172A"/>
+        </a:solidFill>
+        <a:effectLst/>
+      </p:bgPr>
+    </p:bg>
+    <p:spTree>
+      <p:nvGrpSpPr>
+        <p:cNvPr id="1" name=""/>
+        <p:cNvGrpSpPr/>
+        <p:nvPr/>
+      </p:nvGrpSpPr>
+      <p:grpSpPr/>
+      <p:sp>
+        <p:nvSpPr>
+          <p:cNvPr id="2" name="Title"/>
+          <p:cNvSpPr txBox="1"/>
+          <p:nvPr/>
+        </p:nvSpPr>
+        <p:spPr>
+          <a:xfrm>
+            <a:off x="457200" y="320040"/>
+            <a:ext cx="9265615" cy="548640"/>
+          </a:xfrm>
+          <a:prstGeom prst="rect">
+            <a:avLst/>
+          </a:prstGeom>
+          <a:noFill/>
+        </p:spPr>
+        <p:txBody>
+          <a:bodyPr wrap="square" lIns="0" rIns="0" tIns="0" bIns="0" anchor="t">
+            <a:spAutoFit/>
+          </a:bodyPr>
+          <a:lstStyle/>
+          <a:p>
+            <a:pPr algn="l"/>
+            <a:r>
+              <a:rPr sz="2800" b="1" i="0">
+                <a:solidFill>
+                  <a:srgbClr val="F1F5F9"/>
+                </a:solidFill>
+                <a:latin typeface="Calibri"/>
+              </a:rPr>
+              <a:t>All processes live by 04 May 2027 — 28 weeks from contract</a:t>
+            </a:r>
+          </a:p>
+        </p:txBody>
+      </p:sp>
+      <p:sp>
+        <p:nvSpPr>
+          <p:cNvPr id="3" name="Subtitle"/>
+          <p:cNvSpPr txBox="1"/>
+          <p:nvPr/>
+        </p:nvSpPr>
+        <p:spPr>
+          <a:xfrm>
+            <a:off x="457200" y="868680"/>
+            <a:ext cx="9265615" cy="320040"/>
+          </a:xfrm>
+          <a:prstGeom prst="rect">
+            <a:avLst/>
+          </a:prstGeom>
+          <a:noFill/>
+        </p:spPr>
+        <p:txBody>
+          <a:bodyPr wrap="square" lIns="0" rIns="0" tIns="0" bIns="0" anchor="t">
+            <a:spAutoFit/>
+          </a:bodyPr>
+          <a:lstStyle/>
+          <a:p>
+            <a:pPr algn="l"/>
+            <a:r>
+              <a:rPr sz="1400" b="0" i="0">
+                <a:solidFill>
+                  <a:srgbClr val="94A3B8"/>
+                </a:solidFill>
+                <a:latin typeface="Calibri"/>
+              </a:rPr>
+              <a:t>★ Contract signed 19 Oct 2026   ·   3 processes   ·   phased go-live by vertical</a:t>
+            </a:r>
+          </a:p>
+        </p:txBody>
+      </p:sp>
+      <p:sp>
+        <p:nvSpPr>
+          <p:cNvPr id="4" name="Card P2P"/>
+          <p:cNvSpPr/>
+          <p:nvPr/>
+        </p:nvSpPr>
+        <p:spPr>
+          <a:xfrm>
+            <a:off x="457200" y="1508760"/>
+            <a:ext cx="3576218" cy="3886200"/>
+          </a:xfrm>
+          <a:prstGeom prst="roundRect">
+            <a:avLst>
+              <a:gd name="adj" fmla="val 5000"/>
+            </a:avLst>
+          </a:prstGeom>
+          <a:solidFill>
+            <a:srgbClr val="1E293B"/>
+          </a:solidFill>
+          <a:ln>
+            <a:noFill/>
+          </a:ln>
+        </p:spPr>
+        <p:txBody>
+          <a:bodyPr rtlCol="0" anchor="ctr"/>
+          <a:lstStyle/>
+          <a:p>
+            <a:pPr algn="ctr"/>
+          </a:p>
+        </p:txBody>
+      </p:sp>
+      <p:sp>
+        <p:nvSpPr>
+          <p:cNvPr id="5" name="TextBox 4"/>
+          <p:cNvSpPr txBox="1"/>
+          <p:nvPr/>
+        </p:nvSpPr>
+        <p:spPr>
+          <a:xfrm>
+            <a:off x="731520" y="1737360"/>
+            <a:ext cx="3027578" cy="411480"/>
+          </a:xfrm>
+          <a:prstGeom prst="rect">
+            <a:avLst/>
+          </a:prstGeom>
+          <a:noFill/>
+        </p:spPr>
+        <p:txBody>
+          <a:bodyPr wrap="square" lIns="0" rIns="0" tIns="0" bIns="0" anchor="t">
+            <a:spAutoFit/>
+          </a:bodyPr>
+          <a:lstStyle/>
+          <a:p>
+            <a:pPr algn="l"/>
+            <a:r>
+              <a:rPr sz="2200" b="1" i="0">
+                <a:solidFill>
+                  <a:srgbClr val="F1F5F9"/>
+                </a:solidFill>
+                <a:latin typeface="Calibri"/>
+              </a:rPr>
+              <a:t>Procure-to-Pay</a:t>
+            </a:r>
+          </a:p>
+        </p:txBody>
+      </p:sp>
+      <p:sp>
+        <p:nvSpPr>
+          <p:cNvPr id="6" name="Rounded Rectangle 5"/>
+          <p:cNvSpPr/>
+          <p:nvPr/>
+        </p:nvSpPr>
+        <p:spPr>
+          <a:xfrm>
+            <a:off x="731520" y="2194560"/>
+            <a:ext cx="685800" cy="274320"/>
+          </a:xfrm>
+          <a:prstGeom prst="roundRect">
+            <a:avLst/>
+          </a:prstGeom>
+          <a:solidFill>
+            <a:srgbClr val="E2E8F0"/>
+          </a:solidFill>
+          <a:ln>
+            <a:noFill/>
+          </a:ln>
+        </p:spPr>
+        <p:txBody>
+          <a:bodyPr rtlCol="0" anchor="ctr" lIns="0" rIns="0" tIns="0" bIns="0" wrap="none"/>
+          <a:lstStyle/>
+          <a:p>
+            <a:pPr algn="ctr"/>
+            <a:r>
+              <a:rPr sz="1100" b="1">
+                <a:solidFill>
+                  <a:srgbClr val="0F172A"/>
+                </a:solidFill>
+                <a:latin typeface="Calibri"/>
+              </a:rPr>
+              <a:t>P2P</a:t>
+            </a:r>
+          </a:p>
+        </p:txBody>
+      </p:sp>
+      <p:sp>
+        <p:nvSpPr>
+          <p:cNvPr id="7" name="TextBox 6"/>
+          <p:cNvSpPr txBox="1"/>
+          <p:nvPr/>
+        </p:nvSpPr>
+        <p:spPr>
+          <a:xfrm>
+            <a:off x="731520" y="2697480"/>
+            <a:ext cx="3027578" cy="274320"/>
+          </a:xfrm>
+          <a:prstGeom prst="rect">
+            <a:avLst/>
+          </a:prstGeom>
+          <a:noFill/>
+        </p:spPr>
+        <p:txBody>
+          <a:bodyPr wrap="square" lIns="0" rIns="0" tIns="0" bIns="0" anchor="t">
+            <a:spAutoFit/>
+          </a:bodyPr>
+          <a:lstStyle/>
+          <a:p>
+            <a:pPr algn="l"/>
+            <a:r>
+              <a:rPr sz="1200" b="1" i="0">
+                <a:solidFill>
+                  <a:srgbClr val="F87171"/>
+                </a:solidFill>
+                <a:latin typeface="Calibri"/>
+              </a:rPr>
+              <a:t>◆  GO-LIVE</a:t>
+            </a:r>
+          </a:p>
+        </p:txBody>
+      </p:sp>
+      <p:sp>
+        <p:nvSpPr>
+          <p:cNvPr id="8" name="TextBox 7"/>
+          <p:cNvSpPr txBox="1"/>
+          <p:nvPr/>
+        </p:nvSpPr>
+        <p:spPr>
+          <a:xfrm>
+            <a:off x="731520" y="2971800"/>
+            <a:ext cx="3027578" cy="731520"/>
+          </a:xfrm>
+          <a:prstGeom prst="rect">
+            <a:avLst/>
+          </a:prstGeom>
+          <a:noFill/>
+        </p:spPr>
+        <p:txBody>
+          <a:bodyPr wrap="square" lIns="0" rIns="0" tIns="0" bIns="0" anchor="t">
+            <a:spAutoFit/>
+          </a:bodyPr>
+          <a:lstStyle/>
+          <a:p>
+            <a:pPr algn="l"/>
+            <a:r>
+              <a:rPr sz="4000" b="1" i="0">
+                <a:solidFill>
+                  <a:srgbClr val="F87171"/>
+                </a:solidFill>
+                <a:latin typeface="Calibri"/>
+              </a:rPr>
+              <a:t>23 Feb 2027</a:t>
+            </a:r>
+          </a:p>
+        </p:txBody>
+      </p:sp>
+      <p:sp>
+        <p:nvSpPr>
+          <p:cNvPr id="9" name="TextBox 8"/>
+          <p:cNvSpPr txBox="1"/>
+          <p:nvPr/>
+        </p:nvSpPr>
+        <p:spPr>
+          <a:xfrm>
+            <a:off x="731520" y="3703320"/>
+            <a:ext cx="3027578" cy="274320"/>
+          </a:xfrm>
+          <a:prstGeom prst="rect">
+            <a:avLst/>
+          </a:prstGeom>
+          <a:noFill/>
+        </p:spPr>
+        <p:txBody>
+          <a:bodyPr wrap="square" lIns="0" rIns="0" tIns="0" bIns="0" anchor="t">
+            <a:spAutoFit/>
+          </a:bodyPr>
+          <a:lstStyle/>
+          <a:p>
+            <a:pPr algn="l"/>
+            <a:r>
+              <a:rPr sz="1300" b="0" i="0">
+                <a:solidFill>
+                  <a:srgbClr val="94A3B8"/>
+                </a:solidFill>
+                <a:latin typeface="Calibri"/>
+              </a:rPr>
+              <a:t>Tuesday  ·  18 weeks from contract</a:t>
+            </a:r>
+          </a:p>
+        </p:txBody>
+      </p:sp>
+      <p:sp>
+        <p:nvSpPr>
+          <p:cNvPr id="10" name="P2P Hiring"/>
+          <p:cNvSpPr/>
+          <p:nvPr/>
+        </p:nvSpPr>
+        <p:spPr>
+          <a:xfrm>
+            <a:off x="731520" y="4251960"/>
+            <a:ext cx="1345590" cy="292608"/>
+          </a:xfrm>
+          <a:prstGeom prst="rect">
+            <a:avLst/>
+          </a:prstGeom>
+          <a:solidFill>
+            <a:srgbClr val="5B8FD0"/>
+          </a:solidFill>
+          <a:ln>
+            <a:noFill/>
+          </a:ln>
+        </p:spPr>
+        <p:txBody>
+          <a:bodyPr rtlCol="0" anchor="ctr" lIns="0" rIns="0" tIns="0" bIns="0" wrap="none"/>
+          <a:lstStyle/>
+          <a:p>
+            <a:pPr algn="ctr"/>
+            <a:r>
+              <a:rPr sz="1000" b="1">
+                <a:solidFill>
+                  <a:srgbClr val="FFFFFF"/>
+                </a:solidFill>
+                <a:latin typeface="Calibri"/>
+              </a:rPr>
+              <a:t>8w</a:t>
+            </a:r>
+          </a:p>
+        </p:txBody>
+      </p:sp>
+      <p:sp>
+        <p:nvSpPr>
+          <p:cNvPr id="11" name="P2P Pre-Onboarding"/>
+          <p:cNvSpPr/>
+          <p:nvPr/>
+        </p:nvSpPr>
+        <p:spPr>
+          <a:xfrm>
+            <a:off x="2077110" y="4251960"/>
+            <a:ext cx="336397" cy="292608"/>
+          </a:xfrm>
+          <a:prstGeom prst="rect">
+            <a:avLst/>
+          </a:prstGeom>
+          <a:solidFill>
+            <a:srgbClr val="A9C6E8"/>
+          </a:solidFill>
+          <a:ln>
+            <a:noFill/>
+          </a:ln>
+        </p:spPr>
+        <p:txBody>
+          <a:bodyPr rtlCol="0" anchor="ctr" lIns="0" rIns="0" tIns="0" bIns="0" wrap="none"/>
+          <a:lstStyle/>
+          <a:p>
+            <a:pPr algn="ctr"/>
+            <a:r>
+              <a:rPr sz="1000" b="1">
+                <a:solidFill>
+                  <a:srgbClr val="1F2937"/>
+                </a:solidFill>
+                <a:latin typeface="Calibri"/>
+              </a:rPr>
+              <a:t>2w</a:t>
+            </a:r>
+          </a:p>
+        </p:txBody>
+      </p:sp>
+      <p:sp>
+        <p:nvSpPr>
+          <p:cNvPr id="12" name="P2P Knowledge Transfer"/>
+          <p:cNvSpPr/>
+          <p:nvPr/>
+        </p:nvSpPr>
+        <p:spPr>
+          <a:xfrm>
+            <a:off x="2413508" y="4251960"/>
+            <a:ext cx="672795" cy="292608"/>
+          </a:xfrm>
+          <a:prstGeom prst="rect">
+            <a:avLst/>
+          </a:prstGeom>
+          <a:solidFill>
+            <a:srgbClr val="F5B85A"/>
+          </a:solidFill>
+          <a:ln>
+            <a:noFill/>
+          </a:ln>
+        </p:spPr>
+        <p:txBody>
+          <a:bodyPr rtlCol="0" anchor="ctr" lIns="0" rIns="0" tIns="0" bIns="0" wrap="none"/>
+          <a:lstStyle/>
+          <a:p>
+            <a:pPr algn="ctr"/>
+            <a:r>
+              <a:rPr sz="1000" b="1">
+                <a:solidFill>
+                  <a:srgbClr val="1F2937"/>
+                </a:solidFill>
+                <a:latin typeface="Calibri"/>
+              </a:rPr>
+              <a:t>4w</a:t>
+            </a:r>
+          </a:p>
+        </p:txBody>
+      </p:sp>
+      <p:sp>
+        <p:nvSpPr>
+          <p:cNvPr id="13" name="P2P Guided Production"/>
+          <p:cNvSpPr/>
+          <p:nvPr/>
+        </p:nvSpPr>
+        <p:spPr>
+          <a:xfrm>
+            <a:off x="3086303" y="4251960"/>
+            <a:ext cx="672795" cy="292608"/>
+          </a:xfrm>
+          <a:prstGeom prst="rect">
+            <a:avLst/>
+          </a:prstGeom>
+          <a:solidFill>
+            <a:srgbClr val="A68BD6"/>
+          </a:solidFill>
+          <a:ln>
+            <a:noFill/>
+          </a:ln>
+        </p:spPr>
+        <p:txBody>
+          <a:bodyPr rtlCol="0" anchor="ctr" lIns="0" rIns="0" tIns="0" bIns="0" wrap="none"/>
+          <a:lstStyle/>
+          <a:p>
+            <a:pPr algn="ctr"/>
+            <a:r>
+              <a:rPr sz="1000" b="1">
+                <a:solidFill>
+                  <a:srgbClr val="FFFFFF"/>
+                </a:solidFill>
+                <a:latin typeface="Calibri"/>
+              </a:rPr>
+              <a:t>4w</a:t>
+            </a:r>
+          </a:p>
+        </p:txBody>
+      </p:sp>
+      <p:sp>
+        <p:nvSpPr>
+          <p:cNvPr id="14" name="TextBox 13"/>
+          <p:cNvSpPr txBox="1"/>
+          <p:nvPr/>
+        </p:nvSpPr>
+        <p:spPr>
+          <a:xfrm>
+            <a:off x="731520" y="4663440"/>
+            <a:ext cx="3027578" cy="548640"/>
+          </a:xfrm>
+          <a:prstGeom prst="rect">
+            <a:avLst/>
+          </a:prstGeom>
+          <a:noFill/>
+        </p:spPr>
+        <p:txBody>
+          <a:bodyPr wrap="square" lIns="0" rIns="0" tIns="0" bIns="0" anchor="t">
+            <a:spAutoFit/>
+          </a:bodyPr>
+          <a:lstStyle/>
+          <a:p>
+            <a:pPr algn="l"/>
+            <a:r>
+              <a:rPr sz="1100" b="0" i="0">
+                <a:solidFill>
+                  <a:srgbClr val="94A3B8"/>
+                </a:solidFill>
+                <a:latin typeface="Calibri"/>
+              </a:rPr>
+              <a:t>Hiring → Pre-Onboarding → KT → Guided Production</a:t>
+            </a:r>
+          </a:p>
+        </p:txBody>
+      </p:sp>
+      <p:sp>
+        <p:nvSpPr>
+          <p:cNvPr id="15" name="Card OTC"/>
+          <p:cNvSpPr/>
+          <p:nvPr/>
+        </p:nvSpPr>
+        <p:spPr>
+          <a:xfrm>
+            <a:off x="4307738" y="1508760"/>
+            <a:ext cx="3576218" cy="3886200"/>
+          </a:xfrm>
+          <a:prstGeom prst="roundRect">
+            <a:avLst>
+              <a:gd name="adj" fmla="val 5000"/>
+            </a:avLst>
+          </a:prstGeom>
+          <a:solidFill>
+            <a:srgbClr val="1E293B"/>
+          </a:solidFill>
+          <a:ln>
+            <a:noFill/>
+          </a:ln>
+        </p:spPr>
+        <p:txBody>
+          <a:bodyPr rtlCol="0" anchor="ctr"/>
+          <a:lstStyle/>
+          <a:p>
+            <a:pPr algn="ctr"/>
+          </a:p>
+        </p:txBody>
+      </p:sp>
+      <p:sp>
+        <p:nvSpPr>
+          <p:cNvPr id="16" name="TextBox 15"/>
+          <p:cNvSpPr txBox="1"/>
+          <p:nvPr/>
+        </p:nvSpPr>
+        <p:spPr>
+          <a:xfrm>
+            <a:off x="4582058" y="1737360"/>
+            <a:ext cx="3027578" cy="411480"/>
+          </a:xfrm>
+          <a:prstGeom prst="rect">
+            <a:avLst/>
+          </a:prstGeom>
+          <a:noFill/>
+        </p:spPr>
+        <p:txBody>
+          <a:bodyPr wrap="square" lIns="0" rIns="0" tIns="0" bIns="0" anchor="t">
+            <a:spAutoFit/>
+          </a:bodyPr>
+          <a:lstStyle/>
+          <a:p>
+            <a:pPr algn="l"/>
+            <a:r>
+              <a:rPr sz="2200" b="1" i="0">
+                <a:solidFill>
+                  <a:srgbClr val="F1F5F9"/>
+                </a:solidFill>
+                <a:latin typeface="Calibri"/>
+              </a:rPr>
+              <a:t>Order-to-Cash</a:t>
+            </a:r>
+          </a:p>
+        </p:txBody>
+      </p:sp>
+      <p:sp>
+        <p:nvSpPr>
+          <p:cNvPr id="17" name="Rounded Rectangle 16"/>
+          <p:cNvSpPr/>
+          <p:nvPr/>
+        </p:nvSpPr>
+        <p:spPr>
+          <a:xfrm>
+            <a:off x="4582058" y="2194560"/>
+            <a:ext cx="685800" cy="274320"/>
+          </a:xfrm>
+          <a:prstGeom prst="roundRect">
+            <a:avLst/>
+          </a:prstGeom>
+          <a:solidFill>
+            <a:srgbClr val="E2E8F0"/>
+          </a:solidFill>
+          <a:ln>
+            <a:noFill/>
+          </a:ln>
+        </p:spPr>
+        <p:txBody>
+          <a:bodyPr rtlCol="0" anchor="ctr" lIns="0" rIns="0" tIns="0" bIns="0" wrap="none"/>
+          <a:lstStyle/>
+          <a:p>
+            <a:pPr algn="ctr"/>
+            <a:r>
+              <a:rPr sz="1100" b="1">
+                <a:solidFill>
+                  <a:srgbClr val="0F172A"/>
+                </a:solidFill>
+                <a:latin typeface="Calibri"/>
+              </a:rPr>
+              <a:t>OTC</a:t>
+            </a:r>
+          </a:p>
+        </p:txBody>
+      </p:sp>
+      <p:sp>
+        <p:nvSpPr>
+          <p:cNvPr id="18" name="TextBox 17"/>
+          <p:cNvSpPr txBox="1"/>
+          <p:nvPr/>
+        </p:nvSpPr>
+        <p:spPr>
+          <a:xfrm>
+            <a:off x="4582058" y="2697480"/>
+            <a:ext cx="3027578" cy="274320"/>
+          </a:xfrm>
+          <a:prstGeom prst="rect">
+            <a:avLst/>
+          </a:prstGeom>
+          <a:noFill/>
+        </p:spPr>
+        <p:txBody>
+          <a:bodyPr wrap="square" lIns="0" rIns="0" tIns="0" bIns="0" anchor="t">
+            <a:spAutoFit/>
+          </a:bodyPr>
+          <a:lstStyle/>
+          <a:p>
+            <a:pPr algn="l"/>
+            <a:r>
+              <a:rPr sz="1200" b="1" i="0">
+                <a:solidFill>
+                  <a:srgbClr val="F87171"/>
+                </a:solidFill>
+                <a:latin typeface="Calibri"/>
+              </a:rPr>
+              <a:t>◆  GO-LIVE</a:t>
+            </a:r>
+          </a:p>
+        </p:txBody>
+      </p:sp>
+      <p:sp>
+        <p:nvSpPr>
+          <p:cNvPr id="19" name="TextBox 18"/>
+          <p:cNvSpPr txBox="1"/>
+          <p:nvPr/>
+        </p:nvSpPr>
+        <p:spPr>
+          <a:xfrm>
+            <a:off x="4582058" y="2971800"/>
+            <a:ext cx="3027578" cy="731520"/>
+          </a:xfrm>
+          <a:prstGeom prst="rect">
+            <a:avLst/>
+          </a:prstGeom>
+          <a:noFill/>
+        </p:spPr>
+        <p:txBody>
+          <a:bodyPr wrap="square" lIns="0" rIns="0" tIns="0" bIns="0" anchor="t">
+            <a:spAutoFit/>
+          </a:bodyPr>
+          <a:lstStyle/>
+          <a:p>
+            <a:pPr algn="l"/>
+            <a:r>
+              <a:rPr sz="4000" b="1" i="0">
+                <a:solidFill>
+                  <a:srgbClr val="F87171"/>
+                </a:solidFill>
+                <a:latin typeface="Calibri"/>
+              </a:rPr>
+              <a:t>23 Feb 2027</a:t>
+            </a:r>
+          </a:p>
+        </p:txBody>
+      </p:sp>
+      <p:sp>
+        <p:nvSpPr>
+          <p:cNvPr id="20" name="TextBox 19"/>
+          <p:cNvSpPr txBox="1"/>
+          <p:nvPr/>
+        </p:nvSpPr>
+        <p:spPr>
+          <a:xfrm>
+            <a:off x="4582058" y="3703320"/>
+            <a:ext cx="3027578" cy="274320"/>
+          </a:xfrm>
+          <a:prstGeom prst="rect">
+            <a:avLst/>
+          </a:prstGeom>
+          <a:noFill/>
+        </p:spPr>
+        <p:txBody>
+          <a:bodyPr wrap="square" lIns="0" rIns="0" tIns="0" bIns="0" anchor="t">
+            <a:spAutoFit/>
+          </a:bodyPr>
+          <a:lstStyle/>
+          <a:p>
+            <a:pPr algn="l"/>
+            <a:r>
+              <a:rPr sz="1300" b="0" i="0">
+                <a:solidFill>
+                  <a:srgbClr val="94A3B8"/>
+                </a:solidFill>
+                <a:latin typeface="Calibri"/>
+              </a:rPr>
+              <a:t>Tuesday  ·  18 weeks from contract</a:t>
+            </a:r>
+          </a:p>
+        </p:txBody>
+      </p:sp>
+      <p:sp>
+        <p:nvSpPr>
+          <p:cNvPr id="21" name="OTC Hiring"/>
+          <p:cNvSpPr/>
+          <p:nvPr/>
+        </p:nvSpPr>
+        <p:spPr>
+          <a:xfrm>
+            <a:off x="4582058" y="4251960"/>
+            <a:ext cx="1345590" cy="292608"/>
+          </a:xfrm>
+          <a:prstGeom prst="rect">
+            <a:avLst/>
+          </a:prstGeom>
+          <a:solidFill>
+            <a:srgbClr val="5B8FD0"/>
+          </a:solidFill>
+          <a:ln>
+            <a:noFill/>
+          </a:ln>
+        </p:spPr>
+        <p:txBody>
+          <a:bodyPr rtlCol="0" anchor="ctr" lIns="0" rIns="0" tIns="0" bIns="0" wrap="none"/>
+          <a:lstStyle/>
+          <a:p>
+            <a:pPr algn="ctr"/>
+            <a:r>
+              <a:rPr sz="1000" b="1">
+                <a:solidFill>
+                  <a:srgbClr val="FFFFFF"/>
+                </a:solidFill>
+                <a:latin typeface="Calibri"/>
+              </a:rPr>
+              <a:t>8w</a:t>
+            </a:r>
+          </a:p>
+        </p:txBody>
+      </p:sp>
+      <p:sp>
+        <p:nvSpPr>
+          <p:cNvPr id="22" name="OTC Pre-Onboarding"/>
+          <p:cNvSpPr/>
+          <p:nvPr/>
+        </p:nvSpPr>
+        <p:spPr>
+          <a:xfrm>
+            <a:off x="5927648" y="4251960"/>
+            <a:ext cx="336397" cy="292608"/>
+          </a:xfrm>
+          <a:prstGeom prst="rect">
+            <a:avLst/>
+          </a:prstGeom>
+          <a:solidFill>
+            <a:srgbClr val="A9C6E8"/>
+          </a:solidFill>
+          <a:ln>
+            <a:noFill/>
+          </a:ln>
+        </p:spPr>
+        <p:txBody>
+          <a:bodyPr rtlCol="0" anchor="ctr" lIns="0" rIns="0" tIns="0" bIns="0" wrap="none"/>
+          <a:lstStyle/>
+          <a:p>
+            <a:pPr algn="ctr"/>
+            <a:r>
+              <a:rPr sz="1000" b="1">
+                <a:solidFill>
+                  <a:srgbClr val="1F2937"/>
+                </a:solidFill>
+                <a:latin typeface="Calibri"/>
+              </a:rPr>
+              <a:t>2w</a:t>
+            </a:r>
+          </a:p>
+        </p:txBody>
+      </p:sp>
+      <p:sp>
+        <p:nvSpPr>
+          <p:cNvPr id="23" name="OTC Knowledge Transfer"/>
+          <p:cNvSpPr/>
+          <p:nvPr/>
+        </p:nvSpPr>
+        <p:spPr>
+          <a:xfrm>
+            <a:off x="6264046" y="4251960"/>
+            <a:ext cx="672795" cy="292608"/>
+          </a:xfrm>
+          <a:prstGeom prst="rect">
+            <a:avLst/>
+          </a:prstGeom>
+          <a:solidFill>
+            <a:srgbClr val="F5B85A"/>
+          </a:solidFill>
+          <a:ln>
+            <a:noFill/>
+          </a:ln>
+        </p:spPr>
+        <p:txBody>
+          <a:bodyPr rtlCol="0" anchor="ctr" lIns="0" rIns="0" tIns="0" bIns="0" wrap="none"/>
+          <a:lstStyle/>
+          <a:p>
+            <a:pPr algn="ctr"/>
+            <a:r>
+              <a:rPr sz="1000" b="1">
+                <a:solidFill>
+                  <a:srgbClr val="1F2937"/>
+                </a:solidFill>
+                <a:latin typeface="Calibri"/>
+              </a:rPr>
+              <a:t>4w</a:t>
+            </a:r>
+          </a:p>
+        </p:txBody>
+      </p:sp>
+      <p:sp>
+        <p:nvSpPr>
+          <p:cNvPr id="24" name="OTC Guided Production"/>
+          <p:cNvSpPr/>
+          <p:nvPr/>
+        </p:nvSpPr>
+        <p:spPr>
+          <a:xfrm>
+            <a:off x="6936841" y="4251960"/>
+            <a:ext cx="672795" cy="292608"/>
+          </a:xfrm>
+          <a:prstGeom prst="rect">
+            <a:avLst/>
+          </a:prstGeom>
+          <a:solidFill>
+            <a:srgbClr val="A68BD6"/>
+          </a:solidFill>
+          <a:ln>
+            <a:noFill/>
+          </a:ln>
+        </p:spPr>
+        <p:txBody>
+          <a:bodyPr rtlCol="0" anchor="ctr" lIns="0" rIns="0" tIns="0" bIns="0" wrap="none"/>
+          <a:lstStyle/>
+          <a:p>
+            <a:pPr algn="ctr"/>
+            <a:r>
+              <a:rPr sz="1000" b="1">
+                <a:solidFill>
+                  <a:srgbClr val="FFFFFF"/>
+                </a:solidFill>
+                <a:latin typeface="Calibri"/>
+              </a:rPr>
+              <a:t>4w</a:t>
+            </a:r>
+          </a:p>
+        </p:txBody>
+      </p:sp>
+      <p:sp>
+        <p:nvSpPr>
+          <p:cNvPr id="25" name="TextBox 24"/>
+          <p:cNvSpPr txBox="1"/>
+          <p:nvPr/>
+        </p:nvSpPr>
+        <p:spPr>
+          <a:xfrm>
+            <a:off x="4582058" y="4663440"/>
+            <a:ext cx="3027578" cy="548640"/>
+          </a:xfrm>
+          <a:prstGeom prst="rect">
+            <a:avLst/>
+          </a:prstGeom>
+          <a:noFill/>
+        </p:spPr>
+        <p:txBody>
+          <a:bodyPr wrap="square" lIns="0" rIns="0" tIns="0" bIns="0" anchor="t">
+            <a:spAutoFit/>
+          </a:bodyPr>
+          <a:lstStyle/>
+          <a:p>
+            <a:pPr algn="l"/>
+            <a:r>
+              <a:rPr sz="1100" b="0" i="0">
+                <a:solidFill>
+                  <a:srgbClr val="94A3B8"/>
+                </a:solidFill>
+                <a:latin typeface="Calibri"/>
+              </a:rPr>
+              <a:t>Hiring → Pre-Onboarding → KT → Guided Production</a:t>
+            </a:r>
+          </a:p>
+        </p:txBody>
+      </p:sp>
+      <p:sp>
+        <p:nvSpPr>
+          <p:cNvPr id="26" name="Card RTR"/>
+          <p:cNvSpPr/>
+          <p:nvPr/>
+        </p:nvSpPr>
+        <p:spPr>
+          <a:xfrm>
+            <a:off x="8158276" y="1508760"/>
+            <a:ext cx="3576218" cy="3886200"/>
+          </a:xfrm>
+          <a:prstGeom prst="roundRect">
+            <a:avLst>
+              <a:gd name="adj" fmla="val 5000"/>
+            </a:avLst>
+          </a:prstGeom>
+          <a:solidFill>
+            <a:srgbClr val="1E293B"/>
+          </a:solidFill>
+          <a:ln>
+            <a:noFill/>
+          </a:ln>
+        </p:spPr>
+        <p:txBody>
+          <a:bodyPr rtlCol="0" anchor="ctr"/>
+          <a:lstStyle/>
+          <a:p>
+            <a:pPr algn="ctr"/>
+          </a:p>
+        </p:txBody>
+      </p:sp>
+      <p:sp>
+        <p:nvSpPr>
+          <p:cNvPr id="27" name="TextBox 26"/>
+          <p:cNvSpPr txBox="1"/>
+          <p:nvPr/>
+        </p:nvSpPr>
+        <p:spPr>
+          <a:xfrm>
+            <a:off x="8432596" y="1737360"/>
+            <a:ext cx="3027578" cy="411480"/>
+          </a:xfrm>
+          <a:prstGeom prst="rect">
+            <a:avLst/>
+          </a:prstGeom>
+          <a:noFill/>
+        </p:spPr>
+        <p:txBody>
+          <a:bodyPr wrap="square" lIns="0" rIns="0" tIns="0" bIns="0" anchor="t">
+            <a:spAutoFit/>
+          </a:bodyPr>
+          <a:lstStyle/>
+          <a:p>
+            <a:pPr algn="l"/>
+            <a:r>
+              <a:rPr sz="2200" b="1" i="0">
+                <a:solidFill>
+                  <a:srgbClr val="F1F5F9"/>
+                </a:solidFill>
+                <a:latin typeface="Calibri"/>
+              </a:rPr>
+              <a:t>Record-to-Report</a:t>
+            </a:r>
+          </a:p>
+        </p:txBody>
+      </p:sp>
+      <p:sp>
+        <p:nvSpPr>
+          <p:cNvPr id="28" name="Rounded Rectangle 27"/>
+          <p:cNvSpPr/>
+          <p:nvPr/>
+        </p:nvSpPr>
+        <p:spPr>
+          <a:xfrm>
+            <a:off x="8432596" y="2194560"/>
+            <a:ext cx="685800" cy="274320"/>
+          </a:xfrm>
+          <a:prstGeom prst="roundRect">
+            <a:avLst/>
+          </a:prstGeom>
+          <a:solidFill>
+            <a:srgbClr val="E2E8F0"/>
+          </a:solidFill>
+          <a:ln>
+            <a:noFill/>
+          </a:ln>
+        </p:spPr>
+        <p:txBody>
+          <a:bodyPr rtlCol="0" anchor="ctr" lIns="0" rIns="0" tIns="0" bIns="0" wrap="none"/>
+          <a:lstStyle/>
+          <a:p>
+            <a:pPr algn="ctr"/>
+            <a:r>
+              <a:rPr sz="1100" b="1">
+                <a:solidFill>
+                  <a:srgbClr val="0F172A"/>
+                </a:solidFill>
+                <a:latin typeface="Calibri"/>
+              </a:rPr>
+              <a:t>RTR</a:t>
+            </a:r>
+          </a:p>
+        </p:txBody>
+      </p:sp>
+      <p:sp>
+        <p:nvSpPr>
+          <p:cNvPr id="29" name="TextBox 28"/>
+          <p:cNvSpPr txBox="1"/>
+          <p:nvPr/>
+        </p:nvSpPr>
+        <p:spPr>
+          <a:xfrm>
+            <a:off x="8432596" y="2697480"/>
+            <a:ext cx="3027578" cy="274320"/>
+          </a:xfrm>
+          <a:prstGeom prst="rect">
+            <a:avLst/>
+          </a:prstGeom>
+          <a:noFill/>
+        </p:spPr>
+        <p:txBody>
+          <a:bodyPr wrap="square" lIns="0" rIns="0" tIns="0" bIns="0" anchor="t">
+            <a:spAutoFit/>
+          </a:bodyPr>
+          <a:lstStyle/>
+          <a:p>
+            <a:pPr algn="l"/>
+            <a:r>
+              <a:rPr sz="1200" b="1" i="0">
+                <a:solidFill>
+                  <a:srgbClr val="F87171"/>
+                </a:solidFill>
+                <a:latin typeface="Calibri"/>
+              </a:rPr>
+              <a:t>◆  GO-LIVE</a:t>
+            </a:r>
+          </a:p>
+        </p:txBody>
+      </p:sp>
+      <p:sp>
+        <p:nvSpPr>
+          <p:cNvPr id="30" name="TextBox 29"/>
+          <p:cNvSpPr txBox="1"/>
+          <p:nvPr/>
+        </p:nvSpPr>
+        <p:spPr>
+          <a:xfrm>
+            <a:off x="8432596" y="2971800"/>
+            <a:ext cx="3027578" cy="731520"/>
+          </a:xfrm>
+          <a:prstGeom prst="rect">
+            <a:avLst/>
+          </a:prstGeom>
+          <a:noFill/>
+        </p:spPr>
+        <p:txBody>
+          <a:bodyPr wrap="square" lIns="0" rIns="0" tIns="0" bIns="0" anchor="t">
+            <a:spAutoFit/>
+          </a:bodyPr>
+          <a:lstStyle/>
+          <a:p>
+            <a:pPr algn="l"/>
+            <a:r>
+              <a:rPr sz="4000" b="1" i="0">
+                <a:solidFill>
+                  <a:srgbClr val="F87171"/>
+                </a:solidFill>
+                <a:latin typeface="Calibri"/>
+              </a:rPr>
+              <a:t>04 May 2027</a:t>
+            </a:r>
+          </a:p>
+        </p:txBody>
+      </p:sp>
+      <p:sp>
+        <p:nvSpPr>
+          <p:cNvPr id="31" name="TextBox 30"/>
+          <p:cNvSpPr txBox="1"/>
+          <p:nvPr/>
+        </p:nvSpPr>
+        <p:spPr>
+          <a:xfrm>
+            <a:off x="8432596" y="3703320"/>
+            <a:ext cx="3027578" cy="274320"/>
+          </a:xfrm>
+          <a:prstGeom prst="rect">
+            <a:avLst/>
+          </a:prstGeom>
+          <a:noFill/>
+        </p:spPr>
+        <p:txBody>
+          <a:bodyPr wrap="square" lIns="0" rIns="0" tIns="0" bIns="0" anchor="t">
+            <a:spAutoFit/>
+          </a:bodyPr>
+          <a:lstStyle/>
+          <a:p>
+            <a:pPr algn="l"/>
+            <a:r>
+              <a:rPr sz="1300" b="0" i="0">
+                <a:solidFill>
+                  <a:srgbClr val="94A3B8"/>
+                </a:solidFill>
+                <a:latin typeface="Calibri"/>
+              </a:rPr>
+              <a:t>Tuesday  ·  28 weeks from contract</a:t>
+            </a:r>
+          </a:p>
+        </p:txBody>
+      </p:sp>
+      <p:sp>
+        <p:nvSpPr>
+          <p:cNvPr id="32" name="RTR Hiring"/>
+          <p:cNvSpPr/>
+          <p:nvPr/>
+        </p:nvSpPr>
+        <p:spPr>
+          <a:xfrm>
+            <a:off x="8432596" y="4251960"/>
+            <a:ext cx="1081278" cy="292608"/>
+          </a:xfrm>
+          <a:prstGeom prst="rect">
+            <a:avLst/>
+          </a:prstGeom>
+          <a:solidFill>
+            <a:srgbClr val="5B8FD0"/>
+          </a:solidFill>
+          <a:ln>
+            <a:noFill/>
+          </a:ln>
+        </p:spPr>
+        <p:txBody>
+          <a:bodyPr rtlCol="0" anchor="ctr" lIns="0" rIns="0" tIns="0" bIns="0" wrap="none"/>
+          <a:lstStyle/>
+          <a:p>
+            <a:pPr algn="ctr"/>
+            <a:r>
+              <a:rPr sz="1000" b="1">
+                <a:solidFill>
+                  <a:srgbClr val="FFFFFF"/>
+                </a:solidFill>
+                <a:latin typeface="Calibri"/>
+              </a:rPr>
+              <a:t>10w</a:t>
+            </a:r>
+          </a:p>
+        </p:txBody>
+      </p:sp>
+      <p:sp>
+        <p:nvSpPr>
+          <p:cNvPr id="33" name="RTR Pre-Onboarding"/>
+          <p:cNvSpPr/>
+          <p:nvPr/>
+        </p:nvSpPr>
+        <p:spPr>
+          <a:xfrm>
+            <a:off x="9513874" y="4251960"/>
+            <a:ext cx="216255" cy="292608"/>
+          </a:xfrm>
+          <a:prstGeom prst="rect">
+            <a:avLst/>
+          </a:prstGeom>
+          <a:solidFill>
+            <a:srgbClr val="A9C6E8"/>
+          </a:solidFill>
+          <a:ln>
+            <a:noFill/>
+          </a:ln>
+        </p:spPr>
+        <p:txBody>
+          <a:bodyPr rtlCol="0" anchor="ctr" lIns="0" rIns="0" tIns="0" bIns="0" wrap="none"/>
+          <a:lstStyle/>
+          <a:p>
+            <a:pPr algn="ctr"/>
+            <a:r>
+              <a:rPr sz="1000" b="1">
+                <a:solidFill>
+                  <a:srgbClr val="1F2937"/>
+                </a:solidFill>
+                <a:latin typeface="Calibri"/>
+              </a:rPr>
+              <a:t>2w</a:t>
+            </a:r>
+          </a:p>
+        </p:txBody>
+      </p:sp>
+      <p:sp>
+        <p:nvSpPr>
+          <p:cNvPr id="34" name="RTR Knowledge Transfer"/>
+          <p:cNvSpPr/>
+          <p:nvPr/>
+        </p:nvSpPr>
+        <p:spPr>
+          <a:xfrm>
+            <a:off x="9730130" y="4251960"/>
+            <a:ext cx="865022" cy="292608"/>
+          </a:xfrm>
+          <a:prstGeom prst="rect">
+            <a:avLst/>
+          </a:prstGeom>
+          <a:solidFill>
+            <a:srgbClr val="F5B85A"/>
+          </a:solidFill>
+          <a:ln>
+            <a:noFill/>
+          </a:ln>
+        </p:spPr>
+        <p:txBody>
+          <a:bodyPr rtlCol="0" anchor="ctr" lIns="0" rIns="0" tIns="0" bIns="0" wrap="none"/>
+          <a:lstStyle/>
+          <a:p>
+            <a:pPr algn="ctr"/>
+            <a:r>
+              <a:rPr sz="1000" b="1">
+                <a:solidFill>
+                  <a:srgbClr val="1F2937"/>
+                </a:solidFill>
+                <a:latin typeface="Calibri"/>
+              </a:rPr>
+              <a:t>8w</a:t>
+            </a:r>
+          </a:p>
+        </p:txBody>
+      </p:sp>
+      <p:sp>
+        <p:nvSpPr>
+          <p:cNvPr id="35" name="RTR Guided Production"/>
+          <p:cNvSpPr/>
+          <p:nvPr/>
+        </p:nvSpPr>
+        <p:spPr>
+          <a:xfrm>
+            <a:off x="10595152" y="4251960"/>
+            <a:ext cx="865022" cy="292608"/>
+          </a:xfrm>
+          <a:prstGeom prst="rect">
+            <a:avLst/>
+          </a:prstGeom>
+          <a:solidFill>
+            <a:srgbClr val="A68BD6"/>
+          </a:solidFill>
+          <a:ln>
+            <a:noFill/>
+          </a:ln>
+        </p:spPr>
+        <p:txBody>
+          <a:bodyPr rtlCol="0" anchor="ctr" lIns="0" rIns="0" tIns="0" bIns="0" wrap="none"/>
+          <a:lstStyle/>
+          <a:p>
+            <a:pPr algn="ctr"/>
+            <a:r>
+              <a:rPr sz="1000" b="1">
+                <a:solidFill>
+                  <a:srgbClr val="FFFFFF"/>
+                </a:solidFill>
+                <a:latin typeface="Calibri"/>
+              </a:rPr>
+              <a:t>8w</a:t>
+            </a:r>
+          </a:p>
+        </p:txBody>
+      </p:sp>
+      <p:sp>
+        <p:nvSpPr>
+          <p:cNvPr id="36" name="TextBox 35"/>
+          <p:cNvSpPr txBox="1"/>
+          <p:nvPr/>
+        </p:nvSpPr>
+        <p:spPr>
+          <a:xfrm>
+            <a:off x="8432596" y="4663440"/>
+            <a:ext cx="3027578" cy="548640"/>
+          </a:xfrm>
+          <a:prstGeom prst="rect">
+            <a:avLst/>
+          </a:prstGeom>
+          <a:noFill/>
+        </p:spPr>
+        <p:txBody>
+          <a:bodyPr wrap="square" lIns="0" rIns="0" tIns="0" bIns="0" anchor="t">
+            <a:spAutoFit/>
+          </a:bodyPr>
+          <a:lstStyle/>
+          <a:p>
+            <a:pPr algn="l"/>
+            <a:r>
+              <a:rPr sz="1100" b="0" i="0">
+                <a:solidFill>
+                  <a:srgbClr val="94A3B8"/>
+                </a:solidFill>
+                <a:latin typeface="Calibri"/>
+              </a:rPr>
+              <a:t>Hiring → Pre-Onboarding → KT → Guided Production</a:t>
+            </a:r>
+          </a:p>
+        </p:txBody>
+      </p:sp>
+      <p:sp>
+        <p:nvSpPr>
+          <p:cNvPr id="37" name="TextBox 36"/>
+          <p:cNvSpPr txBox="1"/>
+          <p:nvPr/>
+        </p:nvSpPr>
+        <p:spPr>
+          <a:xfrm>
+            <a:off x="457200" y="5669280"/>
+            <a:ext cx="11277295" cy="548640"/>
+          </a:xfrm>
+          <a:prstGeom prst="rect">
+            <a:avLst/>
+          </a:prstGeom>
+          <a:noFill/>
+        </p:spPr>
+        <p:txBody>
+          <a:bodyPr wrap="square" lIns="0" rIns="0" tIns="0" bIns="0" anchor="t">
+            <a:spAutoFit/>
+          </a:bodyPr>
+          <a:lstStyle/>
+          <a:p>
+            <a:pPr algn="l"/>
+            <a:r>
+              <a:rPr sz="1400" b="1" i="0">
+                <a:solidFill>
+                  <a:srgbClr val="F1F5F9"/>
+                </a:solidFill>
+                <a:latin typeface="Calibri"/>
+              </a:rPr>
+              <a:t>Critical path: </a:t>
+            </a:r>
+            <a:r>
+              <a:rPr sz="1400" b="0" i="0">
+                <a:solidFill>
+                  <a:srgbClr val="F1F5F9"/>
+                </a:solidFill>
+                <a:latin typeface="Calibri"/>
+              </a:rPr>
+              <a:t>Record-to-Report (RTR) — 10-week hiring plus 8-week KT and 8-week Guided Production. Any slip in contract signature moves every go-live date one-for-one.</a:t>
+            </a:r>
+          </a:p>
+        </p:txBody>
+      </p:sp>
+      <p:sp>
+        <p:nvSpPr>
+          <p:cNvPr id="38" name="TextBox 37"/>
+          <p:cNvSpPr txBox="1"/>
+          <p:nvPr/>
+        </p:nvSpPr>
+        <p:spPr>
+          <a:xfrm>
+            <a:off x="457200" y="6537960"/>
+            <a:ext cx="8229600" cy="228600"/>
+          </a:xfrm>
+          <a:prstGeom prst="rect">
+            <a:avLst/>
+          </a:prstGeom>
+          <a:noFill/>
+        </p:spPr>
+        <p:txBody>
+          <a:bodyPr wrap="square" lIns="0" rIns="0" tIns="0" bIns="0" anchor="t">
+            <a:spAutoFit/>
+          </a:bodyPr>
+          <a:lstStyle/>
+          <a:p>
+            <a:pPr algn="l"/>
+            <a:r>
+              <a:rPr sz="1000" b="0" i="0">
+                <a:solidFill>
+                  <a:srgbClr val="94A3B8"/>
+                </a:solidFill>
+                <a:latin typeface="Calibri"/>
+              </a:rPr>
+              <a:t>Finance Transition Program  |  Acme Corp  |  Working days Mon–Fri; 1 week = 5 working days</a:t>
+            </a:r>
+          </a:p>
+        </p:txBody>
+      </p:sp>
+      <p:sp>
+        <p:nvSpPr>
+          <p:cNvPr id="39" name="TextBox 38"/>
+          <p:cNvSpPr txBox="1"/>
+          <p:nvPr/>
+        </p:nvSpPr>
+        <p:spPr>
+          <a:xfrm>
+            <a:off x="10820095" y="6537960"/>
+            <a:ext cx="914400" cy="228600"/>
+          </a:xfrm>
+          <a:prstGeom prst="rect">
+            <a:avLst/>
+          </a:prstGeom>
+          <a:noFill/>
+        </p:spPr>
+        <p:txBody>
+          <a:bodyPr wrap="square" lIns="0" rIns="0" tIns="0" bIns="0" anchor="t">
+            <a:spAutoFit/>
+          </a:bodyPr>
+          <a:lstStyle/>
+          <a:p>
+            <a:pPr algn="r"/>
+            <a:r>
+              <a:rPr sz="1000" b="0" i="0">
+                <a:solidFill>
+                  <a:srgbClr val="94A3B8"/>
+                </a:solidFill>
+                <a:latin typeface="Calibri"/>
+              </a:rPr>
+              <a:t>1</a:t>
+            </a:r>
+          </a:p>
+        </p:txBody>
+      </p:sp>
+      <p:sp>
+        <p:nvSpPr>
+          <p:cNvPr id="40" name="Theme switch"/>
+          <p:cNvSpPr/>
+          <p:nvPr/>
+        </p:nvSpPr>
+        <p:spPr>
+          <a:xfrm>
+            <a:off x="9960559" y="347472"/>
+            <a:ext cx="1810512" cy="402336"/>
+          </a:xfrm>
+          <a:prstGeom prst="roundRect">
+            <a:avLst>
+              <a:gd name="adj" fmla="val 50000"/>
+            </a:avLst>
+          </a:prstGeom>
+          <a:solidFill>
+            <a:srgbClr val="1E293B"/>
+          </a:solidFill>
+          <a:ln w="9525">
+            <a:solidFill>
+              <a:srgbClr val="334155"/>
+            </a:solidFill>
+          </a:ln>
+        </p:spPr>
+        <p:txBody>
+          <a:bodyPr rtlCol="0" anchor="ctr"/>
+          <a:lstStyle/>
+          <a:p>
+            <a:pPr algn="ctr"/>
+          </a:p>
+        </p:txBody>
+      </p:sp>
+      <p:sp>
+        <p:nvSpPr>
+          <p:cNvPr id="41" name="Theme light">
+            <a:hlinkClick action="ppaction://hlinksldjump" r:id="rId2"/>
+          </p:cNvPr>
+          <p:cNvSpPr/>
+          <p:nvPr/>
+        </p:nvSpPr>
+        <p:spPr>
+          <a:xfrm>
+            <a:off x="9997135" y="384048"/>
+            <a:ext cx="841247" cy="329184"/>
+          </a:xfrm>
+          <a:prstGeom prst="roundRect">
+            <a:avLst>
+              <a:gd name="adj" fmla="val 50000"/>
+            </a:avLst>
+          </a:prstGeom>
+          <a:solidFill>
+            <a:srgbClr val="1E293B"/>
+          </a:solidFill>
+          <a:ln>
+            <a:noFill/>
+          </a:ln>
+        </p:spPr>
+        <p:txBody>
+          <a:bodyPr rtlCol="0" anchor="ctr" lIns="0" rIns="0" tIns="0" bIns="0" wrap="none"/>
+          <a:lstStyle/>
+          <a:p>
+            <a:pPr algn="ctr"/>
+            <a:r>
+              <a:rPr sz="1100" b="0">
+                <a:solidFill>
+                  <a:srgbClr val="94A3B8"/>
+                </a:solidFill>
+                <a:latin typeface="Calibri"/>
+              </a:rPr>
+              <a:t>☀ Light</a:t>
+            </a:r>
+          </a:p>
+        </p:txBody>
+      </p:sp>
+      <p:sp>
+        <p:nvSpPr>
+          <p:cNvPr id="42" name="Theme dark"/>
+          <p:cNvSpPr/>
+          <p:nvPr/>
+        </p:nvSpPr>
+        <p:spPr>
+          <a:xfrm>
+            <a:off x="10893247" y="384048"/>
+            <a:ext cx="841247" cy="329184"/>
+          </a:xfrm>
+          <a:prstGeom prst="roundRect">
+            <a:avLst>
+              <a:gd name="adj" fmla="val 50000"/>
+            </a:avLst>
+          </a:prstGeom>
+          <a:solidFill>
+            <a:srgbClr val="F1F5F9"/>
+          </a:solidFill>
+          <a:ln>
+            <a:noFill/>
+          </a:ln>
+        </p:spPr>
+        <p:txBody>
+          <a:bodyPr rtlCol="0" anchor="ctr" lIns="0" rIns="0" tIns="0" bIns="0" wrap="none"/>
+          <a:lstStyle/>
+          <a:p>
+            <a:pPr algn="ctr"/>
+            <a:r>
+              <a:rPr sz="1100" b="1">
+                <a:solidFill>
+                  <a:srgbClr val="0F172A"/>
+                </a:solidFill>
+                <a:latin typeface="Calibri"/>
+              </a:rPr>
+              <a:t>☾ Dark</a:t>
+            </a:r>
+          </a:p>
+        </p:txBody>
+      </p:sp>
+    </p:spTree>
+  </p:cSld>
+  <p:clrMapOvr>
+    <a:masterClrMapping/>
+  </p:clrMapOvr>
+</p:sld>
+</file>
+
+<file path=ppt/slides/slide5.xml><?xml version="1.0" encoding="utf-8"?>
+<p:sld xmlns:a="http://schemas.openxmlformats.org/drawingml/2006/main" xmlns:p="http://schemas.openxmlformats.org/presentationml/2006/main" xmlns:r="http://schemas.openxmlformats.org/officeDocument/2006/relationships">
+  <p:cSld>
+    <p:bg>
+      <p:bgPr>
+        <a:solidFill>
+          <a:srgbClr val="0F172A"/>
+        </a:solidFill>
+        <a:effectLst/>
+      </p:bgPr>
+    </p:bg>
+    <p:spTree>
+      <p:nvGrpSpPr>
+        <p:cNvPr id="1" name=""/>
+        <p:cNvGrpSpPr/>
+        <p:nvPr/>
+      </p:nvGrpSpPr>
+      <p:grpSpPr/>
+      <p:sp>
+        <p:nvSpPr>
+          <p:cNvPr id="2" name="Title"/>
+          <p:cNvSpPr txBox="1"/>
+          <p:nvPr/>
+        </p:nvSpPr>
+        <p:spPr>
+          <a:xfrm>
+            <a:off x="457200" y="320040"/>
+            <a:ext cx="9265615" cy="548640"/>
+          </a:xfrm>
+          <a:prstGeom prst="rect">
+            <a:avLst/>
+          </a:prstGeom>
+          <a:noFill/>
+        </p:spPr>
+        <p:txBody>
+          <a:bodyPr wrap="square" lIns="0" rIns="0" tIns="0" bIns="0" anchor="t">
+            <a:spAutoFit/>
+          </a:bodyPr>
+          <a:lstStyle/>
+          <a:p>
+            <a:pPr algn="l"/>
+            <a:r>
+              <a:rPr sz="2800" b="1" i="0">
+                <a:solidFill>
+                  <a:srgbClr val="F1F5F9"/>
+                </a:solidFill>
+                <a:latin typeface="Calibri"/>
+              </a:rPr>
+              <a:t>Timeline: contract to go-live by process</a:t>
+            </a:r>
+          </a:p>
+        </p:txBody>
+      </p:sp>
+      <p:sp>
+        <p:nvSpPr>
+          <p:cNvPr id="3" name="Subtitle"/>
+          <p:cNvSpPr txBox="1"/>
+          <p:nvPr/>
+        </p:nvSpPr>
+        <p:spPr>
+          <a:xfrm>
+            <a:off x="457200" y="868680"/>
+            <a:ext cx="9265615" cy="320040"/>
+          </a:xfrm>
+          <a:prstGeom prst="rect">
+            <a:avLst/>
+          </a:prstGeom>
+          <a:noFill/>
+        </p:spPr>
+        <p:txBody>
+          <a:bodyPr wrap="square" lIns="0" rIns="0" tIns="0" bIns="0" anchor="t">
+            <a:spAutoFit/>
+          </a:bodyPr>
+          <a:lstStyle/>
+          <a:p>
+            <a:pPr algn="l"/>
+            <a:r>
+              <a:rPr sz="1400" b="0" i="0">
+                <a:solidFill>
+                  <a:srgbClr val="94A3B8"/>
+                </a:solidFill>
+                <a:latin typeface="Calibri"/>
+              </a:rPr>
+              <a:t>★ Contract signed  ·  bars = working weeks per phase  ·  ◆ Go-Live = next working day after Guided Production</a:t>
+            </a:r>
+          </a:p>
+        </p:txBody>
+      </p:sp>
+      <p:sp>
+        <p:nvSpPr>
+          <p:cNvPr id="4" name="TextBox 3"/>
+          <p:cNvSpPr txBox="1"/>
+          <p:nvPr/>
+        </p:nvSpPr>
+        <p:spPr>
+          <a:xfrm>
+            <a:off x="2926080" y="1325880"/>
+            <a:ext cx="508930" cy="347472"/>
+          </a:xfrm>
+          <a:prstGeom prst="rect">
+            <a:avLst/>
+          </a:prstGeom>
+          <a:noFill/>
+        </p:spPr>
+        <p:txBody>
+          <a:bodyPr wrap="square" lIns="0" rIns="0" tIns="0" bIns="0" anchor="ctr">
+            <a:spAutoFit/>
+          </a:bodyPr>
+          <a:lstStyle/>
+          <a:p>
+            <a:pPr algn="ctr"/>
+            <a:r>
+              <a:rPr sz="1200" b="1" i="0">
+                <a:solidFill>
+                  <a:srgbClr val="F1F5F9"/>
+                </a:solidFill>
+                <a:latin typeface="Calibri"/>
+              </a:rPr>
+              <a:t>Oct</a:t>
+            </a:r>
+            <a:r>
+              <a:rPr sz="1000" b="0" i="0">
+                <a:solidFill>
+                  <a:srgbClr val="94A3B8"/>
+                </a:solidFill>
+                <a:latin typeface="Calibri"/>
+              </a:rPr>
+              <a:t> 26</a:t>
+            </a:r>
+          </a:p>
+        </p:txBody>
+      </p:sp>
+      <p:sp>
+        <p:nvSpPr>
+          <p:cNvPr id="5" name="TextBox 4"/>
+          <p:cNvSpPr txBox="1"/>
+          <p:nvPr/>
+        </p:nvSpPr>
+        <p:spPr>
+          <a:xfrm>
+            <a:off x="3435010" y="1325880"/>
+            <a:ext cx="1174455" cy="347472"/>
+          </a:xfrm>
+          <a:prstGeom prst="rect">
+            <a:avLst/>
+          </a:prstGeom>
+          <a:noFill/>
+        </p:spPr>
+        <p:txBody>
+          <a:bodyPr wrap="square" lIns="0" rIns="0" tIns="0" bIns="0" anchor="ctr">
+            <a:spAutoFit/>
+          </a:bodyPr>
+          <a:lstStyle/>
+          <a:p>
+            <a:pPr algn="ctr"/>
+            <a:r>
+              <a:rPr sz="1200" b="1" i="0">
+                <a:solidFill>
+                  <a:srgbClr val="F1F5F9"/>
+                </a:solidFill>
+                <a:latin typeface="Calibri"/>
+              </a:rPr>
+              <a:t>Nov</a:t>
+            </a:r>
+            <a:r>
+              <a:rPr sz="1000" b="0" i="0">
+                <a:solidFill>
+                  <a:srgbClr val="94A3B8"/>
+                </a:solidFill>
+                <a:latin typeface="Calibri"/>
+              </a:rPr>
+              <a:t> 26</a:t>
+            </a:r>
+          </a:p>
+        </p:txBody>
+      </p:sp>
+      <p:cxnSp>
+        <p:nvCxnSpPr>
+          <p:cNvPr id="6" name="Connector 5"/>
+          <p:cNvCxnSpPr/>
+          <p:nvPr/>
+        </p:nvCxnSpPr>
+        <p:spPr>
+          <a:xfrm>
+            <a:off x="3435010" y="1325880"/>
+            <a:ext cx="0" cy="4370832"/>
+          </a:xfrm>
+          <a:prstGeom prst="line">
+            <a:avLst/>
+          </a:prstGeom>
+          <a:ln w="9525">
+            <a:solidFill>
+              <a:srgbClr val="334155"/>
+            </a:solidFill>
+          </a:ln>
+        </p:spPr>
+      </p:cxnSp>
+      <p:sp>
+        <p:nvSpPr>
+          <p:cNvPr id="7" name="TextBox 6"/>
+          <p:cNvSpPr txBox="1"/>
+          <p:nvPr/>
+        </p:nvSpPr>
+        <p:spPr>
+          <a:xfrm>
+            <a:off x="4609466" y="1325880"/>
+            <a:ext cx="1213603" cy="347472"/>
+          </a:xfrm>
+          <a:prstGeom prst="rect">
+            <a:avLst/>
+          </a:prstGeom>
+          <a:noFill/>
+        </p:spPr>
+        <p:txBody>
+          <a:bodyPr wrap="square" lIns="0" rIns="0" tIns="0" bIns="0" anchor="ctr">
+            <a:spAutoFit/>
+          </a:bodyPr>
+          <a:lstStyle/>
+          <a:p>
+            <a:pPr algn="ctr"/>
+            <a:r>
+              <a:rPr sz="1200" b="1" i="0">
+                <a:solidFill>
+                  <a:srgbClr val="F1F5F9"/>
+                </a:solidFill>
+                <a:latin typeface="Calibri"/>
+              </a:rPr>
+              <a:t>Dec</a:t>
+            </a:r>
+            <a:r>
+              <a:rPr sz="1000" b="0" i="0">
+                <a:solidFill>
+                  <a:srgbClr val="94A3B8"/>
+                </a:solidFill>
+                <a:latin typeface="Calibri"/>
+              </a:rPr>
+              <a:t> 26</a:t>
+            </a:r>
+          </a:p>
+        </p:txBody>
+      </p:sp>
+      <p:cxnSp>
+        <p:nvCxnSpPr>
+          <p:cNvPr id="8" name="Connector 7"/>
+          <p:cNvCxnSpPr/>
+          <p:nvPr/>
+        </p:nvCxnSpPr>
+        <p:spPr>
+          <a:xfrm>
+            <a:off x="4609466" y="1325880"/>
+            <a:ext cx="0" cy="4370832"/>
+          </a:xfrm>
+          <a:prstGeom prst="line">
+            <a:avLst/>
+          </a:prstGeom>
+          <a:ln w="9525">
+            <a:solidFill>
+              <a:srgbClr val="334155"/>
+            </a:solidFill>
+          </a:ln>
+        </p:spPr>
+      </p:cxnSp>
+      <p:sp>
+        <p:nvSpPr>
+          <p:cNvPr id="9" name="TextBox 8"/>
+          <p:cNvSpPr txBox="1"/>
+          <p:nvPr/>
+        </p:nvSpPr>
+        <p:spPr>
+          <a:xfrm>
+            <a:off x="5823069" y="1325880"/>
+            <a:ext cx="1213603" cy="347472"/>
+          </a:xfrm>
+          <a:prstGeom prst="rect">
+            <a:avLst/>
+          </a:prstGeom>
+          <a:noFill/>
+        </p:spPr>
+        <p:txBody>
+          <a:bodyPr wrap="square" lIns="0" rIns="0" tIns="0" bIns="0" anchor="ctr">
+            <a:spAutoFit/>
+          </a:bodyPr>
+          <a:lstStyle/>
+          <a:p>
+            <a:pPr algn="ctr"/>
+            <a:r>
+              <a:rPr sz="1200" b="1" i="0">
+                <a:solidFill>
+                  <a:srgbClr val="F1F5F9"/>
+                </a:solidFill>
+                <a:latin typeface="Calibri"/>
+              </a:rPr>
+              <a:t>Jan</a:t>
+            </a:r>
+            <a:r>
+              <a:rPr sz="1000" b="0" i="0">
+                <a:solidFill>
+                  <a:srgbClr val="94A3B8"/>
+                </a:solidFill>
+                <a:latin typeface="Calibri"/>
+              </a:rPr>
+              <a:t> 27</a:t>
+            </a:r>
+          </a:p>
+        </p:txBody>
+      </p:sp>
+      <p:cxnSp>
+        <p:nvCxnSpPr>
+          <p:cNvPr id="10" name="Connector 9"/>
+          <p:cNvCxnSpPr/>
+          <p:nvPr/>
+        </p:nvCxnSpPr>
+        <p:spPr>
+          <a:xfrm>
+            <a:off x="5823069" y="1325880"/>
+            <a:ext cx="0" cy="4370832"/>
+          </a:xfrm>
+          <a:prstGeom prst="line">
+            <a:avLst/>
+          </a:prstGeom>
+          <a:ln w="9525">
+            <a:solidFill>
+              <a:srgbClr val="334155"/>
+            </a:solidFill>
+          </a:ln>
+        </p:spPr>
+      </p:cxnSp>
+      <p:sp>
+        <p:nvSpPr>
+          <p:cNvPr id="11" name="TextBox 10"/>
+          <p:cNvSpPr txBox="1"/>
+          <p:nvPr/>
+        </p:nvSpPr>
+        <p:spPr>
+          <a:xfrm>
+            <a:off x="7036673" y="1325880"/>
+            <a:ext cx="1096158" cy="347472"/>
+          </a:xfrm>
+          <a:prstGeom prst="rect">
+            <a:avLst/>
+          </a:prstGeom>
+          <a:noFill/>
+        </p:spPr>
+        <p:txBody>
+          <a:bodyPr wrap="square" lIns="0" rIns="0" tIns="0" bIns="0" anchor="ctr">
+            <a:spAutoFit/>
+          </a:bodyPr>
+          <a:lstStyle/>
+          <a:p>
+            <a:pPr algn="ctr"/>
+            <a:r>
+              <a:rPr sz="1200" b="1" i="0">
+                <a:solidFill>
+                  <a:srgbClr val="F1F5F9"/>
+                </a:solidFill>
+                <a:latin typeface="Calibri"/>
+              </a:rPr>
+              <a:t>Feb</a:t>
+            </a:r>
+            <a:r>
+              <a:rPr sz="1000" b="0" i="0">
+                <a:solidFill>
+                  <a:srgbClr val="94A3B8"/>
+                </a:solidFill>
+                <a:latin typeface="Calibri"/>
+              </a:rPr>
+              <a:t> 27</a:t>
+            </a:r>
+          </a:p>
+        </p:txBody>
+      </p:sp>
+      <p:cxnSp>
+        <p:nvCxnSpPr>
+          <p:cNvPr id="12" name="Connector 11"/>
+          <p:cNvCxnSpPr/>
+          <p:nvPr/>
+        </p:nvCxnSpPr>
+        <p:spPr>
+          <a:xfrm>
+            <a:off x="7036673" y="1325880"/>
+            <a:ext cx="0" cy="4370832"/>
+          </a:xfrm>
+          <a:prstGeom prst="line">
+            <a:avLst/>
+          </a:prstGeom>
+          <a:ln w="9525">
+            <a:solidFill>
+              <a:srgbClr val="334155"/>
+            </a:solidFill>
+          </a:ln>
+        </p:spPr>
+      </p:cxnSp>
+      <p:sp>
+        <p:nvSpPr>
+          <p:cNvPr id="13" name="TextBox 12"/>
+          <p:cNvSpPr txBox="1"/>
+          <p:nvPr/>
+        </p:nvSpPr>
+        <p:spPr>
+          <a:xfrm>
+            <a:off x="8132832" y="1325880"/>
+            <a:ext cx="1213603" cy="347472"/>
+          </a:xfrm>
+          <a:prstGeom prst="rect">
+            <a:avLst/>
+          </a:prstGeom>
+          <a:noFill/>
+        </p:spPr>
+        <p:txBody>
+          <a:bodyPr wrap="square" lIns="0" rIns="0" tIns="0" bIns="0" anchor="ctr">
+            <a:spAutoFit/>
+          </a:bodyPr>
+          <a:lstStyle/>
+          <a:p>
+            <a:pPr algn="ctr"/>
+            <a:r>
+              <a:rPr sz="1200" b="1" i="0">
+                <a:solidFill>
+                  <a:srgbClr val="F1F5F9"/>
+                </a:solidFill>
+                <a:latin typeface="Calibri"/>
+              </a:rPr>
+              <a:t>Mar</a:t>
+            </a:r>
+            <a:r>
+              <a:rPr sz="1000" b="0" i="0">
+                <a:solidFill>
+                  <a:srgbClr val="94A3B8"/>
+                </a:solidFill>
+                <a:latin typeface="Calibri"/>
+              </a:rPr>
+              <a:t> 27</a:t>
+            </a:r>
+          </a:p>
+        </p:txBody>
+      </p:sp>
+      <p:cxnSp>
+        <p:nvCxnSpPr>
+          <p:cNvPr id="14" name="Connector 13"/>
+          <p:cNvCxnSpPr/>
+          <p:nvPr/>
+        </p:nvCxnSpPr>
+        <p:spPr>
+          <a:xfrm>
+            <a:off x="8132832" y="1325880"/>
+            <a:ext cx="0" cy="4370832"/>
+          </a:xfrm>
+          <a:prstGeom prst="line">
+            <a:avLst/>
+          </a:prstGeom>
+          <a:ln w="9525">
+            <a:solidFill>
+              <a:srgbClr val="334155"/>
+            </a:solidFill>
+          </a:ln>
+        </p:spPr>
+      </p:cxnSp>
+      <p:sp>
+        <p:nvSpPr>
+          <p:cNvPr id="15" name="TextBox 14"/>
+          <p:cNvSpPr txBox="1"/>
+          <p:nvPr/>
+        </p:nvSpPr>
+        <p:spPr>
+          <a:xfrm>
+            <a:off x="9346435" y="1325880"/>
+            <a:ext cx="1174455" cy="347472"/>
+          </a:xfrm>
+          <a:prstGeom prst="rect">
+            <a:avLst/>
+          </a:prstGeom>
+          <a:noFill/>
+        </p:spPr>
+        <p:txBody>
+          <a:bodyPr wrap="square" lIns="0" rIns="0" tIns="0" bIns="0" anchor="ctr">
+            <a:spAutoFit/>
+          </a:bodyPr>
+          <a:lstStyle/>
+          <a:p>
+            <a:pPr algn="ctr"/>
+            <a:r>
+              <a:rPr sz="1200" b="1" i="0">
+                <a:solidFill>
+                  <a:srgbClr val="F1F5F9"/>
+                </a:solidFill>
+                <a:latin typeface="Calibri"/>
+              </a:rPr>
+              <a:t>Apr</a:t>
+            </a:r>
+            <a:r>
+              <a:rPr sz="1000" b="0" i="0">
+                <a:solidFill>
+                  <a:srgbClr val="94A3B8"/>
+                </a:solidFill>
+                <a:latin typeface="Calibri"/>
+              </a:rPr>
+              <a:t> 27</a:t>
+            </a:r>
+          </a:p>
+        </p:txBody>
+      </p:sp>
+      <p:cxnSp>
+        <p:nvCxnSpPr>
+          <p:cNvPr id="16" name="Connector 15"/>
+          <p:cNvCxnSpPr/>
+          <p:nvPr/>
+        </p:nvCxnSpPr>
+        <p:spPr>
+          <a:xfrm>
+            <a:off x="9346435" y="1325880"/>
+            <a:ext cx="0" cy="4370832"/>
+          </a:xfrm>
+          <a:prstGeom prst="line">
+            <a:avLst/>
+          </a:prstGeom>
+          <a:ln w="9525">
+            <a:solidFill>
+              <a:srgbClr val="334155"/>
+            </a:solidFill>
+          </a:ln>
+        </p:spPr>
+      </p:cxnSp>
+      <p:sp>
+        <p:nvSpPr>
+          <p:cNvPr id="17" name="TextBox 16"/>
+          <p:cNvSpPr txBox="1"/>
+          <p:nvPr/>
+        </p:nvSpPr>
+        <p:spPr>
+          <a:xfrm>
+            <a:off x="10520891" y="1325880"/>
+            <a:ext cx="1213603" cy="347472"/>
+          </a:xfrm>
+          <a:prstGeom prst="rect">
+            <a:avLst/>
+          </a:prstGeom>
+          <a:noFill/>
+        </p:spPr>
+        <p:txBody>
+          <a:bodyPr wrap="square" lIns="0" rIns="0" tIns="0" bIns="0" anchor="ctr">
+            <a:spAutoFit/>
+          </a:bodyPr>
+          <a:lstStyle/>
+          <a:p>
+            <a:pPr algn="ctr"/>
+            <a:r>
+              <a:rPr sz="1200" b="1" i="0">
+                <a:solidFill>
+                  <a:srgbClr val="F1F5F9"/>
+                </a:solidFill>
+                <a:latin typeface="Calibri"/>
+              </a:rPr>
+              <a:t>May</a:t>
+            </a:r>
+            <a:r>
+              <a:rPr sz="1000" b="0" i="0">
+                <a:solidFill>
+                  <a:srgbClr val="94A3B8"/>
+                </a:solidFill>
+                <a:latin typeface="Calibri"/>
+              </a:rPr>
+              <a:t> 27</a:t>
+            </a:r>
+          </a:p>
+        </p:txBody>
+      </p:sp>
+      <p:cxnSp>
+        <p:nvCxnSpPr>
+          <p:cNvPr id="18" name="Connector 17"/>
+          <p:cNvCxnSpPr/>
+          <p:nvPr/>
+        </p:nvCxnSpPr>
+        <p:spPr>
+          <a:xfrm>
+            <a:off x="10520891" y="1325880"/>
+            <a:ext cx="0" cy="4370832"/>
+          </a:xfrm>
+          <a:prstGeom prst="line">
+            <a:avLst/>
+          </a:prstGeom>
+          <a:ln w="9525">
+            <a:solidFill>
+              <a:srgbClr val="334155"/>
+            </a:solidFill>
+          </a:ln>
+        </p:spPr>
+      </p:cxnSp>
+      <p:cxnSp>
+        <p:nvCxnSpPr>
+          <p:cNvPr id="19" name="Connector 18"/>
+          <p:cNvCxnSpPr/>
+          <p:nvPr/>
+        </p:nvCxnSpPr>
+        <p:spPr>
+          <a:xfrm>
+            <a:off x="2926080" y="1709928"/>
+            <a:ext cx="8808415" cy="0"/>
+          </a:xfrm>
+          <a:prstGeom prst="line">
+            <a:avLst/>
+          </a:prstGeom>
+          <a:ln w="12700">
+            <a:solidFill>
+              <a:srgbClr val="94A3B8"/>
+            </a:solidFill>
+          </a:ln>
+        </p:spPr>
+      </p:cxnSp>
+      <p:sp>
+        <p:nvSpPr>
+          <p:cNvPr id="20" name="P2P band"/>
+          <p:cNvSpPr/>
+          <p:nvPr/>
+        </p:nvSpPr>
+        <p:spPr>
+          <a:xfrm>
+            <a:off x="457200" y="1783080"/>
+            <a:ext cx="11277295" cy="329184"/>
+          </a:xfrm>
+          <a:prstGeom prst="rect">
+            <a:avLst/>
+          </a:prstGeom>
+          <a:solidFill>
+            <a:srgbClr val="1E293B"/>
+          </a:solidFill>
+          <a:ln>
+            <a:noFill/>
+          </a:ln>
+        </p:spPr>
+        <p:txBody>
+          <a:bodyPr rtlCol="0" anchor="ctr"/>
+          <a:lstStyle/>
+          <a:p>
+            <a:pPr algn="ctr"/>
+          </a:p>
+        </p:txBody>
+      </p:sp>
+      <p:sp>
+        <p:nvSpPr>
+          <p:cNvPr id="21" name="TextBox 20"/>
+          <p:cNvSpPr txBox="1"/>
+          <p:nvPr/>
+        </p:nvSpPr>
+        <p:spPr>
+          <a:xfrm>
+            <a:off x="548640" y="1783080"/>
+            <a:ext cx="2377440" cy="329184"/>
+          </a:xfrm>
+          <a:prstGeom prst="rect">
+            <a:avLst/>
+          </a:prstGeom>
+          <a:noFill/>
+        </p:spPr>
+        <p:txBody>
+          <a:bodyPr wrap="square" lIns="0" rIns="0" tIns="0" bIns="0" anchor="ctr">
+            <a:spAutoFit/>
+          </a:bodyPr>
+          <a:lstStyle/>
+          <a:p>
+            <a:pPr algn="l"/>
+            <a:r>
+              <a:rPr sz="1300" b="1" i="0">
+                <a:solidFill>
+                  <a:srgbClr val="F1F5F9"/>
+                </a:solidFill>
+                <a:latin typeface="Calibri"/>
+              </a:rPr>
+              <a:t>Procure-to-Pay</a:t>
+            </a:r>
+            <a:r>
+              <a:rPr sz="1100" b="0" i="0">
+                <a:solidFill>
+                  <a:srgbClr val="94A3B8"/>
+                </a:solidFill>
+                <a:latin typeface="Calibri"/>
+              </a:rPr>
+              <a:t>  P2P</a:t>
+            </a:r>
+          </a:p>
+        </p:txBody>
+      </p:sp>
+      <p:sp>
+        <p:nvSpPr>
+          <p:cNvPr id="22" name="P2P contract star"/>
+          <p:cNvSpPr/>
+          <p:nvPr/>
+        </p:nvSpPr>
+        <p:spPr>
+          <a:xfrm>
+            <a:off x="2807208" y="1828800"/>
+            <a:ext cx="237744" cy="237744"/>
+          </a:xfrm>
+          <a:prstGeom prst="star5">
+            <a:avLst/>
+          </a:prstGeom>
+          <a:solidFill>
+            <a:srgbClr val="F2C94C"/>
+          </a:solidFill>
+          <a:ln>
+            <a:noFill/>
+          </a:ln>
+        </p:spPr>
+        <p:txBody>
+          <a:bodyPr rtlCol="0" anchor="ctr"/>
+          <a:lstStyle/>
+          <a:p>
+            <a:pPr algn="ctr"/>
+          </a:p>
+        </p:txBody>
+      </p:sp>
+      <p:sp>
+        <p:nvSpPr>
+          <p:cNvPr id="23" name="P2P go-live"/>
+          <p:cNvSpPr/>
+          <p:nvPr/>
+        </p:nvSpPr>
+        <p:spPr>
+          <a:xfrm>
+            <a:off x="7788213" y="1837943"/>
+            <a:ext cx="219456" cy="219456"/>
+          </a:xfrm>
+          <a:prstGeom prst="diamond">
+            <a:avLst/>
+          </a:prstGeom>
+          <a:solidFill>
+            <a:srgbClr val="F87171"/>
+          </a:solidFill>
+          <a:ln>
+            <a:noFill/>
+          </a:ln>
+        </p:spPr>
+        <p:txBody>
+          <a:bodyPr rtlCol="0" anchor="ctr"/>
+          <a:lstStyle/>
+          <a:p>
+            <a:pPr algn="ctr"/>
+          </a:p>
+        </p:txBody>
+      </p:sp>
+      <p:sp>
+        <p:nvSpPr>
+          <p:cNvPr id="24" name="TextBox 23"/>
+          <p:cNvSpPr txBox="1"/>
+          <p:nvPr/>
+        </p:nvSpPr>
+        <p:spPr>
+          <a:xfrm>
+            <a:off x="8062533" y="1783080"/>
+            <a:ext cx="1371600" cy="329184"/>
+          </a:xfrm>
+          <a:prstGeom prst="rect">
+            <a:avLst/>
+          </a:prstGeom>
+          <a:noFill/>
+        </p:spPr>
+        <p:txBody>
+          <a:bodyPr wrap="square" lIns="0" rIns="0" tIns="0" bIns="0" anchor="ctr">
+            <a:spAutoFit/>
+          </a:bodyPr>
+          <a:lstStyle/>
+          <a:p>
+            <a:pPr algn="l"/>
+            <a:r>
+              <a:rPr sz="1100" b="1" i="0">
+                <a:solidFill>
+                  <a:srgbClr val="F87171"/>
+                </a:solidFill>
+                <a:latin typeface="Calibri"/>
+              </a:rPr>
+              <a:t>Go-Live 23 Feb 27</a:t>
+            </a:r>
+          </a:p>
+        </p:txBody>
+      </p:sp>
+      <p:sp>
+        <p:nvSpPr>
+          <p:cNvPr id="25" name="TextBox 24"/>
+          <p:cNvSpPr txBox="1"/>
+          <p:nvPr/>
+        </p:nvSpPr>
+        <p:spPr>
+          <a:xfrm>
+            <a:off x="731520" y="2112264"/>
+            <a:ext cx="2194560" cy="228600"/>
+          </a:xfrm>
+          <a:prstGeom prst="rect">
+            <a:avLst/>
+          </a:prstGeom>
+          <a:noFill/>
+        </p:spPr>
+        <p:txBody>
+          <a:bodyPr wrap="square" lIns="0" rIns="0" tIns="0" bIns="0" anchor="ctr">
+            <a:spAutoFit/>
+          </a:bodyPr>
+          <a:lstStyle/>
+          <a:p>
+            <a:pPr algn="l"/>
+            <a:r>
+              <a:rPr sz="1100" b="0" i="0">
+                <a:solidFill>
+                  <a:srgbClr val="F1F5F9"/>
+                </a:solidFill>
+                <a:latin typeface="Calibri"/>
+              </a:rPr>
+              <a:t>Hiring</a:t>
+            </a:r>
+          </a:p>
+        </p:txBody>
+      </p:sp>
+      <p:sp>
+        <p:nvSpPr>
+          <p:cNvPr id="26" name="P2P Hiring bar"/>
+          <p:cNvSpPr/>
+          <p:nvPr/>
+        </p:nvSpPr>
+        <p:spPr>
+          <a:xfrm>
+            <a:off x="2965228" y="2148840"/>
+            <a:ext cx="2192316" cy="155448"/>
+          </a:xfrm>
+          <a:prstGeom prst="roundRect">
+            <a:avLst>
+              <a:gd name="adj" fmla="val 25000"/>
+            </a:avLst>
+          </a:prstGeom>
+          <a:solidFill>
+            <a:srgbClr val="5B8FD0"/>
+          </a:solidFill>
+          <a:ln>
+            <a:noFill/>
+          </a:ln>
+        </p:spPr>
+        <p:txBody>
+          <a:bodyPr rtlCol="0" anchor="ctr" lIns="0" rIns="0" tIns="0" bIns="0" wrap="none"/>
+          <a:lstStyle/>
+          <a:p>
+            <a:pPr algn="ctr"/>
+            <a:r>
+              <a:rPr sz="900" b="1">
+                <a:solidFill>
+                  <a:srgbClr val="FFFFFF"/>
+                </a:solidFill>
+                <a:latin typeface="Calibri"/>
+              </a:rPr>
+              <a:t>8 wks</a:t>
+            </a:r>
+          </a:p>
+        </p:txBody>
+      </p:sp>
+      <p:sp>
+        <p:nvSpPr>
+          <p:cNvPr id="27" name="TextBox 26"/>
+          <p:cNvSpPr txBox="1"/>
+          <p:nvPr/>
+        </p:nvSpPr>
+        <p:spPr>
+          <a:xfrm>
+            <a:off x="731520" y="2340864"/>
+            <a:ext cx="2194560" cy="228600"/>
+          </a:xfrm>
+          <a:prstGeom prst="rect">
+            <a:avLst/>
+          </a:prstGeom>
+          <a:noFill/>
+        </p:spPr>
+        <p:txBody>
+          <a:bodyPr wrap="square" lIns="0" rIns="0" tIns="0" bIns="0" anchor="ctr">
+            <a:spAutoFit/>
+          </a:bodyPr>
+          <a:lstStyle/>
+          <a:p>
+            <a:pPr algn="l"/>
+            <a:r>
+              <a:rPr sz="1100" b="0" i="0">
+                <a:solidFill>
+                  <a:srgbClr val="F1F5F9"/>
+                </a:solidFill>
+                <a:latin typeface="Calibri"/>
+              </a:rPr>
+              <a:t>Pre-Onboarding</a:t>
+            </a:r>
+          </a:p>
+        </p:txBody>
+      </p:sp>
+      <p:sp>
+        <p:nvSpPr>
+          <p:cNvPr id="28" name="P2P Pre-Onboarding bar"/>
+          <p:cNvSpPr/>
+          <p:nvPr/>
+        </p:nvSpPr>
+        <p:spPr>
+          <a:xfrm>
+            <a:off x="5157545" y="2377440"/>
+            <a:ext cx="548079" cy="155448"/>
+          </a:xfrm>
+          <a:prstGeom prst="roundRect">
+            <a:avLst>
+              <a:gd name="adj" fmla="val 25000"/>
+            </a:avLst>
+          </a:prstGeom>
+          <a:solidFill>
+            <a:srgbClr val="A9C6E8"/>
+          </a:solidFill>
+          <a:ln>
+            <a:noFill/>
+          </a:ln>
+        </p:spPr>
+        <p:txBody>
+          <a:bodyPr rtlCol="0" anchor="ctr" lIns="0" rIns="0" tIns="0" bIns="0" wrap="none"/>
+          <a:lstStyle/>
+          <a:p>
+            <a:pPr algn="ctr"/>
+            <a:r>
+              <a:rPr sz="900" b="1">
+                <a:solidFill>
+                  <a:srgbClr val="1F2937"/>
+                </a:solidFill>
+                <a:latin typeface="Calibri"/>
+              </a:rPr>
+              <a:t>2 wks</a:t>
+            </a:r>
+          </a:p>
+        </p:txBody>
+      </p:sp>
+      <p:sp>
+        <p:nvSpPr>
+          <p:cNvPr id="29" name="TextBox 28"/>
+          <p:cNvSpPr txBox="1"/>
+          <p:nvPr/>
+        </p:nvSpPr>
+        <p:spPr>
+          <a:xfrm>
+            <a:off x="731520" y="2569464"/>
+            <a:ext cx="2194560" cy="228600"/>
+          </a:xfrm>
+          <a:prstGeom prst="rect">
+            <a:avLst/>
+          </a:prstGeom>
+          <a:noFill/>
+        </p:spPr>
+        <p:txBody>
+          <a:bodyPr wrap="square" lIns="0" rIns="0" tIns="0" bIns="0" anchor="ctr">
+            <a:spAutoFit/>
+          </a:bodyPr>
+          <a:lstStyle/>
+          <a:p>
+            <a:pPr algn="l"/>
+            <a:r>
+              <a:rPr sz="1100" b="0" i="0">
+                <a:solidFill>
+                  <a:srgbClr val="F1F5F9"/>
+                </a:solidFill>
+                <a:latin typeface="Calibri"/>
+              </a:rPr>
+              <a:t>Knowledge Transfer</a:t>
+            </a:r>
+          </a:p>
+        </p:txBody>
+      </p:sp>
+      <p:sp>
+        <p:nvSpPr>
+          <p:cNvPr id="30" name="P2P Knowledge Transfer bar"/>
+          <p:cNvSpPr/>
+          <p:nvPr/>
+        </p:nvSpPr>
+        <p:spPr>
+          <a:xfrm>
+            <a:off x="5705624" y="2606040"/>
+            <a:ext cx="1096158" cy="155448"/>
+          </a:xfrm>
+          <a:prstGeom prst="roundRect">
+            <a:avLst>
+              <a:gd name="adj" fmla="val 25000"/>
+            </a:avLst>
+          </a:prstGeom>
+          <a:solidFill>
+            <a:srgbClr val="F5B85A"/>
+          </a:solidFill>
+          <a:ln>
+            <a:noFill/>
+          </a:ln>
+        </p:spPr>
+        <p:txBody>
+          <a:bodyPr rtlCol="0" anchor="ctr" lIns="0" rIns="0" tIns="0" bIns="0" wrap="none"/>
+          <a:lstStyle/>
+          <a:p>
+            <a:pPr algn="ctr"/>
+            <a:r>
+              <a:rPr sz="900" b="1">
+                <a:solidFill>
+                  <a:srgbClr val="1F2937"/>
+                </a:solidFill>
+                <a:latin typeface="Calibri"/>
+              </a:rPr>
+              <a:t>4 wks</a:t>
+            </a:r>
+          </a:p>
+        </p:txBody>
+      </p:sp>
+      <p:sp>
+        <p:nvSpPr>
+          <p:cNvPr id="31" name="TextBox 30"/>
+          <p:cNvSpPr txBox="1"/>
+          <p:nvPr/>
+        </p:nvSpPr>
+        <p:spPr>
+          <a:xfrm>
+            <a:off x="731520" y="2798064"/>
+            <a:ext cx="2194560" cy="228600"/>
+          </a:xfrm>
+          <a:prstGeom prst="rect">
+            <a:avLst/>
+          </a:prstGeom>
+          <a:noFill/>
+        </p:spPr>
+        <p:txBody>
+          <a:bodyPr wrap="square" lIns="0" rIns="0" tIns="0" bIns="0" anchor="ctr">
+            <a:spAutoFit/>
+          </a:bodyPr>
+          <a:lstStyle/>
+          <a:p>
+            <a:pPr algn="l"/>
+            <a:r>
+              <a:rPr sz="1100" b="0" i="0">
+                <a:solidFill>
+                  <a:srgbClr val="F1F5F9"/>
+                </a:solidFill>
+                <a:latin typeface="Calibri"/>
+              </a:rPr>
+              <a:t>Guided Production</a:t>
+            </a:r>
+          </a:p>
+        </p:txBody>
+      </p:sp>
+      <p:sp>
+        <p:nvSpPr>
+          <p:cNvPr id="32" name="P2P Guided Production bar"/>
+          <p:cNvSpPr/>
+          <p:nvPr/>
+        </p:nvSpPr>
+        <p:spPr>
+          <a:xfrm>
+            <a:off x="6801782" y="2834640"/>
+            <a:ext cx="1096158" cy="155448"/>
+          </a:xfrm>
+          <a:prstGeom prst="roundRect">
+            <a:avLst>
+              <a:gd name="adj" fmla="val 25000"/>
+            </a:avLst>
+          </a:prstGeom>
+          <a:solidFill>
+            <a:srgbClr val="A68BD6"/>
+          </a:solidFill>
+          <a:ln>
+            <a:noFill/>
+          </a:ln>
+        </p:spPr>
+        <p:txBody>
+          <a:bodyPr rtlCol="0" anchor="ctr" lIns="0" rIns="0" tIns="0" bIns="0" wrap="none"/>
+          <a:lstStyle/>
+          <a:p>
+            <a:pPr algn="ctr"/>
+            <a:r>
+              <a:rPr sz="900" b="1">
+                <a:solidFill>
+                  <a:srgbClr val="FFFFFF"/>
+                </a:solidFill>
+                <a:latin typeface="Calibri"/>
+              </a:rPr>
+              <a:t>4 wks</a:t>
+            </a:r>
+          </a:p>
+        </p:txBody>
+      </p:sp>
+      <p:sp>
+        <p:nvSpPr>
+          <p:cNvPr id="33" name="OTC band"/>
+          <p:cNvSpPr/>
+          <p:nvPr/>
+        </p:nvSpPr>
+        <p:spPr>
+          <a:xfrm>
+            <a:off x="457200" y="3118104"/>
+            <a:ext cx="11277295" cy="329184"/>
+          </a:xfrm>
+          <a:prstGeom prst="rect">
+            <a:avLst/>
+          </a:prstGeom>
+          <a:solidFill>
+            <a:srgbClr val="1E293B"/>
+          </a:solidFill>
+          <a:ln>
+            <a:noFill/>
+          </a:ln>
+        </p:spPr>
+        <p:txBody>
+          <a:bodyPr rtlCol="0" anchor="ctr"/>
+          <a:lstStyle/>
+          <a:p>
+            <a:pPr algn="ctr"/>
+          </a:p>
+        </p:txBody>
+      </p:sp>
+      <p:sp>
+        <p:nvSpPr>
+          <p:cNvPr id="34" name="TextBox 33"/>
+          <p:cNvSpPr txBox="1"/>
+          <p:nvPr/>
+        </p:nvSpPr>
+        <p:spPr>
+          <a:xfrm>
+            <a:off x="548640" y="3118104"/>
+            <a:ext cx="2377440" cy="329184"/>
+          </a:xfrm>
+          <a:prstGeom prst="rect">
+            <a:avLst/>
+          </a:prstGeom>
+          <a:noFill/>
+        </p:spPr>
+        <p:txBody>
+          <a:bodyPr wrap="square" lIns="0" rIns="0" tIns="0" bIns="0" anchor="ctr">
+            <a:spAutoFit/>
+          </a:bodyPr>
+          <a:lstStyle/>
+          <a:p>
+            <a:pPr algn="l"/>
+            <a:r>
+              <a:rPr sz="1300" b="1" i="0">
+                <a:solidFill>
+                  <a:srgbClr val="F1F5F9"/>
+                </a:solidFill>
+                <a:latin typeface="Calibri"/>
+              </a:rPr>
+              <a:t>Order-to-Cash</a:t>
+            </a:r>
+            <a:r>
+              <a:rPr sz="1100" b="0" i="0">
+                <a:solidFill>
+                  <a:srgbClr val="94A3B8"/>
+                </a:solidFill>
+                <a:latin typeface="Calibri"/>
+              </a:rPr>
+              <a:t>  OTC</a:t>
+            </a:r>
+          </a:p>
+        </p:txBody>
+      </p:sp>
+      <p:sp>
+        <p:nvSpPr>
+          <p:cNvPr id="35" name="OTC contract star"/>
+          <p:cNvSpPr/>
+          <p:nvPr/>
+        </p:nvSpPr>
+        <p:spPr>
+          <a:xfrm>
+            <a:off x="2807208" y="3163824"/>
+            <a:ext cx="237744" cy="237744"/>
+          </a:xfrm>
+          <a:prstGeom prst="star5">
+            <a:avLst/>
+          </a:prstGeom>
+          <a:solidFill>
+            <a:srgbClr val="F2C94C"/>
+          </a:solidFill>
+          <a:ln>
+            <a:noFill/>
+          </a:ln>
+        </p:spPr>
+        <p:txBody>
+          <a:bodyPr rtlCol="0" anchor="ctr"/>
+          <a:lstStyle/>
+          <a:p>
+            <a:pPr algn="ctr"/>
+          </a:p>
+        </p:txBody>
+      </p:sp>
+      <p:sp>
+        <p:nvSpPr>
+          <p:cNvPr id="36" name="OTC go-live"/>
+          <p:cNvSpPr/>
+          <p:nvPr/>
+        </p:nvSpPr>
+        <p:spPr>
+          <a:xfrm>
+            <a:off x="7788213" y="3172968"/>
+            <a:ext cx="219456" cy="219456"/>
+          </a:xfrm>
+          <a:prstGeom prst="diamond">
+            <a:avLst/>
+          </a:prstGeom>
+          <a:solidFill>
+            <a:srgbClr val="F87171"/>
+          </a:solidFill>
+          <a:ln>
+            <a:noFill/>
+          </a:ln>
+        </p:spPr>
+        <p:txBody>
+          <a:bodyPr rtlCol="0" anchor="ctr"/>
+          <a:lstStyle/>
+          <a:p>
+            <a:pPr algn="ctr"/>
+          </a:p>
+        </p:txBody>
+      </p:sp>
+      <p:sp>
+        <p:nvSpPr>
+          <p:cNvPr id="37" name="TextBox 36"/>
+          <p:cNvSpPr txBox="1"/>
+          <p:nvPr/>
+        </p:nvSpPr>
+        <p:spPr>
+          <a:xfrm>
+            <a:off x="8062533" y="3118104"/>
+            <a:ext cx="1371600" cy="329184"/>
+          </a:xfrm>
+          <a:prstGeom prst="rect">
+            <a:avLst/>
+          </a:prstGeom>
+          <a:noFill/>
+        </p:spPr>
+        <p:txBody>
+          <a:bodyPr wrap="square" lIns="0" rIns="0" tIns="0" bIns="0" anchor="ctr">
+            <a:spAutoFit/>
+          </a:bodyPr>
+          <a:lstStyle/>
+          <a:p>
+            <a:pPr algn="l"/>
+            <a:r>
+              <a:rPr sz="1100" b="1" i="0">
+                <a:solidFill>
+                  <a:srgbClr val="F87171"/>
+                </a:solidFill>
+                <a:latin typeface="Calibri"/>
+              </a:rPr>
+              <a:t>Go-Live 23 Feb 27</a:t>
+            </a:r>
+          </a:p>
+        </p:txBody>
+      </p:sp>
+      <p:sp>
+        <p:nvSpPr>
+          <p:cNvPr id="38" name="TextBox 37"/>
+          <p:cNvSpPr txBox="1"/>
+          <p:nvPr/>
+        </p:nvSpPr>
+        <p:spPr>
+          <a:xfrm>
+            <a:off x="731520" y="3447288"/>
+            <a:ext cx="2194560" cy="228600"/>
+          </a:xfrm>
+          <a:prstGeom prst="rect">
+            <a:avLst/>
+          </a:prstGeom>
+          <a:noFill/>
+        </p:spPr>
+        <p:txBody>
+          <a:bodyPr wrap="square" lIns="0" rIns="0" tIns="0" bIns="0" anchor="ctr">
+            <a:spAutoFit/>
+          </a:bodyPr>
+          <a:lstStyle/>
+          <a:p>
+            <a:pPr algn="l"/>
+            <a:r>
+              <a:rPr sz="1100" b="0" i="0">
+                <a:solidFill>
+                  <a:srgbClr val="F1F5F9"/>
+                </a:solidFill>
+                <a:latin typeface="Calibri"/>
+              </a:rPr>
+              <a:t>Hiring</a:t>
+            </a:r>
+          </a:p>
+        </p:txBody>
+      </p:sp>
+      <p:sp>
+        <p:nvSpPr>
+          <p:cNvPr id="39" name="OTC Hiring bar"/>
+          <p:cNvSpPr/>
+          <p:nvPr/>
+        </p:nvSpPr>
+        <p:spPr>
+          <a:xfrm>
+            <a:off x="2965228" y="3483864"/>
+            <a:ext cx="2192316" cy="155448"/>
+          </a:xfrm>
+          <a:prstGeom prst="roundRect">
+            <a:avLst>
+              <a:gd name="adj" fmla="val 25000"/>
+            </a:avLst>
+          </a:prstGeom>
+          <a:solidFill>
+            <a:srgbClr val="5B8FD0"/>
+          </a:solidFill>
+          <a:ln>
+            <a:noFill/>
+          </a:ln>
+        </p:spPr>
+        <p:txBody>
+          <a:bodyPr rtlCol="0" anchor="ctr" lIns="0" rIns="0" tIns="0" bIns="0" wrap="none"/>
+          <a:lstStyle/>
+          <a:p>
+            <a:pPr algn="ctr"/>
+            <a:r>
+              <a:rPr sz="900" b="1">
+                <a:solidFill>
+                  <a:srgbClr val="FFFFFF"/>
+                </a:solidFill>
+                <a:latin typeface="Calibri"/>
+              </a:rPr>
+              <a:t>8 wks</a:t>
+            </a:r>
+          </a:p>
+        </p:txBody>
+      </p:sp>
+      <p:sp>
+        <p:nvSpPr>
+          <p:cNvPr id="40" name="TextBox 39"/>
+          <p:cNvSpPr txBox="1"/>
+          <p:nvPr/>
+        </p:nvSpPr>
+        <p:spPr>
+          <a:xfrm>
+            <a:off x="731520" y="3675887"/>
+            <a:ext cx="2194560" cy="228600"/>
+          </a:xfrm>
+          <a:prstGeom prst="rect">
+            <a:avLst/>
+          </a:prstGeom>
+          <a:noFill/>
+        </p:spPr>
+        <p:txBody>
+          <a:bodyPr wrap="square" lIns="0" rIns="0" tIns="0" bIns="0" anchor="ctr">
+            <a:spAutoFit/>
+          </a:bodyPr>
+          <a:lstStyle/>
+          <a:p>
+            <a:pPr algn="l"/>
+            <a:r>
+              <a:rPr sz="1100" b="0" i="0">
+                <a:solidFill>
+                  <a:srgbClr val="F1F5F9"/>
+                </a:solidFill>
+                <a:latin typeface="Calibri"/>
+              </a:rPr>
+              <a:t>Pre-Onboarding</a:t>
+            </a:r>
+          </a:p>
+        </p:txBody>
+      </p:sp>
+      <p:sp>
+        <p:nvSpPr>
+          <p:cNvPr id="41" name="OTC Pre-Onboarding bar"/>
+          <p:cNvSpPr/>
+          <p:nvPr/>
+        </p:nvSpPr>
+        <p:spPr>
+          <a:xfrm>
+            <a:off x="5157545" y="3712463"/>
+            <a:ext cx="548079" cy="155448"/>
+          </a:xfrm>
+          <a:prstGeom prst="roundRect">
+            <a:avLst>
+              <a:gd name="adj" fmla="val 25000"/>
+            </a:avLst>
+          </a:prstGeom>
+          <a:solidFill>
+            <a:srgbClr val="A9C6E8"/>
+          </a:solidFill>
+          <a:ln>
+            <a:noFill/>
+          </a:ln>
+        </p:spPr>
+        <p:txBody>
+          <a:bodyPr rtlCol="0" anchor="ctr" lIns="0" rIns="0" tIns="0" bIns="0" wrap="none"/>
+          <a:lstStyle/>
+          <a:p>
+            <a:pPr algn="ctr"/>
+            <a:r>
+              <a:rPr sz="900" b="1">
+                <a:solidFill>
+                  <a:srgbClr val="1F2937"/>
+                </a:solidFill>
+                <a:latin typeface="Calibri"/>
+              </a:rPr>
+              <a:t>2 wks</a:t>
+            </a:r>
+          </a:p>
+        </p:txBody>
+      </p:sp>
+      <p:sp>
+        <p:nvSpPr>
+          <p:cNvPr id="42" name="TextBox 41"/>
+          <p:cNvSpPr txBox="1"/>
+          <p:nvPr/>
+        </p:nvSpPr>
+        <p:spPr>
+          <a:xfrm>
+            <a:off x="731520" y="3904487"/>
+            <a:ext cx="2194560" cy="228600"/>
+          </a:xfrm>
+          <a:prstGeom prst="rect">
+            <a:avLst/>
+          </a:prstGeom>
+          <a:noFill/>
+        </p:spPr>
+        <p:txBody>
+          <a:bodyPr wrap="square" lIns="0" rIns="0" tIns="0" bIns="0" anchor="ctr">
+            <a:spAutoFit/>
+          </a:bodyPr>
+          <a:lstStyle/>
+          <a:p>
+            <a:pPr algn="l"/>
+            <a:r>
+              <a:rPr sz="1100" b="0" i="0">
+                <a:solidFill>
+                  <a:srgbClr val="F1F5F9"/>
+                </a:solidFill>
+                <a:latin typeface="Calibri"/>
+              </a:rPr>
+              <a:t>Knowledge Transfer</a:t>
+            </a:r>
+          </a:p>
+        </p:txBody>
+      </p:sp>
+      <p:sp>
+        <p:nvSpPr>
+          <p:cNvPr id="43" name="OTC Knowledge Transfer bar"/>
+          <p:cNvSpPr/>
+          <p:nvPr/>
+        </p:nvSpPr>
+        <p:spPr>
+          <a:xfrm>
+            <a:off x="5705624" y="3941063"/>
+            <a:ext cx="1096158" cy="155448"/>
+          </a:xfrm>
+          <a:prstGeom prst="roundRect">
+            <a:avLst>
+              <a:gd name="adj" fmla="val 25000"/>
+            </a:avLst>
+          </a:prstGeom>
+          <a:solidFill>
+            <a:srgbClr val="F5B85A"/>
+          </a:solidFill>
+          <a:ln>
+            <a:noFill/>
+          </a:ln>
+        </p:spPr>
+        <p:txBody>
+          <a:bodyPr rtlCol="0" anchor="ctr" lIns="0" rIns="0" tIns="0" bIns="0" wrap="none"/>
+          <a:lstStyle/>
+          <a:p>
+            <a:pPr algn="ctr"/>
+            <a:r>
+              <a:rPr sz="900" b="1">
+                <a:solidFill>
+                  <a:srgbClr val="1F2937"/>
+                </a:solidFill>
+                <a:latin typeface="Calibri"/>
+              </a:rPr>
+              <a:t>4 wks</a:t>
+            </a:r>
+          </a:p>
+        </p:txBody>
+      </p:sp>
+      <p:sp>
+        <p:nvSpPr>
+          <p:cNvPr id="44" name="TextBox 43"/>
+          <p:cNvSpPr txBox="1"/>
+          <p:nvPr/>
+        </p:nvSpPr>
+        <p:spPr>
+          <a:xfrm>
+            <a:off x="731520" y="4133087"/>
+            <a:ext cx="2194560" cy="228600"/>
+          </a:xfrm>
+          <a:prstGeom prst="rect">
+            <a:avLst/>
+          </a:prstGeom>
+          <a:noFill/>
+        </p:spPr>
+        <p:txBody>
+          <a:bodyPr wrap="square" lIns="0" rIns="0" tIns="0" bIns="0" anchor="ctr">
+            <a:spAutoFit/>
+          </a:bodyPr>
+          <a:lstStyle/>
+          <a:p>
+            <a:pPr algn="l"/>
+            <a:r>
+              <a:rPr sz="1100" b="0" i="0">
+                <a:solidFill>
+                  <a:srgbClr val="F1F5F9"/>
+                </a:solidFill>
+                <a:latin typeface="Calibri"/>
+              </a:rPr>
+              <a:t>Guided Production</a:t>
+            </a:r>
+          </a:p>
+        </p:txBody>
+      </p:sp>
+      <p:sp>
+        <p:nvSpPr>
+          <p:cNvPr id="45" name="OTC Guided Production bar"/>
+          <p:cNvSpPr/>
+          <p:nvPr/>
+        </p:nvSpPr>
+        <p:spPr>
+          <a:xfrm>
+            <a:off x="6801782" y="4169663"/>
+            <a:ext cx="1096158" cy="155448"/>
+          </a:xfrm>
+          <a:prstGeom prst="roundRect">
+            <a:avLst>
+              <a:gd name="adj" fmla="val 25000"/>
+            </a:avLst>
+          </a:prstGeom>
+          <a:solidFill>
+            <a:srgbClr val="A68BD6"/>
+          </a:solidFill>
+          <a:ln>
+            <a:noFill/>
+          </a:ln>
+        </p:spPr>
+        <p:txBody>
+          <a:bodyPr rtlCol="0" anchor="ctr" lIns="0" rIns="0" tIns="0" bIns="0" wrap="none"/>
+          <a:lstStyle/>
+          <a:p>
+            <a:pPr algn="ctr"/>
+            <a:r>
+              <a:rPr sz="900" b="1">
+                <a:solidFill>
+                  <a:srgbClr val="FFFFFF"/>
+                </a:solidFill>
+                <a:latin typeface="Calibri"/>
+              </a:rPr>
+              <a:t>4 wks</a:t>
+            </a:r>
+          </a:p>
+        </p:txBody>
+      </p:sp>
+      <p:sp>
+        <p:nvSpPr>
+          <p:cNvPr id="46" name="RTR band"/>
+          <p:cNvSpPr/>
+          <p:nvPr/>
+        </p:nvSpPr>
+        <p:spPr>
+          <a:xfrm>
+            <a:off x="457200" y="4453127"/>
+            <a:ext cx="11277295" cy="329184"/>
+          </a:xfrm>
+          <a:prstGeom prst="rect">
+            <a:avLst/>
+          </a:prstGeom>
+          <a:solidFill>
+            <a:srgbClr val="1E293B"/>
+          </a:solidFill>
+          <a:ln>
+            <a:noFill/>
+          </a:ln>
+        </p:spPr>
+        <p:txBody>
+          <a:bodyPr rtlCol="0" anchor="ctr"/>
+          <a:lstStyle/>
+          <a:p>
+            <a:pPr algn="ctr"/>
+          </a:p>
+        </p:txBody>
+      </p:sp>
+      <p:sp>
+        <p:nvSpPr>
+          <p:cNvPr id="47" name="TextBox 46"/>
+          <p:cNvSpPr txBox="1"/>
+          <p:nvPr/>
+        </p:nvSpPr>
+        <p:spPr>
+          <a:xfrm>
+            <a:off x="548640" y="4453127"/>
+            <a:ext cx="2377440" cy="329184"/>
+          </a:xfrm>
+          <a:prstGeom prst="rect">
+            <a:avLst/>
+          </a:prstGeom>
+          <a:noFill/>
+        </p:spPr>
+        <p:txBody>
+          <a:bodyPr wrap="square" lIns="0" rIns="0" tIns="0" bIns="0" anchor="ctr">
+            <a:spAutoFit/>
+          </a:bodyPr>
+          <a:lstStyle/>
+          <a:p>
+            <a:pPr algn="l"/>
+            <a:r>
+              <a:rPr sz="1300" b="1" i="0">
+                <a:solidFill>
+                  <a:srgbClr val="F1F5F9"/>
+                </a:solidFill>
+                <a:latin typeface="Calibri"/>
+              </a:rPr>
+              <a:t>Record-to-Report</a:t>
+            </a:r>
+            <a:r>
+              <a:rPr sz="1100" b="0" i="0">
+                <a:solidFill>
+                  <a:srgbClr val="94A3B8"/>
+                </a:solidFill>
+                <a:latin typeface="Calibri"/>
+              </a:rPr>
+              <a:t>  RTR</a:t>
+            </a:r>
+          </a:p>
+        </p:txBody>
+      </p:sp>
+      <p:sp>
+        <p:nvSpPr>
+          <p:cNvPr id="48" name="RTR contract star"/>
+          <p:cNvSpPr/>
+          <p:nvPr/>
+        </p:nvSpPr>
+        <p:spPr>
+          <a:xfrm>
+            <a:off x="2807208" y="4498847"/>
+            <a:ext cx="237744" cy="237744"/>
+          </a:xfrm>
+          <a:prstGeom prst="star5">
+            <a:avLst/>
+          </a:prstGeom>
+          <a:solidFill>
+            <a:srgbClr val="F2C94C"/>
+          </a:solidFill>
+          <a:ln>
+            <a:noFill/>
+          </a:ln>
+        </p:spPr>
+        <p:txBody>
+          <a:bodyPr rtlCol="0" anchor="ctr"/>
+          <a:lstStyle/>
+          <a:p>
+            <a:pPr algn="ctr"/>
+          </a:p>
+        </p:txBody>
+      </p:sp>
+      <p:sp>
+        <p:nvSpPr>
+          <p:cNvPr id="49" name="RTR go-live"/>
+          <p:cNvSpPr/>
+          <p:nvPr/>
+        </p:nvSpPr>
+        <p:spPr>
+          <a:xfrm>
+            <a:off x="10528608" y="4507991"/>
+            <a:ext cx="219456" cy="219456"/>
+          </a:xfrm>
+          <a:prstGeom prst="diamond">
+            <a:avLst/>
+          </a:prstGeom>
+          <a:solidFill>
+            <a:srgbClr val="F87171"/>
+          </a:solidFill>
+          <a:ln>
+            <a:noFill/>
+          </a:ln>
+        </p:spPr>
+        <p:txBody>
+          <a:bodyPr rtlCol="0" anchor="ctr"/>
+          <a:lstStyle/>
+          <a:p>
+            <a:pPr algn="ctr"/>
+          </a:p>
+        </p:txBody>
+      </p:sp>
+      <p:sp>
+        <p:nvSpPr>
+          <p:cNvPr id="50" name="TextBox 49"/>
+          <p:cNvSpPr txBox="1"/>
+          <p:nvPr/>
+        </p:nvSpPr>
+        <p:spPr>
+          <a:xfrm>
+            <a:off x="9102144" y="4453127"/>
+            <a:ext cx="1371600" cy="329184"/>
+          </a:xfrm>
+          <a:prstGeom prst="rect">
+            <a:avLst/>
+          </a:prstGeom>
+          <a:noFill/>
+        </p:spPr>
+        <p:txBody>
+          <a:bodyPr wrap="square" lIns="0" rIns="0" tIns="0" bIns="0" anchor="ctr">
+            <a:spAutoFit/>
+          </a:bodyPr>
+          <a:lstStyle/>
+          <a:p>
+            <a:pPr algn="r"/>
+            <a:r>
+              <a:rPr sz="1100" b="1" i="0">
+                <a:solidFill>
+                  <a:srgbClr val="F87171"/>
+                </a:solidFill>
+                <a:latin typeface="Calibri"/>
+              </a:rPr>
+              <a:t>Go-Live 04 May 27</a:t>
+            </a:r>
+          </a:p>
+        </p:txBody>
+      </p:sp>
+      <p:sp>
+        <p:nvSpPr>
+          <p:cNvPr id="51" name="TextBox 50"/>
+          <p:cNvSpPr txBox="1"/>
+          <p:nvPr/>
+        </p:nvSpPr>
+        <p:spPr>
+          <a:xfrm>
+            <a:off x="731520" y="4782312"/>
+            <a:ext cx="2194560" cy="228600"/>
+          </a:xfrm>
+          <a:prstGeom prst="rect">
+            <a:avLst/>
+          </a:prstGeom>
+          <a:noFill/>
+        </p:spPr>
+        <p:txBody>
+          <a:bodyPr wrap="square" lIns="0" rIns="0" tIns="0" bIns="0" anchor="ctr">
+            <a:spAutoFit/>
+          </a:bodyPr>
+          <a:lstStyle/>
+          <a:p>
+            <a:pPr algn="l"/>
+            <a:r>
+              <a:rPr sz="1100" b="0" i="0">
+                <a:solidFill>
+                  <a:srgbClr val="F1F5F9"/>
+                </a:solidFill>
+                <a:latin typeface="Calibri"/>
+              </a:rPr>
+              <a:t>Hiring</a:t>
+            </a:r>
+          </a:p>
+        </p:txBody>
+      </p:sp>
+      <p:sp>
+        <p:nvSpPr>
+          <p:cNvPr id="52" name="RTR Hiring bar"/>
+          <p:cNvSpPr/>
+          <p:nvPr/>
+        </p:nvSpPr>
+        <p:spPr>
+          <a:xfrm>
+            <a:off x="2965228" y="4818888"/>
+            <a:ext cx="2740395" cy="155448"/>
+          </a:xfrm>
+          <a:prstGeom prst="roundRect">
+            <a:avLst>
+              <a:gd name="adj" fmla="val 25000"/>
+            </a:avLst>
+          </a:prstGeom>
+          <a:solidFill>
+            <a:srgbClr val="5B8FD0"/>
+          </a:solidFill>
+          <a:ln>
+            <a:noFill/>
+          </a:ln>
+        </p:spPr>
+        <p:txBody>
+          <a:bodyPr rtlCol="0" anchor="ctr" lIns="0" rIns="0" tIns="0" bIns="0" wrap="none"/>
+          <a:lstStyle/>
+          <a:p>
+            <a:pPr algn="ctr"/>
+            <a:r>
+              <a:rPr sz="900" b="1">
+                <a:solidFill>
+                  <a:srgbClr val="FFFFFF"/>
+                </a:solidFill>
+                <a:latin typeface="Calibri"/>
+              </a:rPr>
+              <a:t>10 wks</a:t>
+            </a:r>
+          </a:p>
+        </p:txBody>
+      </p:sp>
+      <p:sp>
+        <p:nvSpPr>
+          <p:cNvPr id="53" name="TextBox 52"/>
+          <p:cNvSpPr txBox="1"/>
+          <p:nvPr/>
+        </p:nvSpPr>
+        <p:spPr>
+          <a:xfrm>
+            <a:off x="731520" y="5010912"/>
+            <a:ext cx="2194560" cy="228600"/>
+          </a:xfrm>
+          <a:prstGeom prst="rect">
+            <a:avLst/>
+          </a:prstGeom>
+          <a:noFill/>
+        </p:spPr>
+        <p:txBody>
+          <a:bodyPr wrap="square" lIns="0" rIns="0" tIns="0" bIns="0" anchor="ctr">
+            <a:spAutoFit/>
+          </a:bodyPr>
+          <a:lstStyle/>
+          <a:p>
+            <a:pPr algn="l"/>
+            <a:r>
+              <a:rPr sz="1100" b="0" i="0">
+                <a:solidFill>
+                  <a:srgbClr val="F1F5F9"/>
+                </a:solidFill>
+                <a:latin typeface="Calibri"/>
+              </a:rPr>
+              <a:t>Pre-Onboarding</a:t>
+            </a:r>
+          </a:p>
+        </p:txBody>
+      </p:sp>
+      <p:sp>
+        <p:nvSpPr>
+          <p:cNvPr id="54" name="RTR Pre-Onboarding bar"/>
+          <p:cNvSpPr/>
+          <p:nvPr/>
+        </p:nvSpPr>
+        <p:spPr>
+          <a:xfrm>
+            <a:off x="5705624" y="5047488"/>
+            <a:ext cx="548079" cy="155448"/>
+          </a:xfrm>
+          <a:prstGeom prst="roundRect">
+            <a:avLst>
+              <a:gd name="adj" fmla="val 25000"/>
+            </a:avLst>
+          </a:prstGeom>
+          <a:solidFill>
+            <a:srgbClr val="A9C6E8"/>
+          </a:solidFill>
+          <a:ln>
+            <a:noFill/>
+          </a:ln>
+        </p:spPr>
+        <p:txBody>
+          <a:bodyPr rtlCol="0" anchor="ctr" lIns="0" rIns="0" tIns="0" bIns="0" wrap="none"/>
+          <a:lstStyle/>
+          <a:p>
+            <a:pPr algn="ctr"/>
+            <a:r>
+              <a:rPr sz="900" b="1">
+                <a:solidFill>
+                  <a:srgbClr val="1F2937"/>
+                </a:solidFill>
+                <a:latin typeface="Calibri"/>
+              </a:rPr>
+              <a:t>2 wks</a:t>
+            </a:r>
+          </a:p>
+        </p:txBody>
+      </p:sp>
+      <p:sp>
+        <p:nvSpPr>
+          <p:cNvPr id="55" name="TextBox 54"/>
+          <p:cNvSpPr txBox="1"/>
+          <p:nvPr/>
+        </p:nvSpPr>
+        <p:spPr>
+          <a:xfrm>
+            <a:off x="731520" y="5239512"/>
+            <a:ext cx="2194560" cy="228600"/>
+          </a:xfrm>
+          <a:prstGeom prst="rect">
+            <a:avLst/>
+          </a:prstGeom>
+          <a:noFill/>
+        </p:spPr>
+        <p:txBody>
+          <a:bodyPr wrap="square" lIns="0" rIns="0" tIns="0" bIns="0" anchor="ctr">
+            <a:spAutoFit/>
+          </a:bodyPr>
+          <a:lstStyle/>
+          <a:p>
+            <a:pPr algn="l"/>
+            <a:r>
+              <a:rPr sz="1100" b="0" i="0">
+                <a:solidFill>
+                  <a:srgbClr val="F1F5F9"/>
+                </a:solidFill>
+                <a:latin typeface="Calibri"/>
+              </a:rPr>
+              <a:t>Knowledge Transfer</a:t>
+            </a:r>
+          </a:p>
+        </p:txBody>
+      </p:sp>
+      <p:sp>
+        <p:nvSpPr>
+          <p:cNvPr id="56" name="RTR Knowledge Transfer bar"/>
+          <p:cNvSpPr/>
+          <p:nvPr/>
+        </p:nvSpPr>
+        <p:spPr>
+          <a:xfrm>
+            <a:off x="6253703" y="5276088"/>
+            <a:ext cx="2192316" cy="155448"/>
+          </a:xfrm>
+          <a:prstGeom prst="roundRect">
+            <a:avLst>
+              <a:gd name="adj" fmla="val 25000"/>
+            </a:avLst>
+          </a:prstGeom>
+          <a:solidFill>
+            <a:srgbClr val="F5B85A"/>
+          </a:solidFill>
+          <a:ln>
+            <a:noFill/>
+          </a:ln>
+        </p:spPr>
+        <p:txBody>
+          <a:bodyPr rtlCol="0" anchor="ctr" lIns="0" rIns="0" tIns="0" bIns="0" wrap="none"/>
+          <a:lstStyle/>
+          <a:p>
+            <a:pPr algn="ctr"/>
+            <a:r>
+              <a:rPr sz="900" b="1">
+                <a:solidFill>
+                  <a:srgbClr val="1F2937"/>
+                </a:solidFill>
+                <a:latin typeface="Calibri"/>
+              </a:rPr>
+              <a:t>8 wks</a:t>
+            </a:r>
+          </a:p>
+        </p:txBody>
+      </p:sp>
+      <p:sp>
+        <p:nvSpPr>
+          <p:cNvPr id="57" name="TextBox 56"/>
+          <p:cNvSpPr txBox="1"/>
+          <p:nvPr/>
+        </p:nvSpPr>
+        <p:spPr>
+          <a:xfrm>
+            <a:off x="731520" y="5468112"/>
+            <a:ext cx="2194560" cy="228600"/>
+          </a:xfrm>
+          <a:prstGeom prst="rect">
+            <a:avLst/>
+          </a:prstGeom>
+          <a:noFill/>
+        </p:spPr>
+        <p:txBody>
+          <a:bodyPr wrap="square" lIns="0" rIns="0" tIns="0" bIns="0" anchor="ctr">
+            <a:spAutoFit/>
+          </a:bodyPr>
+          <a:lstStyle/>
+          <a:p>
+            <a:pPr algn="l"/>
+            <a:r>
+              <a:rPr sz="1100" b="0" i="0">
+                <a:solidFill>
+                  <a:srgbClr val="F1F5F9"/>
+                </a:solidFill>
+                <a:latin typeface="Calibri"/>
+              </a:rPr>
+              <a:t>Guided Production</a:t>
+            </a:r>
+          </a:p>
+        </p:txBody>
+      </p:sp>
+      <p:sp>
+        <p:nvSpPr>
+          <p:cNvPr id="58" name="RTR Guided Production bar"/>
+          <p:cNvSpPr/>
+          <p:nvPr/>
+        </p:nvSpPr>
+        <p:spPr>
+          <a:xfrm>
+            <a:off x="8446020" y="5504688"/>
+            <a:ext cx="2192316" cy="155448"/>
+          </a:xfrm>
+          <a:prstGeom prst="roundRect">
+            <a:avLst>
+              <a:gd name="adj" fmla="val 25000"/>
+            </a:avLst>
+          </a:prstGeom>
+          <a:solidFill>
+            <a:srgbClr val="A68BD6"/>
+          </a:solidFill>
+          <a:ln>
+            <a:noFill/>
+          </a:ln>
+        </p:spPr>
+        <p:txBody>
+          <a:bodyPr rtlCol="0" anchor="ctr" lIns="0" rIns="0" tIns="0" bIns="0" wrap="none"/>
+          <a:lstStyle/>
+          <a:p>
+            <a:pPr algn="ctr"/>
+            <a:r>
+              <a:rPr sz="900" b="1">
+                <a:solidFill>
+                  <a:srgbClr val="FFFFFF"/>
+                </a:solidFill>
+                <a:latin typeface="Calibri"/>
+              </a:rPr>
+              <a:t>8 wks</a:t>
+            </a:r>
+          </a:p>
+        </p:txBody>
+      </p:sp>
+      <p:sp>
+        <p:nvSpPr>
+          <p:cNvPr id="59" name="5-Point Star 58"/>
+          <p:cNvSpPr/>
+          <p:nvPr/>
+        </p:nvSpPr>
+        <p:spPr>
+          <a:xfrm>
+            <a:off x="457200" y="6153912"/>
+            <a:ext cx="182880" cy="182880"/>
+          </a:xfrm>
+          <a:prstGeom prst="star5">
+            <a:avLst/>
+          </a:prstGeom>
+          <a:solidFill>
+            <a:srgbClr val="F2C94C"/>
+          </a:solidFill>
+          <a:ln>
+            <a:noFill/>
+          </a:ln>
+        </p:spPr>
+        <p:txBody>
+          <a:bodyPr rtlCol="0" anchor="ctr"/>
+          <a:lstStyle/>
+          <a:p>
+            <a:pPr algn="ctr"/>
+          </a:p>
+        </p:txBody>
+      </p:sp>
+      <p:sp>
+        <p:nvSpPr>
+          <p:cNvPr id="60" name="TextBox 59"/>
+          <p:cNvSpPr txBox="1"/>
+          <p:nvPr/>
+        </p:nvSpPr>
+        <p:spPr>
+          <a:xfrm>
+            <a:off x="713232" y="6126480"/>
+            <a:ext cx="1120140" cy="237744"/>
+          </a:xfrm>
+          <a:prstGeom prst="rect">
+            <a:avLst/>
+          </a:prstGeom>
+          <a:noFill/>
+        </p:spPr>
+        <p:txBody>
+          <a:bodyPr wrap="square" lIns="0" rIns="0" tIns="0" bIns="0" anchor="ctr">
+            <a:spAutoFit/>
+          </a:bodyPr>
+          <a:lstStyle/>
+          <a:p>
+            <a:pPr algn="l"/>
+            <a:r>
+              <a:rPr sz="1100" b="0" i="0">
+                <a:solidFill>
+                  <a:srgbClr val="F1F5F9"/>
+                </a:solidFill>
+                <a:latin typeface="Calibri"/>
+              </a:rPr>
+              <a:t>Contract Signed</a:t>
+            </a:r>
+          </a:p>
+        </p:txBody>
+      </p:sp>
+      <p:sp>
+        <p:nvSpPr>
+          <p:cNvPr id="61" name="Rounded Rectangle 60"/>
+          <p:cNvSpPr/>
+          <p:nvPr/>
+        </p:nvSpPr>
+        <p:spPr>
+          <a:xfrm>
+            <a:off x="2061972" y="6153912"/>
+            <a:ext cx="365760" cy="182880"/>
+          </a:xfrm>
+          <a:prstGeom prst="roundRect">
+            <a:avLst/>
+          </a:prstGeom>
+          <a:solidFill>
+            <a:srgbClr val="5B8FD0"/>
+          </a:solidFill>
+          <a:ln>
+            <a:noFill/>
+          </a:ln>
+        </p:spPr>
+        <p:txBody>
+          <a:bodyPr rtlCol="0" anchor="ctr"/>
+          <a:lstStyle/>
+          <a:p>
+            <a:pPr algn="ctr"/>
+          </a:p>
+        </p:txBody>
+      </p:sp>
+      <p:sp>
+        <p:nvSpPr>
+          <p:cNvPr id="62" name="TextBox 61"/>
+          <p:cNvSpPr txBox="1"/>
+          <p:nvPr/>
+        </p:nvSpPr>
+        <p:spPr>
+          <a:xfrm>
+            <a:off x="2500884" y="6126480"/>
+            <a:ext cx="502919" cy="237744"/>
+          </a:xfrm>
+          <a:prstGeom prst="rect">
+            <a:avLst/>
+          </a:prstGeom>
+          <a:noFill/>
+        </p:spPr>
+        <p:txBody>
+          <a:bodyPr wrap="square" lIns="0" rIns="0" tIns="0" bIns="0" anchor="ctr">
+            <a:spAutoFit/>
+          </a:bodyPr>
+          <a:lstStyle/>
+          <a:p>
+            <a:pPr algn="l"/>
+            <a:r>
+              <a:rPr sz="1100" b="0" i="0">
+                <a:solidFill>
+                  <a:srgbClr val="F1F5F9"/>
+                </a:solidFill>
+                <a:latin typeface="Calibri"/>
+              </a:rPr>
+              <a:t>Hiring</a:t>
+            </a:r>
+          </a:p>
+        </p:txBody>
+      </p:sp>
+      <p:sp>
+        <p:nvSpPr>
+          <p:cNvPr id="63" name="Rounded Rectangle 62"/>
+          <p:cNvSpPr/>
+          <p:nvPr/>
+        </p:nvSpPr>
+        <p:spPr>
+          <a:xfrm>
+            <a:off x="3232403" y="6153912"/>
+            <a:ext cx="365760" cy="182880"/>
+          </a:xfrm>
+          <a:prstGeom prst="roundRect">
+            <a:avLst/>
+          </a:prstGeom>
+          <a:solidFill>
+            <a:srgbClr val="A9C6E8"/>
+          </a:solidFill>
+          <a:ln>
+            <a:noFill/>
+          </a:ln>
+        </p:spPr>
+        <p:txBody>
+          <a:bodyPr rtlCol="0" anchor="ctr"/>
+          <a:lstStyle/>
+          <a:p>
+            <a:pPr algn="ctr"/>
+          </a:p>
+        </p:txBody>
+      </p:sp>
+      <p:sp>
+        <p:nvSpPr>
+          <p:cNvPr id="64" name="TextBox 63"/>
+          <p:cNvSpPr txBox="1"/>
+          <p:nvPr/>
+        </p:nvSpPr>
+        <p:spPr>
+          <a:xfrm>
+            <a:off x="3671315" y="6126480"/>
+            <a:ext cx="1051560" cy="237744"/>
+          </a:xfrm>
+          <a:prstGeom prst="rect">
+            <a:avLst/>
+          </a:prstGeom>
+          <a:noFill/>
+        </p:spPr>
+        <p:txBody>
+          <a:bodyPr wrap="square" lIns="0" rIns="0" tIns="0" bIns="0" anchor="ctr">
+            <a:spAutoFit/>
+          </a:bodyPr>
+          <a:lstStyle/>
+          <a:p>
+            <a:pPr algn="l"/>
+            <a:r>
+              <a:rPr sz="1100" b="0" i="0">
+                <a:solidFill>
+                  <a:srgbClr val="F1F5F9"/>
+                </a:solidFill>
+                <a:latin typeface="Calibri"/>
+              </a:rPr>
+              <a:t>Pre-Onboarding</a:t>
+            </a:r>
+          </a:p>
+        </p:txBody>
+      </p:sp>
+      <p:sp>
+        <p:nvSpPr>
+          <p:cNvPr id="65" name="Rounded Rectangle 64"/>
+          <p:cNvSpPr/>
+          <p:nvPr/>
+        </p:nvSpPr>
+        <p:spPr>
+          <a:xfrm>
+            <a:off x="4951476" y="6153912"/>
+            <a:ext cx="365760" cy="182880"/>
+          </a:xfrm>
+          <a:prstGeom prst="roundRect">
+            <a:avLst/>
+          </a:prstGeom>
+          <a:solidFill>
+            <a:srgbClr val="F5B85A"/>
+          </a:solidFill>
+          <a:ln>
+            <a:noFill/>
+          </a:ln>
+        </p:spPr>
+        <p:txBody>
+          <a:bodyPr rtlCol="0" anchor="ctr"/>
+          <a:lstStyle/>
+          <a:p>
+            <a:pPr algn="ctr"/>
+          </a:p>
+        </p:txBody>
+      </p:sp>
+      <p:sp>
+        <p:nvSpPr>
+          <p:cNvPr id="66" name="TextBox 65"/>
+          <p:cNvSpPr txBox="1"/>
+          <p:nvPr/>
+        </p:nvSpPr>
+        <p:spPr>
+          <a:xfrm>
+            <a:off x="5390388" y="6126480"/>
+            <a:ext cx="1325880" cy="237744"/>
+          </a:xfrm>
+          <a:prstGeom prst="rect">
+            <a:avLst/>
+          </a:prstGeom>
+          <a:noFill/>
+        </p:spPr>
+        <p:txBody>
+          <a:bodyPr wrap="square" lIns="0" rIns="0" tIns="0" bIns="0" anchor="ctr">
+            <a:spAutoFit/>
+          </a:bodyPr>
+          <a:lstStyle/>
+          <a:p>
+            <a:pPr algn="l"/>
+            <a:r>
+              <a:rPr sz="1100" b="0" i="0">
+                <a:solidFill>
+                  <a:srgbClr val="F1F5F9"/>
+                </a:solidFill>
+                <a:latin typeface="Calibri"/>
+              </a:rPr>
+              <a:t>Knowledge Transfer</a:t>
+            </a:r>
+          </a:p>
+        </p:txBody>
+      </p:sp>
+      <p:sp>
+        <p:nvSpPr>
+          <p:cNvPr id="67" name="Rounded Rectangle 66"/>
+          <p:cNvSpPr/>
+          <p:nvPr/>
+        </p:nvSpPr>
+        <p:spPr>
+          <a:xfrm>
+            <a:off x="6944868" y="6153912"/>
+            <a:ext cx="365760" cy="182880"/>
+          </a:xfrm>
+          <a:prstGeom prst="roundRect">
+            <a:avLst/>
+          </a:prstGeom>
+          <a:solidFill>
+            <a:srgbClr val="A68BD6"/>
+          </a:solidFill>
+          <a:ln>
+            <a:noFill/>
+          </a:ln>
+        </p:spPr>
+        <p:txBody>
+          <a:bodyPr rtlCol="0" anchor="ctr"/>
+          <a:lstStyle/>
+          <a:p>
+            <a:pPr algn="ctr"/>
+          </a:p>
+        </p:txBody>
+      </p:sp>
+      <p:sp>
+        <p:nvSpPr>
+          <p:cNvPr id="68" name="TextBox 67"/>
+          <p:cNvSpPr txBox="1"/>
+          <p:nvPr/>
+        </p:nvSpPr>
+        <p:spPr>
+          <a:xfrm>
+            <a:off x="7383780" y="6126480"/>
+            <a:ext cx="1257300" cy="237744"/>
+          </a:xfrm>
+          <a:prstGeom prst="rect">
+            <a:avLst/>
+          </a:prstGeom>
+          <a:noFill/>
+        </p:spPr>
+        <p:txBody>
+          <a:bodyPr wrap="square" lIns="0" rIns="0" tIns="0" bIns="0" anchor="ctr">
+            <a:spAutoFit/>
+          </a:bodyPr>
+          <a:lstStyle/>
+          <a:p>
+            <a:pPr algn="l"/>
+            <a:r>
+              <a:rPr sz="1100" b="0" i="0">
+                <a:solidFill>
+                  <a:srgbClr val="F1F5F9"/>
+                </a:solidFill>
+                <a:latin typeface="Calibri"/>
+              </a:rPr>
+              <a:t>Guided Production</a:t>
+            </a:r>
+          </a:p>
+        </p:txBody>
+      </p:sp>
+      <p:sp>
+        <p:nvSpPr>
+          <p:cNvPr id="69" name="Diamond 68"/>
+          <p:cNvSpPr/>
+          <p:nvPr/>
+        </p:nvSpPr>
+        <p:spPr>
+          <a:xfrm>
+            <a:off x="8869680" y="6153912"/>
+            <a:ext cx="182880" cy="182880"/>
+          </a:xfrm>
+          <a:prstGeom prst="diamond">
+            <a:avLst/>
+          </a:prstGeom>
+          <a:solidFill>
+            <a:srgbClr val="F87171"/>
+          </a:solidFill>
+          <a:ln>
+            <a:noFill/>
+          </a:ln>
+        </p:spPr>
+        <p:txBody>
+          <a:bodyPr rtlCol="0" anchor="ctr"/>
+          <a:lstStyle/>
+          <a:p>
+            <a:pPr algn="ctr"/>
+          </a:p>
+        </p:txBody>
+      </p:sp>
+      <p:sp>
+        <p:nvSpPr>
+          <p:cNvPr id="70" name="TextBox 69"/>
+          <p:cNvSpPr txBox="1"/>
+          <p:nvPr/>
+        </p:nvSpPr>
+        <p:spPr>
+          <a:xfrm>
+            <a:off x="9125712" y="6126480"/>
+            <a:ext cx="571500" cy="237744"/>
+          </a:xfrm>
+          <a:prstGeom prst="rect">
+            <a:avLst/>
+          </a:prstGeom>
+          <a:noFill/>
+        </p:spPr>
+        <p:txBody>
+          <a:bodyPr wrap="square" lIns="0" rIns="0" tIns="0" bIns="0" anchor="ctr">
+            <a:spAutoFit/>
+          </a:bodyPr>
+          <a:lstStyle/>
+          <a:p>
+            <a:pPr algn="l"/>
+            <a:r>
+              <a:rPr sz="1100" b="0" i="0">
+                <a:solidFill>
+                  <a:srgbClr val="F1F5F9"/>
+                </a:solidFill>
+                <a:latin typeface="Calibri"/>
+              </a:rPr>
+              <a:t>Go-Live</a:t>
+            </a:r>
+          </a:p>
+        </p:txBody>
+      </p:sp>
+      <p:sp>
+        <p:nvSpPr>
+          <p:cNvPr id="71" name="TextBox 70"/>
+          <p:cNvSpPr txBox="1"/>
+          <p:nvPr/>
+        </p:nvSpPr>
+        <p:spPr>
+          <a:xfrm>
+            <a:off x="457200" y="6537960"/>
+            <a:ext cx="8229600" cy="228600"/>
+          </a:xfrm>
+          <a:prstGeom prst="rect">
+            <a:avLst/>
+          </a:prstGeom>
+          <a:noFill/>
+        </p:spPr>
+        <p:txBody>
+          <a:bodyPr wrap="square" lIns="0" rIns="0" tIns="0" bIns="0" anchor="t">
+            <a:spAutoFit/>
+          </a:bodyPr>
+          <a:lstStyle/>
+          <a:p>
+            <a:pPr algn="l"/>
+            <a:r>
+              <a:rPr sz="1000" b="0" i="0">
+                <a:solidFill>
+                  <a:srgbClr val="94A3B8"/>
+                </a:solidFill>
+                <a:latin typeface="Calibri"/>
+              </a:rPr>
+              <a:t>Finance Transition Program  |  Acme Corp  |  Working days Mon–Fri; 1 week = 5 working days</a:t>
+            </a:r>
+          </a:p>
+        </p:txBody>
+      </p:sp>
+      <p:sp>
+        <p:nvSpPr>
+          <p:cNvPr id="72" name="TextBox 71"/>
+          <p:cNvSpPr txBox="1"/>
+          <p:nvPr/>
+        </p:nvSpPr>
+        <p:spPr>
+          <a:xfrm>
+            <a:off x="10820095" y="6537960"/>
+            <a:ext cx="914400" cy="228600"/>
+          </a:xfrm>
+          <a:prstGeom prst="rect">
+            <a:avLst/>
+          </a:prstGeom>
+          <a:noFill/>
+        </p:spPr>
+        <p:txBody>
+          <a:bodyPr wrap="square" lIns="0" rIns="0" tIns="0" bIns="0" anchor="t">
+            <a:spAutoFit/>
+          </a:bodyPr>
+          <a:lstStyle/>
+          <a:p>
+            <a:pPr algn="r"/>
+            <a:r>
+              <a:rPr sz="1000" b="0" i="0">
+                <a:solidFill>
+                  <a:srgbClr val="94A3B8"/>
+                </a:solidFill>
+                <a:latin typeface="Calibri"/>
+              </a:rPr>
+              <a:t>2</a:t>
+            </a:r>
+          </a:p>
+        </p:txBody>
+      </p:sp>
+      <p:sp>
+        <p:nvSpPr>
+          <p:cNvPr id="73" name="Theme switch"/>
+          <p:cNvSpPr/>
+          <p:nvPr/>
+        </p:nvSpPr>
+        <p:spPr>
+          <a:xfrm>
+            <a:off x="9960559" y="347472"/>
+            <a:ext cx="1810512" cy="402336"/>
+          </a:xfrm>
+          <a:prstGeom prst="roundRect">
+            <a:avLst>
+              <a:gd name="adj" fmla="val 50000"/>
+            </a:avLst>
+          </a:prstGeom>
+          <a:solidFill>
+            <a:srgbClr val="1E293B"/>
+          </a:solidFill>
+          <a:ln w="9525">
+            <a:solidFill>
+              <a:srgbClr val="334155"/>
+            </a:solidFill>
+          </a:ln>
+        </p:spPr>
+        <p:txBody>
+          <a:bodyPr rtlCol="0" anchor="ctr"/>
+          <a:lstStyle/>
+          <a:p>
+            <a:pPr algn="ctr"/>
+          </a:p>
+        </p:txBody>
+      </p:sp>
+      <p:sp>
+        <p:nvSpPr>
+          <p:cNvPr id="74" name="Theme light">
+            <a:hlinkClick action="ppaction://hlinksldjump" r:id="rId2"/>
+          </p:cNvPr>
+          <p:cNvSpPr/>
+          <p:nvPr/>
+        </p:nvSpPr>
+        <p:spPr>
+          <a:xfrm>
+            <a:off x="9997135" y="384048"/>
+            <a:ext cx="841247" cy="329184"/>
+          </a:xfrm>
+          <a:prstGeom prst="roundRect">
+            <a:avLst>
+              <a:gd name="adj" fmla="val 50000"/>
+            </a:avLst>
+          </a:prstGeom>
+          <a:solidFill>
+            <a:srgbClr val="1E293B"/>
+          </a:solidFill>
+          <a:ln>
+            <a:noFill/>
+          </a:ln>
+        </p:spPr>
+        <p:txBody>
+          <a:bodyPr rtlCol="0" anchor="ctr" lIns="0" rIns="0" tIns="0" bIns="0" wrap="none"/>
+          <a:lstStyle/>
+          <a:p>
+            <a:pPr algn="ctr"/>
+            <a:r>
+              <a:rPr sz="1100" b="0">
+                <a:solidFill>
+                  <a:srgbClr val="94A3B8"/>
+                </a:solidFill>
+                <a:latin typeface="Calibri"/>
+              </a:rPr>
+              <a:t>☀ Light</a:t>
+            </a:r>
+          </a:p>
+        </p:txBody>
+      </p:sp>
+      <p:sp>
+        <p:nvSpPr>
+          <p:cNvPr id="75" name="Theme dark"/>
+          <p:cNvSpPr/>
+          <p:nvPr/>
+        </p:nvSpPr>
+        <p:spPr>
+          <a:xfrm>
+            <a:off x="10893247" y="384048"/>
+            <a:ext cx="841247" cy="329184"/>
+          </a:xfrm>
+          <a:prstGeom prst="roundRect">
+            <a:avLst>
+              <a:gd name="adj" fmla="val 50000"/>
+            </a:avLst>
+          </a:prstGeom>
+          <a:solidFill>
+            <a:srgbClr val="F1F5F9"/>
+          </a:solidFill>
+          <a:ln>
+            <a:noFill/>
+          </a:ln>
+        </p:spPr>
+        <p:txBody>
+          <a:bodyPr rtlCol="0" anchor="ctr" lIns="0" rIns="0" tIns="0" bIns="0" wrap="none"/>
+          <a:lstStyle/>
+          <a:p>
+            <a:pPr algn="ctr"/>
+            <a:r>
+              <a:rPr sz="1100" b="1">
+                <a:solidFill>
+                  <a:srgbClr val="0F172A"/>
+                </a:solidFill>
+                <a:latin typeface="Calibri"/>
+              </a:rPr>
+              <a:t>☾ Dark</a:t>
+            </a:r>
+          </a:p>
+        </p:txBody>
+      </p:sp>
+    </p:spTree>
+  </p:cSld>
+  <p:clrMapOvr>
+    <a:masterClrMapping/>
+  </p:clrMapOvr>
+</p:sld>
+</file>
+
+<file path=ppt/slides/slide6.xml><?xml version="1.0" encoding="utf-8"?>
+<p:sld xmlns:a="http://schemas.openxmlformats.org/drawingml/2006/main" xmlns:p="http://schemas.openxmlformats.org/presentationml/2006/main" xmlns:r="http://schemas.openxmlformats.org/officeDocument/2006/relationships">
+  <p:cSld>
+    <p:bg>
+      <p:bgPr>
+        <a:solidFill>
+          <a:srgbClr val="0F172A"/>
+        </a:solidFill>
+        <a:effectLst/>
+      </p:bgPr>
+    </p:bg>
+    <p:spTree>
+      <p:nvGrpSpPr>
+        <p:cNvPr id="1" name=""/>
+        <p:cNvGrpSpPr/>
+        <p:nvPr/>
+      </p:nvGrpSpPr>
+      <p:grpSpPr/>
+      <p:sp>
+        <p:nvSpPr>
+          <p:cNvPr id="2" name="Title"/>
+          <p:cNvSpPr txBox="1"/>
+          <p:nvPr/>
+        </p:nvSpPr>
+        <p:spPr>
+          <a:xfrm>
+            <a:off x="457200" y="320040"/>
+            <a:ext cx="9265615" cy="548640"/>
+          </a:xfrm>
+          <a:prstGeom prst="rect">
+            <a:avLst/>
+          </a:prstGeom>
+          <a:noFill/>
+        </p:spPr>
+        <p:txBody>
+          <a:bodyPr wrap="square" lIns="0" rIns="0" tIns="0" bIns="0" anchor="t">
+            <a:spAutoFit/>
+          </a:bodyPr>
+          <a:lstStyle/>
+          <a:p>
+            <a:pPr algn="l"/>
+            <a:r>
+              <a:rPr sz="2800" b="1" i="0">
+                <a:solidFill>
+                  <a:srgbClr val="F1F5F9"/>
+                </a:solidFill>
+                <a:latin typeface="Calibri"/>
+              </a:rPr>
+              <a:t>Key dates and planning rules</a:t>
+            </a:r>
+          </a:p>
+        </p:txBody>
+      </p:sp>
+      <p:sp>
+        <p:nvSpPr>
+          <p:cNvPr id="3" name="Subtitle"/>
+          <p:cNvSpPr txBox="1"/>
+          <p:nvPr/>
+        </p:nvSpPr>
+        <p:spPr>
+          <a:xfrm>
+            <a:off x="457200" y="868680"/>
+            <a:ext cx="9265615" cy="320040"/>
+          </a:xfrm>
+          <a:prstGeom prst="rect">
+            <a:avLst/>
+          </a:prstGeom>
+          <a:noFill/>
+        </p:spPr>
+        <p:txBody>
+          <a:bodyPr wrap="square" lIns="0" rIns="0" tIns="0" bIns="0" anchor="t">
+            <a:spAutoFit/>
+          </a:bodyPr>
+          <a:lstStyle/>
+          <a:p>
+            <a:pPr algn="l"/>
+            <a:r>
+              <a:rPr sz="1400" b="0" i="0">
+                <a:solidFill>
+                  <a:srgbClr val="94A3B8"/>
+                </a:solidFill>
+                <a:latin typeface="Calibri"/>
+              </a:rPr>
+              <a:t>All dates are working days; edit the Excel 'Inputs' sheet to re-plan</a:t>
+            </a:r>
+          </a:p>
+        </p:txBody>
+      </p:sp>
+      <p:graphicFrame>
+        <p:nvGraphicFramePr>
+          <p:cNvPr id="4" name="Table 3"/>
+          <p:cNvGraphicFramePr>
+            <a:graphicFrameLocks noGrp="1"/>
+          </p:cNvGraphicFramePr>
+          <p:nvPr/>
+        </p:nvGraphicFramePr>
+        <p:xfrm>
+          <a:off x="457200" y="1463040"/>
+          <a:ext cx="11277295" cy="1828800"/>
+        </p:xfrm>
+        <a:graphic>
+          <a:graphicData uri="http://schemas.openxmlformats.org/drawingml/2006/table">
+            <a:tbl>
+              <a:tblPr firstRow="1" bandRow="1">
+                <a:tableStyleId>{5C22544A-7EE6-4342-B048-85BDC9FD1C3A}</a:tableStyleId>
+              </a:tblPr>
+              <a:tblGrid>
+                <a:gridCol w="2194560"/>
+                <a:gridCol w="1188720"/>
+                <a:gridCol w="1600200"/>
+                <a:gridCol w="1600200"/>
+                <a:gridCol w="1600200"/>
+                <a:gridCol w="1600200"/>
+                <a:gridCol w="1493215"/>
+              </a:tblGrid>
+              <a:tr h="457200">
+                <a:tc>
+                  <a:txBody>
+                    <a:bodyPr/>
+                    <a:lstStyle/>
+                    <a:p>
+                      <a:pPr algn="l"/>
+                      <a:r>
+                        <a:rPr sz="1200" b="1">
+                          <a:solidFill>
+                            <a:srgbClr val="F1F5F9"/>
+                          </a:solidFill>
+                          <a:latin typeface="Calibri"/>
+                        </a:rPr>
+                        <a:t>Process</a:t>
+                      </a:r>
+                    </a:p>
+                  </a:txBody>
+                  <a:tcPr marL="73152" marR="73152" anchor="ctr">
+                    <a:lnL w="9525">
+                      <a:solidFill>
+                        <a:srgbClr val="334155"/>
+                      </a:solidFill>
+                    </a:lnL>
+                    <a:lnR w="9525">
+                      <a:solidFill>
+                        <a:srgbClr val="334155"/>
+                      </a:solidFill>
+                    </a:lnR>
+                    <a:lnT w="9525">
+                      <a:solidFill>
+                        <a:srgbClr val="334155"/>
+                      </a:solidFill>
+                    </a:lnT>
+                    <a:lnB w="9525">
+                      <a:solidFill>
+                        <a:srgbClr val="334155"/>
+                      </a:solidFill>
+                    </a:lnB>
+                    <a:solidFill>
+                      <a:srgbClr val="334155"/>
+                    </a:solidFill>
+                  </a:tcPr>
+                </a:tc>
+                <a:tc>
+                  <a:txBody>
+                    <a:bodyPr/>
+                    <a:lstStyle/>
+                    <a:p>
+                      <a:pPr algn="ctr"/>
+                      <a:r>
+                        <a:rPr sz="1200" b="1">
+                          <a:solidFill>
+                            <a:srgbClr val="F1F5F9"/>
+                          </a:solidFill>
+                          <a:latin typeface="Calibri"/>
+                        </a:rPr>
+                        <a:t>★ Contract</a:t>
+                      </a:r>
+                    </a:p>
+                  </a:txBody>
+                  <a:tcPr marL="73152" marR="73152" anchor="ctr">
+                    <a:lnL w="9525">
+                      <a:solidFill>
+                        <a:srgbClr val="334155"/>
+                      </a:solidFill>
+                    </a:lnL>
+                    <a:lnR w="9525">
+                      <a:solidFill>
+                        <a:srgbClr val="334155"/>
+                      </a:solidFill>
+                    </a:lnR>
+                    <a:lnT w="9525">
+                      <a:solidFill>
+                        <a:srgbClr val="334155"/>
+                      </a:solidFill>
+                    </a:lnT>
+                    <a:lnB w="9525">
+                      <a:solidFill>
+                        <a:srgbClr val="334155"/>
+                      </a:solidFill>
+                    </a:lnB>
+                    <a:solidFill>
+                      <a:srgbClr val="334155"/>
+                    </a:solidFill>
+                  </a:tcPr>
+                </a:tc>
+                <a:tc>
+                  <a:txBody>
+                    <a:bodyPr/>
+                    <a:lstStyle/>
+                    <a:p>
+                      <a:pPr algn="ctr"/>
+                      <a:r>
+                        <a:rPr sz="1200" b="1">
+                          <a:solidFill>
+                            <a:srgbClr val="F1F5F9"/>
+                          </a:solidFill>
+                          <a:latin typeface="Calibri"/>
+                        </a:rPr>
+                        <a:t>Hiring</a:t>
+                      </a:r>
+                    </a:p>
+                  </a:txBody>
+                  <a:tcPr marL="73152" marR="73152" anchor="ctr">
+                    <a:lnL w="9525">
+                      <a:solidFill>
+                        <a:srgbClr val="334155"/>
+                      </a:solidFill>
+                    </a:lnL>
+                    <a:lnR w="9525">
+                      <a:solidFill>
+                        <a:srgbClr val="334155"/>
+                      </a:solidFill>
+                    </a:lnR>
+                    <a:lnT w="9525">
+                      <a:solidFill>
+                        <a:srgbClr val="334155"/>
+                      </a:solidFill>
+                    </a:lnT>
+                    <a:lnB w="9525">
+                      <a:solidFill>
+                        <a:srgbClr val="334155"/>
+                      </a:solidFill>
+                    </a:lnB>
+                    <a:solidFill>
+                      <a:srgbClr val="334155"/>
+                    </a:solidFill>
+                  </a:tcPr>
+                </a:tc>
+                <a:tc>
+                  <a:txBody>
+                    <a:bodyPr/>
+                    <a:lstStyle/>
+                    <a:p>
+                      <a:pPr algn="ctr"/>
+                      <a:r>
+                        <a:rPr sz="1200" b="1">
+                          <a:solidFill>
+                            <a:srgbClr val="F1F5F9"/>
+                          </a:solidFill>
+                          <a:latin typeface="Calibri"/>
+                        </a:rPr>
+                        <a:t>Pre-Onboarding</a:t>
+                      </a:r>
+                    </a:p>
+                  </a:txBody>
+                  <a:tcPr marL="73152" marR="73152" anchor="ctr">
+                    <a:lnL w="9525">
+                      <a:solidFill>
+                        <a:srgbClr val="334155"/>
+                      </a:solidFill>
+                    </a:lnL>
+                    <a:lnR w="9525">
+                      <a:solidFill>
+                        <a:srgbClr val="334155"/>
+                      </a:solidFill>
+                    </a:lnR>
+                    <a:lnT w="9525">
+                      <a:solidFill>
+                        <a:srgbClr val="334155"/>
+                      </a:solidFill>
+                    </a:lnT>
+                    <a:lnB w="9525">
+                      <a:solidFill>
+                        <a:srgbClr val="334155"/>
+                      </a:solidFill>
+                    </a:lnB>
+                    <a:solidFill>
+                      <a:srgbClr val="334155"/>
+                    </a:solidFill>
+                  </a:tcPr>
+                </a:tc>
+                <a:tc>
+                  <a:txBody>
+                    <a:bodyPr/>
+                    <a:lstStyle/>
+                    <a:p>
+                      <a:pPr algn="ctr"/>
+                      <a:r>
+                        <a:rPr sz="1200" b="1">
+                          <a:solidFill>
+                            <a:srgbClr val="F1F5F9"/>
+                          </a:solidFill>
+                          <a:latin typeface="Calibri"/>
+                        </a:rPr>
+                        <a:t>Knowledge Transfer</a:t>
+                      </a:r>
+                    </a:p>
+                  </a:txBody>
+                  <a:tcPr marL="73152" marR="73152" anchor="ctr">
+                    <a:lnL w="9525">
+                      <a:solidFill>
+                        <a:srgbClr val="334155"/>
+                      </a:solidFill>
+                    </a:lnL>
+                    <a:lnR w="9525">
+                      <a:solidFill>
+                        <a:srgbClr val="334155"/>
+                      </a:solidFill>
+                    </a:lnR>
+                    <a:lnT w="9525">
+                      <a:solidFill>
+                        <a:srgbClr val="334155"/>
+                      </a:solidFill>
+                    </a:lnT>
+                    <a:lnB w="9525">
+                      <a:solidFill>
+                        <a:srgbClr val="334155"/>
+                      </a:solidFill>
+                    </a:lnB>
+                    <a:solidFill>
+                      <a:srgbClr val="334155"/>
+                    </a:solidFill>
+                  </a:tcPr>
+                </a:tc>
+                <a:tc>
+                  <a:txBody>
+                    <a:bodyPr/>
+                    <a:lstStyle/>
+                    <a:p>
+                      <a:pPr algn="ctr"/>
+                      <a:r>
+                        <a:rPr sz="1200" b="1">
+                          <a:solidFill>
+                            <a:srgbClr val="F1F5F9"/>
+                          </a:solidFill>
+                          <a:latin typeface="Calibri"/>
+                        </a:rPr>
+                        <a:t>Guided Production</a:t>
+                      </a:r>
+                    </a:p>
+                  </a:txBody>
+                  <a:tcPr marL="73152" marR="73152" anchor="ctr">
+                    <a:lnL w="9525">
+                      <a:solidFill>
+                        <a:srgbClr val="334155"/>
+                      </a:solidFill>
+                    </a:lnL>
+                    <a:lnR w="9525">
+                      <a:solidFill>
+                        <a:srgbClr val="334155"/>
+                      </a:solidFill>
+                    </a:lnR>
+                    <a:lnT w="9525">
+                      <a:solidFill>
+                        <a:srgbClr val="334155"/>
+                      </a:solidFill>
+                    </a:lnT>
+                    <a:lnB w="9525">
+                      <a:solidFill>
+                        <a:srgbClr val="334155"/>
+                      </a:solidFill>
+                    </a:lnB>
+                    <a:solidFill>
+                      <a:srgbClr val="334155"/>
+                    </a:solidFill>
+                  </a:tcPr>
+                </a:tc>
+                <a:tc>
+                  <a:txBody>
+                    <a:bodyPr/>
+                    <a:lstStyle/>
+                    <a:p>
+                      <a:pPr algn="ctr"/>
+                      <a:r>
+                        <a:rPr sz="1200" b="1">
+                          <a:solidFill>
+                            <a:srgbClr val="F1F5F9"/>
+                          </a:solidFill>
+                          <a:latin typeface="Calibri"/>
+                        </a:rPr>
+                        <a:t>◆ Go-Live</a:t>
+                      </a:r>
+                    </a:p>
+                  </a:txBody>
+                  <a:tcPr marL="73152" marR="73152" anchor="ctr">
+                    <a:lnL w="9525">
+                      <a:solidFill>
+                        <a:srgbClr val="334155"/>
+                      </a:solidFill>
+                    </a:lnL>
+                    <a:lnR w="9525">
+                      <a:solidFill>
+                        <a:srgbClr val="334155"/>
+                      </a:solidFill>
+                    </a:lnR>
+                    <a:lnT w="9525">
+                      <a:solidFill>
+                        <a:srgbClr val="334155"/>
+                      </a:solidFill>
+                    </a:lnT>
+                    <a:lnB w="9525">
+                      <a:solidFill>
+                        <a:srgbClr val="334155"/>
+                      </a:solidFill>
+                    </a:lnB>
+                    <a:solidFill>
+                      <a:srgbClr val="334155"/>
+                    </a:solidFill>
+                  </a:tcPr>
+                </a:tc>
+              </a:tr>
+              <a:tr h="457200">
+                <a:tc>
+                  <a:txBody>
+                    <a:bodyPr/>
+                    <a:lstStyle/>
+                    <a:p>
+                      <a:pPr algn="l"/>
+                      <a:r>
+                        <a:rPr sz="1300" b="1">
+                          <a:solidFill>
+                            <a:srgbClr val="F1F5F9"/>
+                          </a:solidFill>
+                          <a:latin typeface="Calibri"/>
+                        </a:rPr>
+                        <a:t>Procure-to-Pay (P2P)</a:t>
+                      </a:r>
+                    </a:p>
+                  </a:txBody>
+                  <a:tcPr marL="73152" marR="73152" anchor="ctr">
+                    <a:lnL w="9525">
+                      <a:solidFill>
+                        <a:srgbClr val="334155"/>
+                      </a:solidFill>
+                    </a:lnL>
+                    <a:lnR w="9525">
+                      <a:solidFill>
+                        <a:srgbClr val="334155"/>
+                      </a:solidFill>
+                    </a:lnR>
+                    <a:lnT w="9525">
+                      <a:solidFill>
+                        <a:srgbClr val="334155"/>
+                      </a:solidFill>
+                    </a:lnT>
+                    <a:lnB w="9525">
+                      <a:solidFill>
+                        <a:srgbClr val="334155"/>
+                      </a:solidFill>
+                    </a:lnB>
+                    <a:solidFill>
+                      <a:srgbClr val="0F172A"/>
+                    </a:solidFill>
+                  </a:tcPr>
+                </a:tc>
+                <a:tc>
+                  <a:txBody>
+                    <a:bodyPr/>
+                    <a:lstStyle/>
+                    <a:p>
+                      <a:pPr algn="ctr"/>
+                      <a:r>
+                        <a:rPr sz="1300" b="0">
+                          <a:solidFill>
+                            <a:srgbClr val="F1F5F9"/>
+                          </a:solidFill>
+                          <a:latin typeface="Calibri"/>
+                        </a:rPr>
+                        <a:t>19-Oct-26</a:t>
+                      </a:r>
+                    </a:p>
+                  </a:txBody>
+                  <a:tcPr marL="73152" marR="73152" anchor="ctr">
+                    <a:lnL w="9525">
+                      <a:solidFill>
+                        <a:srgbClr val="334155"/>
+                      </a:solidFill>
+                    </a:lnL>
+                    <a:lnR w="9525">
+                      <a:solidFill>
+                        <a:srgbClr val="334155"/>
+                      </a:solidFill>
+                    </a:lnR>
+                    <a:lnT w="9525">
+                      <a:solidFill>
+                        <a:srgbClr val="334155"/>
+                      </a:solidFill>
+                    </a:lnT>
+                    <a:lnB w="9525">
+                      <a:solidFill>
+                        <a:srgbClr val="334155"/>
+                      </a:solidFill>
+                    </a:lnB>
+                    <a:solidFill>
+                      <a:srgbClr val="0F172A"/>
+                    </a:solidFill>
+                  </a:tcPr>
+                </a:tc>
+                <a:tc>
+                  <a:txBody>
+                    <a:bodyPr/>
+                    <a:lstStyle/>
+                    <a:p>
+                      <a:pPr algn="ctr"/>
+                      <a:r>
+                        <a:rPr sz="1100" b="0">
+                          <a:solidFill>
+                            <a:srgbClr val="F1F5F9"/>
+                          </a:solidFill>
+                          <a:latin typeface="Calibri"/>
+                        </a:rPr>
+                        <a:t>20-Oct → 14-Dec  (8w)</a:t>
+                      </a:r>
+                    </a:p>
+                  </a:txBody>
+                  <a:tcPr marL="73152" marR="73152" anchor="ctr">
+                    <a:lnL w="9525">
+                      <a:solidFill>
+                        <a:srgbClr val="334155"/>
+                      </a:solidFill>
+                    </a:lnL>
+                    <a:lnR w="9525">
+                      <a:solidFill>
+                        <a:srgbClr val="334155"/>
+                      </a:solidFill>
+                    </a:lnR>
+                    <a:lnT w="9525">
+                      <a:solidFill>
+                        <a:srgbClr val="334155"/>
+                      </a:solidFill>
+                    </a:lnT>
+                    <a:lnB w="9525">
+                      <a:solidFill>
+                        <a:srgbClr val="334155"/>
+                      </a:solidFill>
+                    </a:lnB>
+                    <a:solidFill>
+                      <a:srgbClr val="0F172A"/>
+                    </a:solidFill>
+                  </a:tcPr>
+                </a:tc>
+                <a:tc>
+                  <a:txBody>
+                    <a:bodyPr/>
+                    <a:lstStyle/>
+                    <a:p>
+                      <a:pPr algn="ctr"/>
+                      <a:r>
+                        <a:rPr sz="1100" b="0">
+                          <a:solidFill>
+                            <a:srgbClr val="F1F5F9"/>
+                          </a:solidFill>
+                          <a:latin typeface="Calibri"/>
+                        </a:rPr>
+                        <a:t>15-Dec → 28-Dec  (2w)</a:t>
+                      </a:r>
+                    </a:p>
+                  </a:txBody>
+                  <a:tcPr marL="73152" marR="73152" anchor="ctr">
+                    <a:lnL w="9525">
+                      <a:solidFill>
+                        <a:srgbClr val="334155"/>
+                      </a:solidFill>
+                    </a:lnL>
+                    <a:lnR w="9525">
+                      <a:solidFill>
+                        <a:srgbClr val="334155"/>
+                      </a:solidFill>
+                    </a:lnR>
+                    <a:lnT w="9525">
+                      <a:solidFill>
+                        <a:srgbClr val="334155"/>
+                      </a:solidFill>
+                    </a:lnT>
+                    <a:lnB w="9525">
+                      <a:solidFill>
+                        <a:srgbClr val="334155"/>
+                      </a:solidFill>
+                    </a:lnB>
+                    <a:solidFill>
+                      <a:srgbClr val="0F172A"/>
+                    </a:solidFill>
+                  </a:tcPr>
+                </a:tc>
+                <a:tc>
+                  <a:txBody>
+                    <a:bodyPr/>
+                    <a:lstStyle/>
+                    <a:p>
+                      <a:pPr algn="ctr"/>
+                      <a:r>
+                        <a:rPr sz="1100" b="0">
+                          <a:solidFill>
+                            <a:srgbClr val="F1F5F9"/>
+                          </a:solidFill>
+                          <a:latin typeface="Calibri"/>
+                        </a:rPr>
+                        <a:t>29-Dec → 25-Jan  (4w)</a:t>
+                      </a:r>
+                    </a:p>
+                  </a:txBody>
+                  <a:tcPr marL="73152" marR="73152" anchor="ctr">
+                    <a:lnL w="9525">
+                      <a:solidFill>
+                        <a:srgbClr val="334155"/>
+                      </a:solidFill>
+                    </a:lnL>
+                    <a:lnR w="9525">
+                      <a:solidFill>
+                        <a:srgbClr val="334155"/>
+                      </a:solidFill>
+                    </a:lnR>
+                    <a:lnT w="9525">
+                      <a:solidFill>
+                        <a:srgbClr val="334155"/>
+                      </a:solidFill>
+                    </a:lnT>
+                    <a:lnB w="9525">
+                      <a:solidFill>
+                        <a:srgbClr val="334155"/>
+                      </a:solidFill>
+                    </a:lnB>
+                    <a:solidFill>
+                      <a:srgbClr val="0F172A"/>
+                    </a:solidFill>
+                  </a:tcPr>
+                </a:tc>
+                <a:tc>
+                  <a:txBody>
+                    <a:bodyPr/>
+                    <a:lstStyle/>
+                    <a:p>
+                      <a:pPr algn="ctr"/>
+                      <a:r>
+                        <a:rPr sz="1100" b="0">
+                          <a:solidFill>
+                            <a:srgbClr val="F1F5F9"/>
+                          </a:solidFill>
+                          <a:latin typeface="Calibri"/>
+                        </a:rPr>
+                        <a:t>26-Jan → 22-Feb  (4w)</a:t>
+                      </a:r>
+                    </a:p>
+                  </a:txBody>
+                  <a:tcPr marL="73152" marR="73152" anchor="ctr">
+                    <a:lnL w="9525">
+                      <a:solidFill>
+                        <a:srgbClr val="334155"/>
+                      </a:solidFill>
+                    </a:lnL>
+                    <a:lnR w="9525">
+                      <a:solidFill>
+                        <a:srgbClr val="334155"/>
+                      </a:solidFill>
+                    </a:lnR>
+                    <a:lnT w="9525">
+                      <a:solidFill>
+                        <a:srgbClr val="334155"/>
+                      </a:solidFill>
+                    </a:lnT>
+                    <a:lnB w="9525">
+                      <a:solidFill>
+                        <a:srgbClr val="334155"/>
+                      </a:solidFill>
+                    </a:lnB>
+                    <a:solidFill>
+                      <a:srgbClr val="0F172A"/>
+                    </a:solidFill>
+                  </a:tcPr>
+                </a:tc>
+                <a:tc>
+                  <a:txBody>
+                    <a:bodyPr/>
+                    <a:lstStyle/>
+                    <a:p>
+                      <a:pPr algn="ctr"/>
+                      <a:r>
+                        <a:rPr sz="1300" b="1">
+                          <a:solidFill>
+                            <a:srgbClr val="F87171"/>
+                          </a:solidFill>
+                          <a:latin typeface="Calibri"/>
+                        </a:rPr>
+                        <a:t>23-Feb-27</a:t>
+                      </a:r>
+                    </a:p>
+                  </a:txBody>
+                  <a:tcPr marL="73152" marR="73152" anchor="ctr">
+                    <a:lnL w="9525">
+                      <a:solidFill>
+                        <a:srgbClr val="334155"/>
+                      </a:solidFill>
+                    </a:lnL>
+                    <a:lnR w="9525">
+                      <a:solidFill>
+                        <a:srgbClr val="334155"/>
+                      </a:solidFill>
+                    </a:lnR>
+                    <a:lnT w="9525">
+                      <a:solidFill>
+                        <a:srgbClr val="334155"/>
+                      </a:solidFill>
+                    </a:lnT>
+                    <a:lnB w="9525">
+                      <a:solidFill>
+                        <a:srgbClr val="334155"/>
+                      </a:solidFill>
+                    </a:lnB>
+                    <a:solidFill>
+                      <a:srgbClr val="0F172A"/>
+                    </a:solidFill>
+                  </a:tcPr>
+                </a:tc>
+              </a:tr>
+              <a:tr h="457200">
+                <a:tc>
+                  <a:txBody>
+                    <a:bodyPr/>
+                    <a:lstStyle/>
+                    <a:p>
+                      <a:pPr algn="l"/>
+                      <a:r>
+                        <a:rPr sz="1300" b="1">
+                          <a:solidFill>
+                            <a:srgbClr val="F1F5F9"/>
+                          </a:solidFill>
+                          <a:latin typeface="Calibri"/>
+                        </a:rPr>
+                        <a:t>Order-to-Cash (OTC)</a:t>
+                      </a:r>
+                    </a:p>
+                  </a:txBody>
+                  <a:tcPr marL="73152" marR="73152" anchor="ctr">
+                    <a:lnL w="9525">
+                      <a:solidFill>
+                        <a:srgbClr val="334155"/>
+                      </a:solidFill>
+                    </a:lnL>
+                    <a:lnR w="9525">
+                      <a:solidFill>
+                        <a:srgbClr val="334155"/>
+                      </a:solidFill>
+                    </a:lnR>
+                    <a:lnT w="9525">
+                      <a:solidFill>
+                        <a:srgbClr val="334155"/>
+                      </a:solidFill>
+                    </a:lnT>
+                    <a:lnB w="9525">
+                      <a:solidFill>
+                        <a:srgbClr val="334155"/>
+                      </a:solidFill>
+                    </a:lnB>
+                    <a:solidFill>
+                      <a:srgbClr val="1E293B"/>
+                    </a:solidFill>
+                  </a:tcPr>
+                </a:tc>
+                <a:tc>
+                  <a:txBody>
+                    <a:bodyPr/>
+                    <a:lstStyle/>
+                    <a:p>
+                      <a:pPr algn="ctr"/>
+                      <a:r>
+                        <a:rPr sz="1300" b="0">
+                          <a:solidFill>
+                            <a:srgbClr val="F1F5F9"/>
+                          </a:solidFill>
+                          <a:latin typeface="Calibri"/>
+                        </a:rPr>
+                        <a:t>19-Oct-26</a:t>
+                      </a:r>
+                    </a:p>
+                  </a:txBody>
+                  <a:tcPr marL="73152" marR="73152" anchor="ctr">
+                    <a:lnL w="9525">
+                      <a:solidFill>
+                        <a:srgbClr val="334155"/>
+                      </a:solidFill>
+                    </a:lnL>
+                    <a:lnR w="9525">
+                      <a:solidFill>
+                        <a:srgbClr val="334155"/>
+                      </a:solidFill>
+                    </a:lnR>
+                    <a:lnT w="9525">
+                      <a:solidFill>
+                        <a:srgbClr val="334155"/>
+                      </a:solidFill>
+                    </a:lnT>
+                    <a:lnB w="9525">
+                      <a:solidFill>
+                        <a:srgbClr val="334155"/>
+                      </a:solidFill>
+                    </a:lnB>
+                    <a:solidFill>
+                      <a:srgbClr val="1E293B"/>
+                    </a:solidFill>
+                  </a:tcPr>
+                </a:tc>
+                <a:tc>
+                  <a:txBody>
+                    <a:bodyPr/>
+                    <a:lstStyle/>
+                    <a:p>
+                      <a:pPr algn="ctr"/>
+                      <a:r>
+                        <a:rPr sz="1100" b="0">
+                          <a:solidFill>
+                            <a:srgbClr val="F1F5F9"/>
+                          </a:solidFill>
+                          <a:latin typeface="Calibri"/>
+                        </a:rPr>
+                        <a:t>20-Oct → 14-Dec  (8w)</a:t>
+                      </a:r>
+                    </a:p>
+                  </a:txBody>
+                  <a:tcPr marL="73152" marR="73152" anchor="ctr">
+                    <a:lnL w="9525">
+                      <a:solidFill>
+                        <a:srgbClr val="334155"/>
+                      </a:solidFill>
+                    </a:lnL>
+                    <a:lnR w="9525">
+                      <a:solidFill>
+                        <a:srgbClr val="334155"/>
+                      </a:solidFill>
+                    </a:lnR>
+                    <a:lnT w="9525">
+                      <a:solidFill>
+                        <a:srgbClr val="334155"/>
+                      </a:solidFill>
+                    </a:lnT>
+                    <a:lnB w="9525">
+                      <a:solidFill>
+                        <a:srgbClr val="334155"/>
+                      </a:solidFill>
+                    </a:lnB>
+                    <a:solidFill>
+                      <a:srgbClr val="1E293B"/>
+                    </a:solidFill>
+                  </a:tcPr>
+                </a:tc>
+                <a:tc>
+                  <a:txBody>
+                    <a:bodyPr/>
+                    <a:lstStyle/>
+                    <a:p>
+                      <a:pPr algn="ctr"/>
+                      <a:r>
+                        <a:rPr sz="1100" b="0">
+                          <a:solidFill>
+                            <a:srgbClr val="F1F5F9"/>
+                          </a:solidFill>
+                          <a:latin typeface="Calibri"/>
+                        </a:rPr>
+                        <a:t>15-Dec → 28-Dec  (2w)</a:t>
+                      </a:r>
+                    </a:p>
+                  </a:txBody>
+                  <a:tcPr marL="73152" marR="73152" anchor="ctr">
+                    <a:lnL w="9525">
+                      <a:solidFill>
+                        <a:srgbClr val="334155"/>
+                      </a:solidFill>
+                    </a:lnL>
+                    <a:lnR w="9525">
+                      <a:solidFill>
+                        <a:srgbClr val="334155"/>
+                      </a:solidFill>
+                    </a:lnR>
+                    <a:lnT w="9525">
+                      <a:solidFill>
+                        <a:srgbClr val="334155"/>
+                      </a:solidFill>
+                    </a:lnT>
+                    <a:lnB w="9525">
+                      <a:solidFill>
+                        <a:srgbClr val="334155"/>
+                      </a:solidFill>
+                    </a:lnB>
+                    <a:solidFill>
+                      <a:srgbClr val="1E293B"/>
+                    </a:solidFill>
+                  </a:tcPr>
+                </a:tc>
+                <a:tc>
+                  <a:txBody>
+                    <a:bodyPr/>
+                    <a:lstStyle/>
+                    <a:p>
+                      <a:pPr algn="ctr"/>
+                      <a:r>
+                        <a:rPr sz="1100" b="0">
+                          <a:solidFill>
+                            <a:srgbClr val="F1F5F9"/>
+                          </a:solidFill>
+                          <a:latin typeface="Calibri"/>
+                        </a:rPr>
+                        <a:t>29-Dec → 25-Jan  (4w)</a:t>
+                      </a:r>
+                    </a:p>
+                  </a:txBody>
+                  <a:tcPr marL="73152" marR="73152" anchor="ctr">
+                    <a:lnL w="9525">
+                      <a:solidFill>
+                        <a:srgbClr val="334155"/>
+                      </a:solidFill>
+                    </a:lnL>
+                    <a:lnR w="9525">
+                      <a:solidFill>
+                        <a:srgbClr val="334155"/>
+                      </a:solidFill>
+                    </a:lnR>
+                    <a:lnT w="9525">
+                      <a:solidFill>
+                        <a:srgbClr val="334155"/>
+                      </a:solidFill>
+                    </a:lnT>
+                    <a:lnB w="9525">
+                      <a:solidFill>
+                        <a:srgbClr val="334155"/>
+                      </a:solidFill>
+                    </a:lnB>
+                    <a:solidFill>
+                      <a:srgbClr val="1E293B"/>
+                    </a:solidFill>
+                  </a:tcPr>
+                </a:tc>
+                <a:tc>
+                  <a:txBody>
+                    <a:bodyPr/>
+                    <a:lstStyle/>
+                    <a:p>
+                      <a:pPr algn="ctr"/>
+                      <a:r>
+                        <a:rPr sz="1100" b="0">
+                          <a:solidFill>
+                            <a:srgbClr val="F1F5F9"/>
+                          </a:solidFill>
+                          <a:latin typeface="Calibri"/>
+                        </a:rPr>
+                        <a:t>26-Jan → 22-Feb  (4w)</a:t>
+                      </a:r>
+                    </a:p>
+                  </a:txBody>
+                  <a:tcPr marL="73152" marR="73152" anchor="ctr">
+                    <a:lnL w="9525">
+                      <a:solidFill>
+                        <a:srgbClr val="334155"/>
+                      </a:solidFill>
+                    </a:lnL>
+                    <a:lnR w="9525">
+                      <a:solidFill>
+                        <a:srgbClr val="334155"/>
+                      </a:solidFill>
+                    </a:lnR>
+                    <a:lnT w="9525">
+                      <a:solidFill>
+                        <a:srgbClr val="334155"/>
+                      </a:solidFill>
+                    </a:lnT>
+                    <a:lnB w="9525">
+                      <a:solidFill>
+                        <a:srgbClr val="334155"/>
+                      </a:solidFill>
+                    </a:lnB>
+                    <a:solidFill>
+                      <a:srgbClr val="1E293B"/>
+                    </a:solidFill>
+                  </a:tcPr>
+                </a:tc>
+                <a:tc>
+                  <a:txBody>
+                    <a:bodyPr/>
+                    <a:lstStyle/>
+                    <a:p>
+                      <a:pPr algn="ctr"/>
+                      <a:r>
+                        <a:rPr sz="1300" b="1">
+                          <a:solidFill>
+                            <a:srgbClr val="F87171"/>
+                          </a:solidFill>
+                          <a:latin typeface="Calibri"/>
+                        </a:rPr>
+                        <a:t>23-Feb-27</a:t>
+                      </a:r>
+                    </a:p>
+                  </a:txBody>
+                  <a:tcPr marL="73152" marR="73152" anchor="ctr">
+                    <a:lnL w="9525">
+                      <a:solidFill>
+                        <a:srgbClr val="334155"/>
+                      </a:solidFill>
+                    </a:lnL>
+                    <a:lnR w="9525">
+                      <a:solidFill>
+                        <a:srgbClr val="334155"/>
+                      </a:solidFill>
+                    </a:lnR>
+                    <a:lnT w="9525">
+                      <a:solidFill>
+                        <a:srgbClr val="334155"/>
+                      </a:solidFill>
+                    </a:lnT>
+                    <a:lnB w="9525">
+                      <a:solidFill>
+                        <a:srgbClr val="334155"/>
+                      </a:solidFill>
+                    </a:lnB>
+                    <a:solidFill>
+                      <a:srgbClr val="1E293B"/>
+                    </a:solidFill>
+                  </a:tcPr>
+                </a:tc>
+              </a:tr>
+              <a:tr h="457200">
+                <a:tc>
+                  <a:txBody>
+                    <a:bodyPr/>
+                    <a:lstStyle/>
+                    <a:p>
+                      <a:pPr algn="l"/>
+                      <a:r>
+                        <a:rPr sz="1300" b="1">
+                          <a:solidFill>
+                            <a:srgbClr val="F1F5F9"/>
+                          </a:solidFill>
+                          <a:latin typeface="Calibri"/>
+                        </a:rPr>
+                        <a:t>Record-to-Report (RTR)</a:t>
+                      </a:r>
+                    </a:p>
+                  </a:txBody>
+                  <a:tcPr marL="73152" marR="73152" anchor="ctr">
+                    <a:lnL w="9525">
+                      <a:solidFill>
+                        <a:srgbClr val="334155"/>
+                      </a:solidFill>
+                    </a:lnL>
+                    <a:lnR w="9525">
+                      <a:solidFill>
+                        <a:srgbClr val="334155"/>
+                      </a:solidFill>
+                    </a:lnR>
+                    <a:lnT w="9525">
+                      <a:solidFill>
+                        <a:srgbClr val="334155"/>
+                      </a:solidFill>
+                    </a:lnT>
+                    <a:lnB w="9525">
+                      <a:solidFill>
+                        <a:srgbClr val="334155"/>
+                      </a:solidFill>
+                    </a:lnB>
+                    <a:solidFill>
+                      <a:srgbClr val="0F172A"/>
+                    </a:solidFill>
+                  </a:tcPr>
+                </a:tc>
+                <a:tc>
+                  <a:txBody>
+                    <a:bodyPr/>
+                    <a:lstStyle/>
+                    <a:p>
+                      <a:pPr algn="ctr"/>
+                      <a:r>
+                        <a:rPr sz="1300" b="0">
+                          <a:solidFill>
+                            <a:srgbClr val="F1F5F9"/>
+                          </a:solidFill>
+                          <a:latin typeface="Calibri"/>
+                        </a:rPr>
+                        <a:t>19-Oct-26</a:t>
+                      </a:r>
+                    </a:p>
+                  </a:txBody>
+                  <a:tcPr marL="73152" marR="73152" anchor="ctr">
+                    <a:lnL w="9525">
+                      <a:solidFill>
+                        <a:srgbClr val="334155"/>
+                      </a:solidFill>
+                    </a:lnL>
+                    <a:lnR w="9525">
+                      <a:solidFill>
+                        <a:srgbClr val="334155"/>
+                      </a:solidFill>
+                    </a:lnR>
+                    <a:lnT w="9525">
+                      <a:solidFill>
+                        <a:srgbClr val="334155"/>
+                      </a:solidFill>
+                    </a:lnT>
+                    <a:lnB w="9525">
+                      <a:solidFill>
+                        <a:srgbClr val="334155"/>
+                      </a:solidFill>
+                    </a:lnB>
+                    <a:solidFill>
+                      <a:srgbClr val="0F172A"/>
+                    </a:solidFill>
+                  </a:tcPr>
+                </a:tc>
+                <a:tc>
+                  <a:txBody>
+                    <a:bodyPr/>
+                    <a:lstStyle/>
+                    <a:p>
+                      <a:pPr algn="ctr"/>
+                      <a:r>
+                        <a:rPr sz="1100" b="0">
+                          <a:solidFill>
+                            <a:srgbClr val="F1F5F9"/>
+                          </a:solidFill>
+                          <a:latin typeface="Calibri"/>
+                        </a:rPr>
+                        <a:t>20-Oct → 28-Dec  (10w)</a:t>
+                      </a:r>
+                    </a:p>
+                  </a:txBody>
+                  <a:tcPr marL="73152" marR="73152" anchor="ctr">
+                    <a:lnL w="9525">
+                      <a:solidFill>
+                        <a:srgbClr val="334155"/>
+                      </a:solidFill>
+                    </a:lnL>
+                    <a:lnR w="9525">
+                      <a:solidFill>
+                        <a:srgbClr val="334155"/>
+                      </a:solidFill>
+                    </a:lnR>
+                    <a:lnT w="9525">
+                      <a:solidFill>
+                        <a:srgbClr val="334155"/>
+                      </a:solidFill>
+                    </a:lnT>
+                    <a:lnB w="9525">
+                      <a:solidFill>
+                        <a:srgbClr val="334155"/>
+                      </a:solidFill>
+                    </a:lnB>
+                    <a:solidFill>
+                      <a:srgbClr val="0F172A"/>
+                    </a:solidFill>
+                  </a:tcPr>
+                </a:tc>
+                <a:tc>
+                  <a:txBody>
+                    <a:bodyPr/>
+                    <a:lstStyle/>
+                    <a:p>
+                      <a:pPr algn="ctr"/>
+                      <a:r>
+                        <a:rPr sz="1100" b="0">
+                          <a:solidFill>
+                            <a:srgbClr val="F1F5F9"/>
+                          </a:solidFill>
+                          <a:latin typeface="Calibri"/>
+                        </a:rPr>
+                        <a:t>29-Dec → 11-Jan  (2w)</a:t>
+                      </a:r>
+                    </a:p>
+                  </a:txBody>
+                  <a:tcPr marL="73152" marR="73152" anchor="ctr">
+                    <a:lnL w="9525">
+                      <a:solidFill>
+                        <a:srgbClr val="334155"/>
+                      </a:solidFill>
+                    </a:lnL>
+                    <a:lnR w="9525">
+                      <a:solidFill>
+                        <a:srgbClr val="334155"/>
+                      </a:solidFill>
+                    </a:lnR>
+                    <a:lnT w="9525">
+                      <a:solidFill>
+                        <a:srgbClr val="334155"/>
+                      </a:solidFill>
+                    </a:lnT>
+                    <a:lnB w="9525">
+                      <a:solidFill>
+                        <a:srgbClr val="334155"/>
+                      </a:solidFill>
+                    </a:lnB>
+                    <a:solidFill>
+                      <a:srgbClr val="0F172A"/>
+                    </a:solidFill>
+                  </a:tcPr>
+                </a:tc>
+                <a:tc>
+                  <a:txBody>
+                    <a:bodyPr/>
+                    <a:lstStyle/>
+                    <a:p>
+                      <a:pPr algn="ctr"/>
+                      <a:r>
+                        <a:rPr sz="1100" b="0">
+                          <a:solidFill>
+                            <a:srgbClr val="F1F5F9"/>
+                          </a:solidFill>
+                          <a:latin typeface="Calibri"/>
+                        </a:rPr>
+                        <a:t>12-Jan → 08-Mar  (8w)</a:t>
+                      </a:r>
+                    </a:p>
+                  </a:txBody>
+                  <a:tcPr marL="73152" marR="73152" anchor="ctr">
+                    <a:lnL w="9525">
+                      <a:solidFill>
+                        <a:srgbClr val="334155"/>
+                      </a:solidFill>
+                    </a:lnL>
+                    <a:lnR w="9525">
+                      <a:solidFill>
+                        <a:srgbClr val="334155"/>
+                      </a:solidFill>
+                    </a:lnR>
+                    <a:lnT w="9525">
+                      <a:solidFill>
+                        <a:srgbClr val="334155"/>
+                      </a:solidFill>
+                    </a:lnT>
+                    <a:lnB w="9525">
+                      <a:solidFill>
+                        <a:srgbClr val="334155"/>
+                      </a:solidFill>
+                    </a:lnB>
+                    <a:solidFill>
+                      <a:srgbClr val="0F172A"/>
+                    </a:solidFill>
+                  </a:tcPr>
+                </a:tc>
+                <a:tc>
+                  <a:txBody>
+                    <a:bodyPr/>
+                    <a:lstStyle/>
+                    <a:p>
+                      <a:pPr algn="ctr"/>
+                      <a:r>
+                        <a:rPr sz="1100" b="0">
+                          <a:solidFill>
+                            <a:srgbClr val="F1F5F9"/>
+                          </a:solidFill>
+                          <a:latin typeface="Calibri"/>
+                        </a:rPr>
+                        <a:t>09-Mar → 03-May  (8w)</a:t>
+                      </a:r>
+                    </a:p>
+                  </a:txBody>
+                  <a:tcPr marL="73152" marR="73152" anchor="ctr">
+                    <a:lnL w="9525">
+                      <a:solidFill>
+                        <a:srgbClr val="334155"/>
+                      </a:solidFill>
+                    </a:lnL>
+                    <a:lnR w="9525">
+                      <a:solidFill>
+                        <a:srgbClr val="334155"/>
+                      </a:solidFill>
+                    </a:lnR>
+                    <a:lnT w="9525">
+                      <a:solidFill>
+                        <a:srgbClr val="334155"/>
+                      </a:solidFill>
+                    </a:lnT>
+                    <a:lnB w="9525">
+                      <a:solidFill>
+                        <a:srgbClr val="334155"/>
+                      </a:solidFill>
+                    </a:lnB>
+                    <a:solidFill>
+                      <a:srgbClr val="0F172A"/>
+                    </a:solidFill>
+                  </a:tcPr>
+                </a:tc>
+                <a:tc>
+                  <a:txBody>
+                    <a:bodyPr/>
+                    <a:lstStyle/>
+                    <a:p>
+                      <a:pPr algn="ctr"/>
+                      <a:r>
+                        <a:rPr sz="1300" b="1">
+                          <a:solidFill>
+                            <a:srgbClr val="F87171"/>
+                          </a:solidFill>
+                          <a:latin typeface="Calibri"/>
+                        </a:rPr>
+                        <a:t>04-May-27</a:t>
+                      </a:r>
+                    </a:p>
+                  </a:txBody>
+                  <a:tcPr marL="73152" marR="73152" anchor="ctr">
+                    <a:lnL w="9525">
+                      <a:solidFill>
+                        <a:srgbClr val="334155"/>
+                      </a:solidFill>
+                    </a:lnL>
+                    <a:lnR w="9525">
+                      <a:solidFill>
+                        <a:srgbClr val="334155"/>
+                      </a:solidFill>
+                    </a:lnR>
+                    <a:lnT w="9525">
+                      <a:solidFill>
+                        <a:srgbClr val="334155"/>
+                      </a:solidFill>
+                    </a:lnT>
+                    <a:lnB w="9525">
+                      <a:solidFill>
+                        <a:srgbClr val="334155"/>
+                      </a:solidFill>
+                    </a:lnB>
+                    <a:solidFill>
+                      <a:srgbClr val="0F172A"/>
+                    </a:solidFill>
+                  </a:tcPr>
+                </a:tc>
+              </a:tr>
+            </a:tbl>
+          </a:graphicData>
+        </a:graphic>
+      </p:graphicFrame>
+      <p:sp>
+        <p:nvSpPr>
+          <p:cNvPr id="5" name="TextBox 4"/>
+          <p:cNvSpPr txBox="1"/>
+          <p:nvPr/>
+        </p:nvSpPr>
+        <p:spPr>
+          <a:xfrm>
+            <a:off x="457200" y="3749039"/>
+            <a:ext cx="5486400" cy="320040"/>
+          </a:xfrm>
+          <a:prstGeom prst="rect">
+            <a:avLst/>
+          </a:prstGeom>
+          <a:noFill/>
+        </p:spPr>
+        <p:txBody>
+          <a:bodyPr wrap="square" lIns="0" rIns="0" tIns="0" bIns="0" anchor="t">
+            <a:spAutoFit/>
+          </a:bodyPr>
+          <a:lstStyle/>
+          <a:p>
+            <a:pPr algn="l"/>
+            <a:r>
+              <a:rPr sz="1600" b="1" i="0">
+                <a:solidFill>
+                  <a:srgbClr val="F1F5F9"/>
+                </a:solidFill>
+                <a:latin typeface="Calibri"/>
+              </a:rPr>
+              <a:t>Planning rules</a:t>
+            </a:r>
+          </a:p>
+        </p:txBody>
+      </p:sp>
+      <p:sp>
+        <p:nvSpPr>
+          <p:cNvPr id="6" name="TextBox 5"/>
+          <p:cNvSpPr txBox="1"/>
+          <p:nvPr/>
+        </p:nvSpPr>
+        <p:spPr>
+          <a:xfrm>
+            <a:off x="457200" y="4160520"/>
+            <a:ext cx="7772400" cy="2011680"/>
+          </a:xfrm>
+          <a:prstGeom prst="rect">
+            <a:avLst/>
+          </a:prstGeom>
+          <a:noFill/>
+        </p:spPr>
+        <p:txBody>
+          <a:bodyPr wrap="square" lIns="0" rIns="0" tIns="0" bIns="0">
+            <a:spAutoFit/>
+          </a:bodyPr>
+          <a:lstStyle/>
+          <a:p>
+            <a:pPr>
+              <a:spcAft>
+                <a:spcPts val="400"/>
+              </a:spcAft>
+            </a:pPr>
+            <a:r>
+              <a:rPr sz="1400">
+                <a:solidFill>
+                  <a:srgbClr val="F1F5F9"/>
+                </a:solidFill>
+                <a:latin typeface="Calibri"/>
+              </a:rPr>
+              <a:t>★ Contract Signed — project date (can be overridden per process)</a:t>
+            </a:r>
+          </a:p>
+          <a:p>
+            <a:pPr>
+              <a:spcAft>
+                <a:spcPts val="400"/>
+              </a:spcAft>
+            </a:pPr>
+            <a:r>
+              <a:rPr sz="1400">
+                <a:solidFill>
+                  <a:srgbClr val="F1F5F9"/>
+                </a:solidFill>
+                <a:latin typeface="Calibri"/>
+              </a:rPr>
+              <a:t>Hiring — 8 to 10 weeks standard, from the next working day after contract</a:t>
+            </a:r>
+          </a:p>
+          <a:p>
+            <a:pPr>
+              <a:spcAft>
+                <a:spcPts val="400"/>
+              </a:spcAft>
+            </a:pPr>
+            <a:r>
+              <a:rPr sz="1400">
+                <a:solidFill>
+                  <a:srgbClr val="F1F5F9"/>
+                </a:solidFill>
+                <a:latin typeface="Calibri"/>
+              </a:rPr>
+              <a:t>Pre-Onboarding — 2 weeks after hiring end date</a:t>
+            </a:r>
+          </a:p>
+          <a:p>
+            <a:pPr>
+              <a:spcAft>
+                <a:spcPts val="400"/>
+              </a:spcAft>
+            </a:pPr>
+            <a:r>
+              <a:rPr sz="1400">
+                <a:solidFill>
+                  <a:srgbClr val="F1F5F9"/>
+                </a:solidFill>
+                <a:latin typeface="Calibri"/>
+              </a:rPr>
+              <a:t>Knowledge Transfer — P2P 4w, OTC 4w, RTR 8w</a:t>
+            </a:r>
+          </a:p>
+          <a:p>
+            <a:pPr>
+              <a:spcAft>
+                <a:spcPts val="400"/>
+              </a:spcAft>
+            </a:pPr>
+            <a:r>
+              <a:rPr sz="1400">
+                <a:solidFill>
+                  <a:srgbClr val="F1F5F9"/>
+                </a:solidFill>
+                <a:latin typeface="Calibri"/>
+              </a:rPr>
+              <a:t>Guided Production — P2P 4w, OTC 4w, RTR 8w</a:t>
+            </a:r>
+          </a:p>
+          <a:p>
+            <a:pPr>
+              <a:spcAft>
+                <a:spcPts val="400"/>
+              </a:spcAft>
+            </a:pPr>
+            <a:r>
+              <a:rPr sz="1400">
+                <a:solidFill>
+                  <a:srgbClr val="F1F5F9"/>
+                </a:solidFill>
+                <a:latin typeface="Calibri"/>
+              </a:rPr>
+              <a:t>◆ Go-Live — next working day after Guided Production ends</a:t>
+            </a:r>
+          </a:p>
+        </p:txBody>
+      </p:sp>
+      <p:sp>
+        <p:nvSpPr>
+          <p:cNvPr id="7" name="TextBox 6"/>
+          <p:cNvSpPr txBox="1"/>
+          <p:nvPr/>
+        </p:nvSpPr>
+        <p:spPr>
+          <a:xfrm>
+            <a:off x="8778240" y="3749039"/>
+            <a:ext cx="2743200" cy="320040"/>
+          </a:xfrm>
+          <a:prstGeom prst="rect">
+            <a:avLst/>
+          </a:prstGeom>
+          <a:noFill/>
+        </p:spPr>
+        <p:txBody>
+          <a:bodyPr wrap="square" lIns="0" rIns="0" tIns="0" bIns="0" anchor="t">
+            <a:spAutoFit/>
+          </a:bodyPr>
+          <a:lstStyle/>
+          <a:p>
+            <a:pPr algn="l"/>
+            <a:r>
+              <a:rPr sz="1600" b="1" i="0">
+                <a:solidFill>
+                  <a:srgbClr val="F1F5F9"/>
+                </a:solidFill>
+                <a:latin typeface="Calibri"/>
+              </a:rPr>
+              <a:t>Colour key</a:t>
+            </a:r>
+          </a:p>
+        </p:txBody>
+      </p:sp>
+      <p:sp>
+        <p:nvSpPr>
+          <p:cNvPr id="8" name="Rounded Rectangle 7"/>
+          <p:cNvSpPr/>
+          <p:nvPr/>
+        </p:nvSpPr>
+        <p:spPr>
+          <a:xfrm>
+            <a:off x="8778240" y="4206240"/>
+            <a:ext cx="411480" cy="219456"/>
+          </a:xfrm>
+          <a:prstGeom prst="roundRect">
+            <a:avLst/>
+          </a:prstGeom>
+          <a:solidFill>
+            <a:srgbClr val="5B8FD0"/>
+          </a:solidFill>
+          <a:ln>
+            <a:noFill/>
+          </a:ln>
+        </p:spPr>
+        <p:txBody>
+          <a:bodyPr rtlCol="0" anchor="ctr"/>
+          <a:lstStyle/>
+          <a:p>
+            <a:pPr algn="ctr"/>
+          </a:p>
+        </p:txBody>
+      </p:sp>
+      <p:sp>
+        <p:nvSpPr>
+          <p:cNvPr id="9" name="TextBox 8"/>
+          <p:cNvSpPr txBox="1"/>
+          <p:nvPr/>
+        </p:nvSpPr>
+        <p:spPr>
+          <a:xfrm>
+            <a:off x="9326880" y="4178807"/>
+            <a:ext cx="2286000" cy="274320"/>
+          </a:xfrm>
+          <a:prstGeom prst="rect">
+            <a:avLst/>
+          </a:prstGeom>
+          <a:noFill/>
+        </p:spPr>
+        <p:txBody>
+          <a:bodyPr wrap="square" lIns="0" rIns="0" tIns="0" bIns="0" anchor="ctr">
+            <a:spAutoFit/>
+          </a:bodyPr>
+          <a:lstStyle/>
+          <a:p>
+            <a:pPr algn="l"/>
+            <a:r>
+              <a:rPr sz="1400" b="0" i="0">
+                <a:solidFill>
+                  <a:srgbClr val="F1F5F9"/>
+                </a:solidFill>
+                <a:latin typeface="Calibri"/>
+              </a:rPr>
+              <a:t>Hiring</a:t>
+            </a:r>
+          </a:p>
+        </p:txBody>
+      </p:sp>
+      <p:sp>
+        <p:nvSpPr>
+          <p:cNvPr id="10" name="Rounded Rectangle 9"/>
+          <p:cNvSpPr/>
+          <p:nvPr/>
+        </p:nvSpPr>
+        <p:spPr>
+          <a:xfrm>
+            <a:off x="8778240" y="4590288"/>
+            <a:ext cx="411480" cy="219456"/>
+          </a:xfrm>
+          <a:prstGeom prst="roundRect">
+            <a:avLst/>
+          </a:prstGeom>
+          <a:solidFill>
+            <a:srgbClr val="A9C6E8"/>
+          </a:solidFill>
+          <a:ln>
+            <a:noFill/>
+          </a:ln>
+        </p:spPr>
+        <p:txBody>
+          <a:bodyPr rtlCol="0" anchor="ctr"/>
+          <a:lstStyle/>
+          <a:p>
+            <a:pPr algn="ctr"/>
+          </a:p>
+        </p:txBody>
+      </p:sp>
+      <p:sp>
+        <p:nvSpPr>
+          <p:cNvPr id="11" name="TextBox 10"/>
+          <p:cNvSpPr txBox="1"/>
+          <p:nvPr/>
+        </p:nvSpPr>
+        <p:spPr>
+          <a:xfrm>
+            <a:off x="9326880" y="4562855"/>
+            <a:ext cx="2286000" cy="274320"/>
+          </a:xfrm>
+          <a:prstGeom prst="rect">
+            <a:avLst/>
+          </a:prstGeom>
+          <a:noFill/>
+        </p:spPr>
+        <p:txBody>
+          <a:bodyPr wrap="square" lIns="0" rIns="0" tIns="0" bIns="0" anchor="ctr">
+            <a:spAutoFit/>
+          </a:bodyPr>
+          <a:lstStyle/>
+          <a:p>
+            <a:pPr algn="l"/>
+            <a:r>
+              <a:rPr sz="1400" b="0" i="0">
+                <a:solidFill>
+                  <a:srgbClr val="F1F5F9"/>
+                </a:solidFill>
+                <a:latin typeface="Calibri"/>
+              </a:rPr>
+              <a:t>Pre-Onboarding</a:t>
+            </a:r>
+          </a:p>
+        </p:txBody>
+      </p:sp>
+      <p:sp>
+        <p:nvSpPr>
+          <p:cNvPr id="12" name="Rounded Rectangle 11"/>
+          <p:cNvSpPr/>
+          <p:nvPr/>
+        </p:nvSpPr>
+        <p:spPr>
+          <a:xfrm>
+            <a:off x="8778240" y="4974336"/>
+            <a:ext cx="411480" cy="219456"/>
+          </a:xfrm>
+          <a:prstGeom prst="roundRect">
+            <a:avLst/>
+          </a:prstGeom>
+          <a:solidFill>
+            <a:srgbClr val="F5B85A"/>
+          </a:solidFill>
+          <a:ln>
+            <a:noFill/>
+          </a:ln>
+        </p:spPr>
+        <p:txBody>
+          <a:bodyPr rtlCol="0" anchor="ctr"/>
+          <a:lstStyle/>
+          <a:p>
+            <a:pPr algn="ctr"/>
+          </a:p>
+        </p:txBody>
+      </p:sp>
+      <p:sp>
+        <p:nvSpPr>
+          <p:cNvPr id="13" name="TextBox 12"/>
+          <p:cNvSpPr txBox="1"/>
+          <p:nvPr/>
+        </p:nvSpPr>
+        <p:spPr>
+          <a:xfrm>
+            <a:off x="9326880" y="4946903"/>
+            <a:ext cx="2286000" cy="274320"/>
+          </a:xfrm>
+          <a:prstGeom prst="rect">
+            <a:avLst/>
+          </a:prstGeom>
+          <a:noFill/>
+        </p:spPr>
+        <p:txBody>
+          <a:bodyPr wrap="square" lIns="0" rIns="0" tIns="0" bIns="0" anchor="ctr">
+            <a:spAutoFit/>
+          </a:bodyPr>
+          <a:lstStyle/>
+          <a:p>
+            <a:pPr algn="l"/>
+            <a:r>
+              <a:rPr sz="1400" b="0" i="0">
+                <a:solidFill>
+                  <a:srgbClr val="F1F5F9"/>
+                </a:solidFill>
+                <a:latin typeface="Calibri"/>
+              </a:rPr>
+              <a:t>Knowledge Transfer</a:t>
+            </a:r>
+          </a:p>
+        </p:txBody>
+      </p:sp>
+      <p:sp>
+        <p:nvSpPr>
+          <p:cNvPr id="14" name="Rounded Rectangle 13"/>
+          <p:cNvSpPr/>
+          <p:nvPr/>
+        </p:nvSpPr>
+        <p:spPr>
+          <a:xfrm>
+            <a:off x="8778240" y="5358383"/>
+            <a:ext cx="411480" cy="219456"/>
+          </a:xfrm>
+          <a:prstGeom prst="roundRect">
+            <a:avLst/>
+          </a:prstGeom>
+          <a:solidFill>
+            <a:srgbClr val="A68BD6"/>
+          </a:solidFill>
+          <a:ln>
+            <a:noFill/>
+          </a:ln>
+        </p:spPr>
+        <p:txBody>
+          <a:bodyPr rtlCol="0" anchor="ctr"/>
+          <a:lstStyle/>
+          <a:p>
+            <a:pPr algn="ctr"/>
+          </a:p>
+        </p:txBody>
+      </p:sp>
+      <p:sp>
+        <p:nvSpPr>
+          <p:cNvPr id="15" name="TextBox 14"/>
+          <p:cNvSpPr txBox="1"/>
+          <p:nvPr/>
+        </p:nvSpPr>
+        <p:spPr>
+          <a:xfrm>
+            <a:off x="9326880" y="5330951"/>
+            <a:ext cx="2286000" cy="274320"/>
+          </a:xfrm>
+          <a:prstGeom prst="rect">
+            <a:avLst/>
+          </a:prstGeom>
+          <a:noFill/>
+        </p:spPr>
+        <p:txBody>
+          <a:bodyPr wrap="square" lIns="0" rIns="0" tIns="0" bIns="0" anchor="ctr">
+            <a:spAutoFit/>
+          </a:bodyPr>
+          <a:lstStyle/>
+          <a:p>
+            <a:pPr algn="l"/>
+            <a:r>
+              <a:rPr sz="1400" b="0" i="0">
+                <a:solidFill>
+                  <a:srgbClr val="F1F5F9"/>
+                </a:solidFill>
+                <a:latin typeface="Calibri"/>
+              </a:rPr>
+              <a:t>Guided Production</a:t>
+            </a:r>
+          </a:p>
+        </p:txBody>
+      </p:sp>
+      <p:sp>
+        <p:nvSpPr>
+          <p:cNvPr id="16" name="TextBox 15"/>
+          <p:cNvSpPr txBox="1"/>
+          <p:nvPr/>
+        </p:nvSpPr>
+        <p:spPr>
+          <a:xfrm>
+            <a:off x="457200" y="6537960"/>
+            <a:ext cx="8229600" cy="228600"/>
+          </a:xfrm>
+          <a:prstGeom prst="rect">
+            <a:avLst/>
+          </a:prstGeom>
+          <a:noFill/>
+        </p:spPr>
+        <p:txBody>
+          <a:bodyPr wrap="square" lIns="0" rIns="0" tIns="0" bIns="0" anchor="t">
+            <a:spAutoFit/>
+          </a:bodyPr>
+          <a:lstStyle/>
+          <a:p>
+            <a:pPr algn="l"/>
+            <a:r>
+              <a:rPr sz="1000" b="0" i="0">
+                <a:solidFill>
+                  <a:srgbClr val="94A3B8"/>
+                </a:solidFill>
+                <a:latin typeface="Calibri"/>
+              </a:rPr>
+              <a:t>Finance Transition Program  |  Acme Corp  |  Working days Mon–Fri; 1 week = 5 working days</a:t>
+            </a:r>
+          </a:p>
+        </p:txBody>
+      </p:sp>
+      <p:sp>
+        <p:nvSpPr>
+          <p:cNvPr id="17" name="TextBox 16"/>
+          <p:cNvSpPr txBox="1"/>
+          <p:nvPr/>
+        </p:nvSpPr>
+        <p:spPr>
+          <a:xfrm>
+            <a:off x="10820095" y="6537960"/>
+            <a:ext cx="914400" cy="228600"/>
+          </a:xfrm>
+          <a:prstGeom prst="rect">
+            <a:avLst/>
+          </a:prstGeom>
+          <a:noFill/>
+        </p:spPr>
+        <p:txBody>
+          <a:bodyPr wrap="square" lIns="0" rIns="0" tIns="0" bIns="0" anchor="t">
+            <a:spAutoFit/>
+          </a:bodyPr>
+          <a:lstStyle/>
+          <a:p>
+            <a:pPr algn="r"/>
+            <a:r>
+              <a:rPr sz="1000" b="0" i="0">
+                <a:solidFill>
+                  <a:srgbClr val="94A3B8"/>
+                </a:solidFill>
+                <a:latin typeface="Calibri"/>
+              </a:rPr>
+              <a:t>3</a:t>
+            </a:r>
+          </a:p>
+        </p:txBody>
+      </p:sp>
+      <p:sp>
+        <p:nvSpPr>
+          <p:cNvPr id="18" name="Theme switch"/>
+          <p:cNvSpPr/>
+          <p:nvPr/>
+        </p:nvSpPr>
+        <p:spPr>
+          <a:xfrm>
+            <a:off x="9960559" y="347472"/>
+            <a:ext cx="1810512" cy="402336"/>
+          </a:xfrm>
+          <a:prstGeom prst="roundRect">
+            <a:avLst>
+              <a:gd name="adj" fmla="val 50000"/>
+            </a:avLst>
+          </a:prstGeom>
+          <a:solidFill>
+            <a:srgbClr val="1E293B"/>
+          </a:solidFill>
+          <a:ln w="9525">
+            <a:solidFill>
+              <a:srgbClr val="334155"/>
+            </a:solidFill>
+          </a:ln>
+        </p:spPr>
+        <p:txBody>
+          <a:bodyPr rtlCol="0" anchor="ctr"/>
+          <a:lstStyle/>
+          <a:p>
+            <a:pPr algn="ctr"/>
+          </a:p>
+        </p:txBody>
+      </p:sp>
+      <p:sp>
+        <p:nvSpPr>
+          <p:cNvPr id="19" name="Theme light">
+            <a:hlinkClick action="ppaction://hlinksldjump" r:id="rId2"/>
+          </p:cNvPr>
+          <p:cNvSpPr/>
+          <p:nvPr/>
+        </p:nvSpPr>
+        <p:spPr>
+          <a:xfrm>
+            <a:off x="9997135" y="384048"/>
+            <a:ext cx="841247" cy="329184"/>
+          </a:xfrm>
+          <a:prstGeom prst="roundRect">
+            <a:avLst>
+              <a:gd name="adj" fmla="val 50000"/>
+            </a:avLst>
+          </a:prstGeom>
+          <a:solidFill>
+            <a:srgbClr val="1E293B"/>
+          </a:solidFill>
+          <a:ln>
+            <a:noFill/>
+          </a:ln>
+        </p:spPr>
+        <p:txBody>
+          <a:bodyPr rtlCol="0" anchor="ctr" lIns="0" rIns="0" tIns="0" bIns="0" wrap="none"/>
+          <a:lstStyle/>
+          <a:p>
+            <a:pPr algn="ctr"/>
+            <a:r>
+              <a:rPr sz="1100" b="0">
+                <a:solidFill>
+                  <a:srgbClr val="94A3B8"/>
+                </a:solidFill>
+                <a:latin typeface="Calibri"/>
+              </a:rPr>
+              <a:t>☀ Light</a:t>
+            </a:r>
+          </a:p>
+        </p:txBody>
+      </p:sp>
+      <p:sp>
+        <p:nvSpPr>
+          <p:cNvPr id="20" name="Theme dark"/>
+          <p:cNvSpPr/>
+          <p:nvPr/>
+        </p:nvSpPr>
+        <p:spPr>
+          <a:xfrm>
+            <a:off x="10893247" y="384048"/>
+            <a:ext cx="841247" cy="329184"/>
+          </a:xfrm>
+          <a:prstGeom prst="roundRect">
+            <a:avLst>
+              <a:gd name="adj" fmla="val 50000"/>
+            </a:avLst>
+          </a:prstGeom>
+          <a:solidFill>
+            <a:srgbClr val="F1F5F9"/>
+          </a:solidFill>
+          <a:ln>
+            <a:noFill/>
+          </a:ln>
+        </p:spPr>
+        <p:txBody>
+          <a:bodyPr rtlCol="0" anchor="ctr" lIns="0" rIns="0" tIns="0" bIns="0" wrap="none"/>
+          <a:lstStyle/>
+          <a:p>
+            <a:pPr algn="ctr"/>
+            <a:r>
+              <a:rPr sz="1100" b="1">
+                <a:solidFill>
+                  <a:srgbClr val="0F172A"/>
+                </a:solidFill>
+                <a:latin typeface="Calibri"/>
+              </a:rPr>
+              <a:t>☾ Dark</a:t>
             </a:r>
           </a:p>
         </p:txBody>
